--- a/docs/営業改革_部長会進捗共有_20260714.pptx
+++ b/docs/営業改革_部長会進捗共有_20260714.pptx
@@ -17,6 +17,8 @@
     <p:sldId id="265" r:id="rId16"/>
     <p:sldId id="266" r:id="rId17"/>
     <p:sldId id="267" r:id="rId18"/>
+    <p:sldId id="268" r:id="rId19"/>
+    <p:sldId id="269" r:id="rId20"/>
   </p:sldIdLst>
   <p:sldSz cx="12191695" cy="6858000" type="screen4x3"/>
   <p:notesSz cx="6858000" cy="9144000"/>
@@ -3423,7 +3425,7 @@
                 <a:ea typeface="Yu Gothic"/>
                 <a:cs typeface="Yu Gothic"/>
               </a:rPr>
-              <a:t>お願い</a:t>
+              <a:t>進捗 ④</a:t>
             </a:r>
           </a:p>
         </p:txBody>
@@ -3464,7 +3466,7 @@
                 <a:ea typeface="Yu Gothic"/>
                 <a:cs typeface="Yu Gothic"/>
               </a:rPr>
-              <a:t>今週から、この4つをお願いします</a:t>
+              <a:t>用意した道具立て — 一式そろいました</a:t>
             </a:r>
           </a:p>
         </p:txBody>
@@ -3521,8 +3523,8 @@
         </p:nvSpPr>
         <p:spPr>
           <a:xfrm>
-            <a:off x="502920" y="1920240"/>
-            <a:ext cx="11183112" cy="932688"/>
+            <a:off x="502920" y="1956816"/>
+            <a:ext cx="5504688" cy="969264"/>
           </a:xfrm>
           <a:prstGeom prst="rect">
             <a:avLst/>
@@ -3567,8 +3569,8 @@
         </p:nvSpPr>
         <p:spPr>
           <a:xfrm>
-            <a:off x="502920" y="1920240"/>
-            <a:ext cx="64008" cy="932688"/>
+            <a:off x="502920" y="1956816"/>
+            <a:ext cx="64008" cy="969264"/>
           </a:xfrm>
           <a:prstGeom prst="rect">
             <a:avLst/>
@@ -3605,73 +3607,14 @@
       </p:sp>
       <p:sp>
         <p:nvSpPr>
-          <p:cNvPr id="7" name="Oval 6"/>
-          <p:cNvSpPr/>
-          <p:nvPr/>
-        </p:nvSpPr>
-        <p:spPr>
-          <a:xfrm>
-            <a:off x="722376" y="2157984"/>
-            <a:ext cx="457200" cy="457200"/>
-          </a:xfrm>
-          <a:prstGeom prst="ellipse">
-            <a:avLst/>
-          </a:prstGeom>
-          <a:solidFill>
-            <a:srgbClr val="7823DC"/>
-          </a:solidFill>
-          <a:ln>
-            <a:noFill/>
-          </a:ln>
-          <a:effectLst/>
-        </p:spPr>
-        <p:style>
-          <a:lnRef idx="1">
-            <a:schemeClr val="accent1"/>
-          </a:lnRef>
-          <a:fillRef idx="3">
-            <a:schemeClr val="accent1"/>
-          </a:fillRef>
-          <a:effectRef idx="2">
-            <a:schemeClr val="accent1"/>
-          </a:effectRef>
-          <a:fontRef idx="minor">
-            <a:schemeClr val="lt1"/>
-          </a:fontRef>
-        </p:style>
-        <p:txBody>
-          <a:bodyPr rtlCol="0" anchor="ctr" wrap="none" lIns="0" rIns="0" tIns="0" bIns="0"/>
-          <a:lstStyle/>
-          <a:p>
-            <a:pPr algn="ctr">
-              <a:spcAft>
-                <a:spcPts val="0"/>
-              </a:spcAft>
-            </a:pPr>
-            <a:r>
-              <a:rPr sz="1800" b="1" i="0">
-                <a:solidFill>
-                  <a:srgbClr val="FFFFFF"/>
-                </a:solidFill>
-                <a:latin typeface="Yu Gothic"/>
-                <a:ea typeface="Yu Gothic"/>
-                <a:cs typeface="Yu Gothic"/>
-              </a:rPr>
-              <a:t>1</a:t>
-            </a:r>
-          </a:p>
-        </p:txBody>
-      </p:sp>
-      <p:sp>
-        <p:nvSpPr>
-          <p:cNvPr id="8" name="TextBox 7"/>
+          <p:cNvPr id="7" name="TextBox 6"/>
           <p:cNvSpPr txBox="1"/>
           <p:nvPr/>
         </p:nvSpPr>
         <p:spPr>
           <a:xfrm>
-            <a:off x="1380744" y="2048256"/>
-            <a:ext cx="10104120" cy="713232"/>
+            <a:off x="758952" y="2103120"/>
+            <a:ext cx="5047488" cy="694944"/>
           </a:xfrm>
           <a:prstGeom prst="rect">
             <a:avLst/>
@@ -3698,7 +3641,7 @@
                 <a:ea typeface="Yu Gothic"/>
                 <a:cs typeface="Yu Gothic"/>
               </a:rPr>
-              <a:t>確認会の日程確保（お一人2〜3時間）</a:t>
+              <a:t>棚卸し・スコアリングマスター</a:t>
             </a:r>
           </a:p>
           <a:p>
@@ -3710,27 +3653,27 @@
             <a:r>
               <a:rPr sz="1050" b="0" i="0">
                 <a:solidFill>
-                  <a:srgbClr val="262630"/>
+                  <a:srgbClr val="5F5F6E"/>
                 </a:solidFill>
                 <a:latin typeface="Yu Gothic"/>
                 <a:ea typeface="Yu Gothic"/>
                 <a:cs typeface="Yu Gothic"/>
               </a:rPr>
-              <a:t>担当者の確認と事実の確認だけ。事前準備は不要です</a:t>
-            </a:r>
-          </a:p>
-        </p:txBody>
-      </p:sp>
-      <p:sp>
-        <p:nvSpPr>
-          <p:cNvPr id="9" name="Rectangle 8"/>
+              <a:t>採点定義込み</a:t>
+            </a:r>
+          </a:p>
+        </p:txBody>
+      </p:sp>
+      <p:sp>
+        <p:nvSpPr>
+          <p:cNvPr id="8" name="Rectangle 7"/>
           <p:cNvSpPr/>
           <p:nvPr/>
         </p:nvSpPr>
         <p:spPr>
           <a:xfrm>
-            <a:off x="502920" y="2999232"/>
-            <a:ext cx="11183112" cy="932688"/>
+            <a:off x="6181344" y="1956816"/>
+            <a:ext cx="5504688" cy="969264"/>
           </a:xfrm>
           <a:prstGeom prst="rect">
             <a:avLst/>
@@ -3769,14 +3712,14 @@
       </p:sp>
       <p:sp>
         <p:nvSpPr>
-          <p:cNvPr id="10" name="Rectangle 9"/>
+          <p:cNvPr id="9" name="Rectangle 8"/>
           <p:cNvSpPr/>
           <p:nvPr/>
         </p:nvSpPr>
         <p:spPr>
           <a:xfrm>
-            <a:off x="502920" y="2999232"/>
-            <a:ext cx="64008" cy="932688"/>
+            <a:off x="6181344" y="1956816"/>
+            <a:ext cx="64008" cy="969264"/>
           </a:xfrm>
           <a:prstGeom prst="rect">
             <a:avLst/>
@@ -3813,73 +3756,14 @@
       </p:sp>
       <p:sp>
         <p:nvSpPr>
-          <p:cNvPr id="11" name="Oval 10"/>
-          <p:cNvSpPr/>
-          <p:nvPr/>
-        </p:nvSpPr>
-        <p:spPr>
-          <a:xfrm>
-            <a:off x="722376" y="3236976"/>
-            <a:ext cx="457200" cy="457200"/>
-          </a:xfrm>
-          <a:prstGeom prst="ellipse">
-            <a:avLst/>
-          </a:prstGeom>
-          <a:solidFill>
-            <a:srgbClr val="7823DC"/>
-          </a:solidFill>
-          <a:ln>
-            <a:noFill/>
-          </a:ln>
-          <a:effectLst/>
-        </p:spPr>
-        <p:style>
-          <a:lnRef idx="1">
-            <a:schemeClr val="accent1"/>
-          </a:lnRef>
-          <a:fillRef idx="3">
-            <a:schemeClr val="accent1"/>
-          </a:fillRef>
-          <a:effectRef idx="2">
-            <a:schemeClr val="accent1"/>
-          </a:effectRef>
-          <a:fontRef idx="minor">
-            <a:schemeClr val="lt1"/>
-          </a:fontRef>
-        </p:style>
-        <p:txBody>
-          <a:bodyPr rtlCol="0" anchor="ctr" wrap="none" lIns="0" rIns="0" tIns="0" bIns="0"/>
-          <a:lstStyle/>
-          <a:p>
-            <a:pPr algn="ctr">
-              <a:spcAft>
-                <a:spcPts val="0"/>
-              </a:spcAft>
-            </a:pPr>
-            <a:r>
-              <a:rPr sz="1800" b="1" i="0">
-                <a:solidFill>
-                  <a:srgbClr val="FFFFFF"/>
-                </a:solidFill>
-                <a:latin typeface="Yu Gothic"/>
-                <a:ea typeface="Yu Gothic"/>
-                <a:cs typeface="Yu Gothic"/>
-              </a:rPr>
-              <a:t>2</a:t>
-            </a:r>
-          </a:p>
-        </p:txBody>
-      </p:sp>
-      <p:sp>
-        <p:nvSpPr>
-          <p:cNvPr id="12" name="TextBox 11"/>
+          <p:cNvPr id="10" name="TextBox 9"/>
           <p:cNvSpPr txBox="1"/>
           <p:nvPr/>
         </p:nvSpPr>
         <p:spPr>
           <a:xfrm>
-            <a:off x="1380744" y="3127248"/>
-            <a:ext cx="10104120" cy="713232"/>
+            <a:off x="6437376" y="2103120"/>
+            <a:ext cx="5047488" cy="694944"/>
           </a:xfrm>
           <a:prstGeom prst="rect">
             <a:avLst/>
@@ -3906,7 +3790,7 @@
                 <a:ea typeface="Yu Gothic"/>
                 <a:cs typeface="Yu Gothic"/>
               </a:rPr>
-              <a:t>担当確認一覧への対応</a:t>
+              <a:t>工数申告テンプレート</a:t>
             </a:r>
           </a:p>
           <a:p>
@@ -3916,29 +3800,29 @@
               </a:spcAft>
             </a:pPr>
             <a:r>
-              <a:rPr sz="1050" b="0" i="0">
-                <a:solidFill>
-                  <a:srgbClr val="262630"/>
+              <a:rPr sz="1050" b="1" i="0">
+                <a:solidFill>
+                  <a:srgbClr val="C03030"/>
                 </a:solidFill>
                 <a:latin typeface="Yu Gothic"/>
                 <a:ea typeface="Yu Gothic"/>
                 <a:cs typeface="Yu Gothic"/>
               </a:rPr>
-              <a:t>事前に配布します。当日冒頭15分で確定します</a:t>
-            </a:r>
-          </a:p>
-        </p:txBody>
-      </p:sp>
-      <p:sp>
-        <p:nvSpPr>
-          <p:cNvPr id="13" name="Rectangle 12"/>
+              <a:t>評価には一切使いません</a:t>
+            </a:r>
+          </a:p>
+        </p:txBody>
+      </p:sp>
+      <p:sp>
+        <p:nvSpPr>
+          <p:cNvPr id="11" name="Rectangle 10"/>
           <p:cNvSpPr/>
           <p:nvPr/>
         </p:nvSpPr>
         <p:spPr>
           <a:xfrm>
-            <a:off x="502920" y="4078224"/>
-            <a:ext cx="11183112" cy="932688"/>
+            <a:off x="502920" y="3090672"/>
+            <a:ext cx="5504688" cy="969264"/>
           </a:xfrm>
           <a:prstGeom prst="rect">
             <a:avLst/>
@@ -3977,14 +3861,14 @@
       </p:sp>
       <p:sp>
         <p:nvSpPr>
-          <p:cNvPr id="14" name="Rectangle 13"/>
+          <p:cNvPr id="12" name="Rectangle 11"/>
           <p:cNvSpPr/>
           <p:nvPr/>
         </p:nvSpPr>
         <p:spPr>
           <a:xfrm>
-            <a:off x="502920" y="4078224"/>
-            <a:ext cx="64008" cy="932688"/>
+            <a:off x="502920" y="3090672"/>
+            <a:ext cx="64008" cy="969264"/>
           </a:xfrm>
           <a:prstGeom prst="rect">
             <a:avLst/>
@@ -4021,73 +3905,14 @@
       </p:sp>
       <p:sp>
         <p:nvSpPr>
-          <p:cNvPr id="15" name="Oval 14"/>
-          <p:cNvSpPr/>
-          <p:nvPr/>
-        </p:nvSpPr>
-        <p:spPr>
-          <a:xfrm>
-            <a:off x="722376" y="4315968"/>
-            <a:ext cx="457200" cy="457200"/>
-          </a:xfrm>
-          <a:prstGeom prst="ellipse">
-            <a:avLst/>
-          </a:prstGeom>
-          <a:solidFill>
-            <a:srgbClr val="7823DC"/>
-          </a:solidFill>
-          <a:ln>
-            <a:noFill/>
-          </a:ln>
-          <a:effectLst/>
-        </p:spPr>
-        <p:style>
-          <a:lnRef idx="1">
-            <a:schemeClr val="accent1"/>
-          </a:lnRef>
-          <a:fillRef idx="3">
-            <a:schemeClr val="accent1"/>
-          </a:fillRef>
-          <a:effectRef idx="2">
-            <a:schemeClr val="accent1"/>
-          </a:effectRef>
-          <a:fontRef idx="minor">
-            <a:schemeClr val="lt1"/>
-          </a:fontRef>
-        </p:style>
-        <p:txBody>
-          <a:bodyPr rtlCol="0" anchor="ctr" wrap="none" lIns="0" rIns="0" tIns="0" bIns="0"/>
-          <a:lstStyle/>
-          <a:p>
-            <a:pPr algn="ctr">
-              <a:spcAft>
-                <a:spcPts val="0"/>
-              </a:spcAft>
-            </a:pPr>
-            <a:r>
-              <a:rPr sz="1800" b="1" i="0">
-                <a:solidFill>
-                  <a:srgbClr val="FFFFFF"/>
-                </a:solidFill>
-                <a:latin typeface="Yu Gothic"/>
-                <a:ea typeface="Yu Gothic"/>
-                <a:cs typeface="Yu Gothic"/>
-              </a:rPr>
-              <a:t>3</a:t>
-            </a:r>
-          </a:p>
-        </p:txBody>
-      </p:sp>
-      <p:sp>
-        <p:nvSpPr>
-          <p:cNvPr id="16" name="TextBox 15"/>
+          <p:cNvPr id="13" name="TextBox 12"/>
           <p:cNvSpPr txBox="1"/>
           <p:nvPr/>
         </p:nvSpPr>
         <p:spPr>
           <a:xfrm>
-            <a:off x="1380744" y="4206240"/>
-            <a:ext cx="10104120" cy="713232"/>
+            <a:off x="758952" y="3236976"/>
+            <a:ext cx="5047488" cy="694944"/>
           </a:xfrm>
           <a:prstGeom prst="rect">
             <a:avLst/>
@@ -4114,7 +3939,7 @@
                 <a:ea typeface="Yu Gothic"/>
                 <a:cs typeface="Yu Gothic"/>
               </a:rPr>
-              <a:t>分科会の初回日程</a:t>
+              <a:t>KPI・決定ログ・90日計画</a:t>
             </a:r>
           </a:p>
           <a:p>
@@ -4126,27 +3951,27 @@
             <a:r>
               <a:rPr sz="1050" b="0" i="0">
                 <a:solidFill>
-                  <a:srgbClr val="262630"/>
+                  <a:srgbClr val="5F5F6E"/>
                 </a:solidFill>
                 <a:latin typeface="Yu Gothic"/>
                 <a:ea typeface="Yu Gothic"/>
                 <a:cs typeface="Yu Gothic"/>
               </a:rPr>
-              <a:t>リーダーの皆さんと今週中に固めます</a:t>
-            </a:r>
-          </a:p>
-        </p:txBody>
-      </p:sp>
-      <p:sp>
-        <p:nvSpPr>
-          <p:cNvPr id="17" name="Rectangle 16"/>
+              <a:t>進捗と決定を残す</a:t>
+            </a:r>
+          </a:p>
+        </p:txBody>
+      </p:sp>
+      <p:sp>
+        <p:nvSpPr>
+          <p:cNvPr id="14" name="Rectangle 13"/>
           <p:cNvSpPr/>
           <p:nvPr/>
         </p:nvSpPr>
         <p:spPr>
           <a:xfrm>
-            <a:off x="502920" y="5157216"/>
-            <a:ext cx="11183112" cy="932688"/>
+            <a:off x="6181344" y="3090672"/>
+            <a:ext cx="5504688" cy="969264"/>
           </a:xfrm>
           <a:prstGeom prst="rect">
             <a:avLst/>
@@ -4185,14 +4010,459 @@
       </p:sp>
       <p:sp>
         <p:nvSpPr>
+          <p:cNvPr id="15" name="Rectangle 14"/>
+          <p:cNvSpPr/>
+          <p:nvPr/>
+        </p:nvSpPr>
+        <p:spPr>
+          <a:xfrm>
+            <a:off x="6181344" y="3090672"/>
+            <a:ext cx="64008" cy="969264"/>
+          </a:xfrm>
+          <a:prstGeom prst="rect">
+            <a:avLst/>
+          </a:prstGeom>
+          <a:solidFill>
+            <a:srgbClr val="7823DC"/>
+          </a:solidFill>
+          <a:ln>
+            <a:noFill/>
+          </a:ln>
+          <a:effectLst/>
+        </p:spPr>
+        <p:style>
+          <a:lnRef idx="1">
+            <a:schemeClr val="accent1"/>
+          </a:lnRef>
+          <a:fillRef idx="3">
+            <a:schemeClr val="accent1"/>
+          </a:fillRef>
+          <a:effectRef idx="2">
+            <a:schemeClr val="accent1"/>
+          </a:effectRef>
+          <a:fontRef idx="minor">
+            <a:schemeClr val="lt1"/>
+          </a:fontRef>
+        </p:style>
+        <p:txBody>
+          <a:bodyPr rtlCol="0" anchor="ctr"/>
+          <a:lstStyle/>
+          <a:p>
+            <a:pPr algn="ctr"/>
+          </a:p>
+        </p:txBody>
+      </p:sp>
+      <p:sp>
+        <p:nvSpPr>
+          <p:cNvPr id="16" name="TextBox 15"/>
+          <p:cNvSpPr txBox="1"/>
+          <p:nvPr/>
+        </p:nvSpPr>
+        <p:spPr>
+          <a:xfrm>
+            <a:off x="6437376" y="3236976"/>
+            <a:ext cx="5047488" cy="694944"/>
+          </a:xfrm>
+          <a:prstGeom prst="rect">
+            <a:avLst/>
+          </a:prstGeom>
+          <a:noFill/>
+        </p:spPr>
+        <p:txBody>
+          <a:bodyPr wrap="square" lIns="0" rIns="0" tIns="0" bIns="0" anchor="ctr">
+            <a:spAutoFit/>
+          </a:bodyPr>
+          <a:lstStyle/>
+          <a:p>
+            <a:pPr algn="l">
+              <a:spcAft>
+                <a:spcPts val="400"/>
+              </a:spcAft>
+            </a:pPr>
+            <a:r>
+              <a:rPr sz="1300" b="1" i="0">
+                <a:solidFill>
+                  <a:srgbClr val="3A106E"/>
+                </a:solidFill>
+                <a:latin typeface="Yu Gothic"/>
+                <a:ea typeface="Yu Gothic"/>
+                <a:cs typeface="Yu Gothic"/>
+              </a:rPr>
+              <a:t>会議のアジェンダ・議事録様式</a:t>
+            </a:r>
+          </a:p>
+          <a:p>
+            <a:pPr algn="l">
+              <a:spcAft>
+                <a:spcPts val="0"/>
+              </a:spcAft>
+            </a:pPr>
+            <a:r>
+              <a:rPr sz="1050" b="0" i="0">
+                <a:solidFill>
+                  <a:srgbClr val="5F5F6E"/>
+                </a:solidFill>
+                <a:latin typeface="Yu Gothic"/>
+                <a:ea typeface="Yu Gothic"/>
+                <a:cs typeface="Yu Gothic"/>
+              </a:rPr>
+              <a:t>会議を軽く回す</a:t>
+            </a:r>
+          </a:p>
+        </p:txBody>
+      </p:sp>
+      <p:sp>
+        <p:nvSpPr>
+          <p:cNvPr id="17" name="Rectangle 16"/>
+          <p:cNvSpPr/>
+          <p:nvPr/>
+        </p:nvSpPr>
+        <p:spPr>
+          <a:xfrm>
+            <a:off x="502920" y="4224528"/>
+            <a:ext cx="5504688" cy="969264"/>
+          </a:xfrm>
+          <a:prstGeom prst="rect">
+            <a:avLst/>
+          </a:prstGeom>
+          <a:solidFill>
+            <a:srgbClr val="FFFFFF"/>
+          </a:solidFill>
+          <a:ln w="9525">
+            <a:solidFill>
+              <a:srgbClr val="D9D9E0"/>
+            </a:solidFill>
+          </a:ln>
+          <a:effectLst/>
+        </p:spPr>
+        <p:style>
+          <a:lnRef idx="1">
+            <a:schemeClr val="accent1"/>
+          </a:lnRef>
+          <a:fillRef idx="3">
+            <a:schemeClr val="accent1"/>
+          </a:fillRef>
+          <a:effectRef idx="2">
+            <a:schemeClr val="accent1"/>
+          </a:effectRef>
+          <a:fontRef idx="minor">
+            <a:schemeClr val="lt1"/>
+          </a:fontRef>
+        </p:style>
+        <p:txBody>
+          <a:bodyPr rtlCol="0" anchor="ctr"/>
+          <a:lstStyle/>
+          <a:p>
+            <a:pPr algn="ctr"/>
+          </a:p>
+        </p:txBody>
+      </p:sp>
+      <p:sp>
+        <p:nvSpPr>
           <p:cNvPr id="18" name="Rectangle 17"/>
           <p:cNvSpPr/>
           <p:nvPr/>
         </p:nvSpPr>
         <p:spPr>
           <a:xfrm>
-            <a:off x="502920" y="5157216"/>
-            <a:ext cx="64008" cy="932688"/>
+            <a:off x="502920" y="4224528"/>
+            <a:ext cx="64008" cy="969264"/>
+          </a:xfrm>
+          <a:prstGeom prst="rect">
+            <a:avLst/>
+          </a:prstGeom>
+          <a:solidFill>
+            <a:srgbClr val="7823DC"/>
+          </a:solidFill>
+          <a:ln>
+            <a:noFill/>
+          </a:ln>
+          <a:effectLst/>
+        </p:spPr>
+        <p:style>
+          <a:lnRef idx="1">
+            <a:schemeClr val="accent1"/>
+          </a:lnRef>
+          <a:fillRef idx="3">
+            <a:schemeClr val="accent1"/>
+          </a:fillRef>
+          <a:effectRef idx="2">
+            <a:schemeClr val="accent1"/>
+          </a:effectRef>
+          <a:fontRef idx="minor">
+            <a:schemeClr val="lt1"/>
+          </a:fontRef>
+        </p:style>
+        <p:txBody>
+          <a:bodyPr rtlCol="0" anchor="ctr"/>
+          <a:lstStyle/>
+          <a:p>
+            <a:pPr algn="ctr"/>
+          </a:p>
+        </p:txBody>
+      </p:sp>
+      <p:sp>
+        <p:nvSpPr>
+          <p:cNvPr id="19" name="TextBox 18"/>
+          <p:cNvSpPr txBox="1"/>
+          <p:nvPr/>
+        </p:nvSpPr>
+        <p:spPr>
+          <a:xfrm>
+            <a:off x="758952" y="4370832"/>
+            <a:ext cx="5047488" cy="694944"/>
+          </a:xfrm>
+          <a:prstGeom prst="rect">
+            <a:avLst/>
+          </a:prstGeom>
+          <a:noFill/>
+        </p:spPr>
+        <p:txBody>
+          <a:bodyPr wrap="square" lIns="0" rIns="0" tIns="0" bIns="0" anchor="ctr">
+            <a:spAutoFit/>
+          </a:bodyPr>
+          <a:lstStyle/>
+          <a:p>
+            <a:pPr algn="l">
+              <a:spcAft>
+                <a:spcPts val="400"/>
+              </a:spcAft>
+            </a:pPr>
+            <a:r>
+              <a:rPr sz="1300" b="1" i="0">
+                <a:solidFill>
+                  <a:srgbClr val="3A106E"/>
+                </a:solidFill>
+                <a:latin typeface="Yu Gothic"/>
+                <a:ea typeface="Yu Gothic"/>
+                <a:cs typeface="Yu Gothic"/>
+              </a:rPr>
+              <a:t>STOの設計書と運用指南書</a:t>
+            </a:r>
+          </a:p>
+          <a:p>
+            <a:pPr algn="l">
+              <a:spcAft>
+                <a:spcPts val="0"/>
+              </a:spcAft>
+            </a:pPr>
+            <a:r>
+              <a:rPr sz="1050" b="0" i="0">
+                <a:solidFill>
+                  <a:srgbClr val="5F5F6E"/>
+                </a:solidFill>
+                <a:latin typeface="Yu Gothic"/>
+                <a:ea typeface="Yu Gothic"/>
+                <a:cs typeface="Yu Gothic"/>
+              </a:rPr>
+              <a:t>役割別の実務マニュアル</a:t>
+            </a:r>
+          </a:p>
+        </p:txBody>
+      </p:sp>
+      <p:sp>
+        <p:nvSpPr>
+          <p:cNvPr id="20" name="Rectangle 19"/>
+          <p:cNvSpPr/>
+          <p:nvPr/>
+        </p:nvSpPr>
+        <p:spPr>
+          <a:xfrm>
+            <a:off x="6181344" y="4224528"/>
+            <a:ext cx="5504688" cy="969264"/>
+          </a:xfrm>
+          <a:prstGeom prst="rect">
+            <a:avLst/>
+          </a:prstGeom>
+          <a:solidFill>
+            <a:srgbClr val="FFFFFF"/>
+          </a:solidFill>
+          <a:ln w="9525">
+            <a:solidFill>
+              <a:srgbClr val="D9D9E0"/>
+            </a:solidFill>
+          </a:ln>
+          <a:effectLst/>
+        </p:spPr>
+        <p:style>
+          <a:lnRef idx="1">
+            <a:schemeClr val="accent1"/>
+          </a:lnRef>
+          <a:fillRef idx="3">
+            <a:schemeClr val="accent1"/>
+          </a:fillRef>
+          <a:effectRef idx="2">
+            <a:schemeClr val="accent1"/>
+          </a:effectRef>
+          <a:fontRef idx="minor">
+            <a:schemeClr val="lt1"/>
+          </a:fontRef>
+        </p:style>
+        <p:txBody>
+          <a:bodyPr rtlCol="0" anchor="ctr"/>
+          <a:lstStyle/>
+          <a:p>
+            <a:pPr algn="ctr"/>
+          </a:p>
+        </p:txBody>
+      </p:sp>
+      <p:sp>
+        <p:nvSpPr>
+          <p:cNvPr id="21" name="Rectangle 20"/>
+          <p:cNvSpPr/>
+          <p:nvPr/>
+        </p:nvSpPr>
+        <p:spPr>
+          <a:xfrm>
+            <a:off x="6181344" y="4224528"/>
+            <a:ext cx="64008" cy="969264"/>
+          </a:xfrm>
+          <a:prstGeom prst="rect">
+            <a:avLst/>
+          </a:prstGeom>
+          <a:solidFill>
+            <a:srgbClr val="7823DC"/>
+          </a:solidFill>
+          <a:ln>
+            <a:noFill/>
+          </a:ln>
+          <a:effectLst/>
+        </p:spPr>
+        <p:style>
+          <a:lnRef idx="1">
+            <a:schemeClr val="accent1"/>
+          </a:lnRef>
+          <a:fillRef idx="3">
+            <a:schemeClr val="accent1"/>
+          </a:fillRef>
+          <a:effectRef idx="2">
+            <a:schemeClr val="accent1"/>
+          </a:effectRef>
+          <a:fontRef idx="minor">
+            <a:schemeClr val="lt1"/>
+          </a:fontRef>
+        </p:style>
+        <p:txBody>
+          <a:bodyPr rtlCol="0" anchor="ctr"/>
+          <a:lstStyle/>
+          <a:p>
+            <a:pPr algn="ctr"/>
+          </a:p>
+        </p:txBody>
+      </p:sp>
+      <p:sp>
+        <p:nvSpPr>
+          <p:cNvPr id="22" name="TextBox 21"/>
+          <p:cNvSpPr txBox="1"/>
+          <p:nvPr/>
+        </p:nvSpPr>
+        <p:spPr>
+          <a:xfrm>
+            <a:off x="6437376" y="4370832"/>
+            <a:ext cx="5047488" cy="694944"/>
+          </a:xfrm>
+          <a:prstGeom prst="rect">
+            <a:avLst/>
+          </a:prstGeom>
+          <a:noFill/>
+        </p:spPr>
+        <p:txBody>
+          <a:bodyPr wrap="square" lIns="0" rIns="0" tIns="0" bIns="0" anchor="ctr">
+            <a:spAutoFit/>
+          </a:bodyPr>
+          <a:lstStyle/>
+          <a:p>
+            <a:pPr algn="l">
+              <a:spcAft>
+                <a:spcPts val="400"/>
+              </a:spcAft>
+            </a:pPr>
+            <a:r>
+              <a:rPr sz="1300" b="1" i="0">
+                <a:solidFill>
+                  <a:srgbClr val="3A106E"/>
+                </a:solidFill>
+                <a:latin typeface="Yu Gothic"/>
+                <a:ea typeface="Yu Gothic"/>
+                <a:cs typeface="Yu Gothic"/>
+              </a:rPr>
+              <a:t>資料一覧</a:t>
+            </a:r>
+          </a:p>
+          <a:p>
+            <a:pPr algn="l">
+              <a:spcAft>
+                <a:spcPts val="0"/>
+              </a:spcAft>
+            </a:pPr>
+            <a:r>
+              <a:rPr sz="1050" b="0" i="0">
+                <a:solidFill>
+                  <a:srgbClr val="5F5F6E"/>
+                </a:solidFill>
+                <a:latin typeface="Yu Gothic"/>
+                <a:ea typeface="Yu Gothic"/>
+                <a:cs typeface="Yu Gothic"/>
+              </a:rPr>
+              <a:t>どれが最新版かの正本管理</a:t>
+            </a:r>
+          </a:p>
+        </p:txBody>
+      </p:sp>
+      <p:sp>
+        <p:nvSpPr>
+          <p:cNvPr id="23" name="Rectangle 22"/>
+          <p:cNvSpPr/>
+          <p:nvPr/>
+        </p:nvSpPr>
+        <p:spPr>
+          <a:xfrm>
+            <a:off x="502920" y="5724144"/>
+            <a:ext cx="11183112" cy="621792"/>
+          </a:xfrm>
+          <a:prstGeom prst="rect">
+            <a:avLst/>
+          </a:prstGeom>
+          <a:solidFill>
+            <a:srgbClr val="F3EFFB"/>
+          </a:solidFill>
+          <a:ln>
+            <a:noFill/>
+          </a:ln>
+          <a:effectLst/>
+        </p:spPr>
+        <p:style>
+          <a:lnRef idx="1">
+            <a:schemeClr val="accent1"/>
+          </a:lnRef>
+          <a:fillRef idx="3">
+            <a:schemeClr val="accent1"/>
+          </a:fillRef>
+          <a:effectRef idx="2">
+            <a:schemeClr val="accent1"/>
+          </a:effectRef>
+          <a:fontRef idx="minor">
+            <a:schemeClr val="lt1"/>
+          </a:fontRef>
+        </p:style>
+        <p:txBody>
+          <a:bodyPr rtlCol="0" anchor="ctr"/>
+          <a:lstStyle/>
+          <a:p>
+            <a:pPr algn="ctr"/>
+          </a:p>
+        </p:txBody>
+      </p:sp>
+      <p:sp>
+        <p:nvSpPr>
+          <p:cNvPr id="24" name="Rectangle 23"/>
+          <p:cNvSpPr/>
+          <p:nvPr/>
+        </p:nvSpPr>
+        <p:spPr>
+          <a:xfrm>
+            <a:off x="502920" y="5724144"/>
+            <a:ext cx="38100" cy="621792"/>
           </a:xfrm>
           <a:prstGeom prst="rect">
             <a:avLst/>
@@ -4229,73 +4499,14 @@
       </p:sp>
       <p:sp>
         <p:nvSpPr>
-          <p:cNvPr id="19" name="Oval 18"/>
-          <p:cNvSpPr/>
-          <p:nvPr/>
-        </p:nvSpPr>
-        <p:spPr>
-          <a:xfrm>
-            <a:off x="722376" y="5394960"/>
-            <a:ext cx="457200" cy="457200"/>
-          </a:xfrm>
-          <a:prstGeom prst="ellipse">
-            <a:avLst/>
-          </a:prstGeom>
-          <a:solidFill>
-            <a:srgbClr val="3A106E"/>
-          </a:solidFill>
-          <a:ln>
-            <a:noFill/>
-          </a:ln>
-          <a:effectLst/>
-        </p:spPr>
-        <p:style>
-          <a:lnRef idx="1">
-            <a:schemeClr val="accent1"/>
-          </a:lnRef>
-          <a:fillRef idx="3">
-            <a:schemeClr val="accent1"/>
-          </a:fillRef>
-          <a:effectRef idx="2">
-            <a:schemeClr val="accent1"/>
-          </a:effectRef>
-          <a:fontRef idx="minor">
-            <a:schemeClr val="lt1"/>
-          </a:fontRef>
-        </p:style>
-        <p:txBody>
-          <a:bodyPr rtlCol="0" anchor="ctr" wrap="none" lIns="0" rIns="0" tIns="0" bIns="0"/>
-          <a:lstStyle/>
-          <a:p>
-            <a:pPr algn="ctr">
-              <a:spcAft>
-                <a:spcPts val="0"/>
-              </a:spcAft>
-            </a:pPr>
-            <a:r>
-              <a:rPr sz="1800" b="1" i="0">
-                <a:solidFill>
-                  <a:srgbClr val="FFFFFF"/>
-                </a:solidFill>
-                <a:latin typeface="Yu Gothic"/>
-                <a:ea typeface="Yu Gothic"/>
-                <a:cs typeface="Yu Gothic"/>
-              </a:rPr>
-              <a:t>4</a:t>
-            </a:r>
-          </a:p>
-        </p:txBody>
-      </p:sp>
-      <p:sp>
-        <p:nvSpPr>
-          <p:cNvPr id="20" name="TextBox 19"/>
+          <p:cNvPr id="25" name="TextBox 24"/>
           <p:cNvSpPr txBox="1"/>
           <p:nvPr/>
         </p:nvSpPr>
         <p:spPr>
           <a:xfrm>
-            <a:off x="1380744" y="5285232"/>
-            <a:ext cx="10104120" cy="713232"/>
+            <a:off x="713232" y="5779008"/>
+            <a:ext cx="10835640" cy="512064"/>
           </a:xfrm>
           <a:prstGeom prst="rect">
             <a:avLst/>
@@ -4307,24 +4518,6 @@
             <a:spAutoFit/>
           </a:bodyPr>
           <a:lstStyle/>
-          <a:p>
-            <a:pPr algn="l">
-              <a:spcAft>
-                <a:spcPts val="400"/>
-              </a:spcAft>
-            </a:pPr>
-            <a:r>
-              <a:rPr sz="1300" b="1" i="0">
-                <a:solidFill>
-                  <a:srgbClr val="3A106E"/>
-                </a:solidFill>
-                <a:latin typeface="Yu Gothic"/>
-                <a:ea typeface="Yu Gothic"/>
-                <a:cs typeface="Yu Gothic"/>
-              </a:rPr>
-              <a:t>評価・採点はまだ始めません</a:t>
-            </a:r>
-          </a:p>
           <a:p>
             <a:pPr algn="l">
               <a:spcAft>
@@ -4332,22 +4525,22 @@
               </a:spcAft>
             </a:pPr>
             <a:r>
-              <a:rPr sz="1050" b="0" i="0">
-                <a:solidFill>
-                  <a:srgbClr val="262630"/>
+              <a:rPr sz="1050" b="1" i="0">
+                <a:solidFill>
+                  <a:srgbClr val="3A106E"/>
                 </a:solidFill>
                 <a:latin typeface="Yu Gothic"/>
                 <a:ea typeface="Yu Gothic"/>
                 <a:cs typeface="Yu Gothic"/>
               </a:rPr>
-              <a:t>金額データが揃ってから。順番を守ります</a:t>
-            </a:r>
-          </a:p>
-        </p:txBody>
-      </p:sp>
-      <p:sp>
-        <p:nvSpPr>
-          <p:cNvPr id="21" name="Rectangle 20"/>
+              <a:t>すべて一式パッケージで共有します。迷ったら「資料一覧」を見てください</a:t>
+            </a:r>
+          </a:p>
+        </p:txBody>
+      </p:sp>
+      <p:sp>
+        <p:nvSpPr>
+          <p:cNvPr id="26" name="Rectangle 25"/>
           <p:cNvSpPr/>
           <p:nvPr/>
         </p:nvSpPr>
@@ -4391,7 +4584,7 @@
       </p:sp>
       <p:sp>
         <p:nvSpPr>
-          <p:cNvPr id="22" name="TextBox 21"/>
+          <p:cNvPr id="27" name="TextBox 26"/>
           <p:cNvSpPr txBox="1"/>
           <p:nvPr/>
         </p:nvSpPr>
@@ -4432,7 +4625,7 @@
       </p:sp>
       <p:sp>
         <p:nvSpPr>
-          <p:cNvPr id="23" name="TextBox 22"/>
+          <p:cNvPr id="28" name="TextBox 27"/>
           <p:cNvSpPr txBox="1"/>
           <p:nvPr/>
         </p:nvSpPr>
@@ -4525,7 +4718,7 @@
                 <a:ea typeface="Yu Gothic"/>
                 <a:cs typeface="Yu Gothic"/>
               </a:rPr>
-              <a:t>道筋</a:t>
+              <a:t>フィードバックへの対応</a:t>
             </a:r>
           </a:p>
         </p:txBody>
@@ -4566,7 +4759,7 @@
                 <a:ea typeface="Yu Gothic"/>
                 <a:cs typeface="Yu Gothic"/>
               </a:rPr>
-              <a:t>これからの90日 — 順番を守って進めます</a:t>
+              <a:t>37件すべてに、回答済みです</a:t>
             </a:r>
           </a:p>
         </p:txBody>
@@ -4623,8 +4816,8 @@
         </p:nvSpPr>
         <p:spPr>
           <a:xfrm>
-            <a:off x="502920" y="2103120"/>
-            <a:ext cx="2542032" cy="1554480"/>
+            <a:off x="502920" y="2011680"/>
+            <a:ext cx="11183112" cy="1170432"/>
           </a:xfrm>
           <a:prstGeom prst="rect">
             <a:avLst/>
@@ -4669,8 +4862,8 @@
         </p:nvSpPr>
         <p:spPr>
           <a:xfrm>
-            <a:off x="502920" y="2103120"/>
-            <a:ext cx="2542032" cy="512064"/>
+            <a:off x="502920" y="2011680"/>
+            <a:ext cx="64008" cy="1170432"/>
           </a:xfrm>
           <a:prstGeom prst="rect">
             <a:avLst/>
@@ -4707,116 +4900,16 @@
       </p:sp>
       <p:sp>
         <p:nvSpPr>
-          <p:cNvPr id="7" name="TextBox 6"/>
-          <p:cNvSpPr txBox="1"/>
-          <p:nvPr/>
-        </p:nvSpPr>
-        <p:spPr>
-          <a:xfrm>
-            <a:off x="502920" y="2176272"/>
-            <a:ext cx="2542032" cy="384048"/>
-          </a:xfrm>
-          <a:prstGeom prst="rect">
-            <a:avLst/>
-          </a:prstGeom>
-          <a:noFill/>
-        </p:spPr>
-        <p:txBody>
-          <a:bodyPr wrap="square" lIns="0" rIns="0" tIns="0" bIns="0" anchor="ctr">
-            <a:spAutoFit/>
-          </a:bodyPr>
-          <a:lstStyle/>
-          <a:p>
-            <a:pPr algn="ctr">
-              <a:spcAft>
-                <a:spcPts val="0"/>
-              </a:spcAft>
-            </a:pPr>
-            <a:r>
-              <a:rPr sz="1600" b="1" i="0">
-                <a:solidFill>
-                  <a:srgbClr val="FFFFFF"/>
-                </a:solidFill>
-                <a:latin typeface="Yu Gothic"/>
-                <a:ea typeface="Yu Gothic"/>
-                <a:cs typeface="Yu Gothic"/>
-              </a:rPr>
-              <a:t>今週</a:t>
-            </a:r>
-          </a:p>
-        </p:txBody>
-      </p:sp>
-      <p:sp>
-        <p:nvSpPr>
-          <p:cNvPr id="8" name="TextBox 7"/>
-          <p:cNvSpPr txBox="1"/>
-          <p:nvPr/>
-        </p:nvSpPr>
-        <p:spPr>
-          <a:xfrm>
-            <a:off x="630936" y="2761488"/>
-            <a:ext cx="2286000" cy="822960"/>
-          </a:xfrm>
-          <a:prstGeom prst="rect">
-            <a:avLst/>
-          </a:prstGeom>
-          <a:noFill/>
-        </p:spPr>
-        <p:txBody>
-          <a:bodyPr wrap="square" lIns="0" rIns="0" tIns="0" bIns="0" anchor="ctr">
-            <a:spAutoFit/>
-          </a:bodyPr>
-          <a:lstStyle/>
-          <a:p>
-            <a:pPr algn="ctr">
-              <a:spcAft>
-                <a:spcPts val="200"/>
-              </a:spcAft>
-            </a:pPr>
-            <a:r>
-              <a:rPr sz="1100" b="1" i="0">
-                <a:solidFill>
-                  <a:srgbClr val="262630"/>
-                </a:solidFill>
-                <a:latin typeface="Yu Gothic"/>
-                <a:ea typeface="Yu Gothic"/>
-                <a:cs typeface="Yu Gothic"/>
-              </a:rPr>
-              <a:t>確認会開始</a:t>
-            </a:r>
-          </a:p>
-          <a:p>
-            <a:pPr algn="ctr">
-              <a:spcAft>
-                <a:spcPts val="200"/>
-              </a:spcAft>
-            </a:pPr>
-            <a:r>
-              <a:rPr sz="1100" b="1" i="0">
-                <a:solidFill>
-                  <a:srgbClr val="262630"/>
-                </a:solidFill>
-                <a:latin typeface="Yu Gothic"/>
-                <a:ea typeface="Yu Gothic"/>
-                <a:cs typeface="Yu Gothic"/>
-              </a:rPr>
-              <a:t>体制の残り確定</a:t>
-            </a:r>
-          </a:p>
-        </p:txBody>
-      </p:sp>
-      <p:sp>
-        <p:nvSpPr>
-          <p:cNvPr id="9" name="Right Arrow 8"/>
+          <p:cNvPr id="7" name="Oval 6"/>
           <p:cNvSpPr/>
           <p:nvPr/>
         </p:nvSpPr>
         <p:spPr>
           <a:xfrm>
-            <a:off x="3072384" y="2761488"/>
-            <a:ext cx="274320" cy="237744"/>
-          </a:xfrm>
-          <a:prstGeom prst="rightArrow">
+            <a:off x="722376" y="2368296"/>
+            <a:ext cx="457200" cy="457200"/>
+          </a:xfrm>
+          <a:prstGeom prst="ellipse">
             <a:avLst/>
           </a:prstGeom>
           <a:solidFill>
@@ -4842,23 +4935,97 @@
           </a:fontRef>
         </p:style>
         <p:txBody>
-          <a:bodyPr rtlCol="0" anchor="ctr"/>
-          <a:lstStyle/>
-          <a:p>
-            <a:pPr algn="ctr"/>
-          </a:p>
-        </p:txBody>
-      </p:sp>
-      <p:sp>
-        <p:nvSpPr>
-          <p:cNvPr id="10" name="Rectangle 9"/>
+          <a:bodyPr rtlCol="0" anchor="ctr" wrap="none" lIns="0" rIns="0" tIns="0" bIns="0"/>
+          <a:lstStyle/>
+          <a:p>
+            <a:pPr algn="ctr">
+              <a:spcAft>
+                <a:spcPts val="0"/>
+              </a:spcAft>
+            </a:pPr>
+            <a:r>
+              <a:rPr sz="1800" b="1" i="0">
+                <a:solidFill>
+                  <a:srgbClr val="FFFFFF"/>
+                </a:solidFill>
+                <a:latin typeface="Yu Gothic"/>
+                <a:ea typeface="Yu Gothic"/>
+                <a:cs typeface="Yu Gothic"/>
+              </a:rPr>
+              <a:t>1</a:t>
+            </a:r>
+          </a:p>
+        </p:txBody>
+      </p:sp>
+      <p:sp>
+        <p:nvSpPr>
+          <p:cNvPr id="8" name="TextBox 7"/>
+          <p:cNvSpPr txBox="1"/>
+          <p:nvPr/>
+        </p:nvSpPr>
+        <p:spPr>
+          <a:xfrm>
+            <a:off x="1380744" y="2139696"/>
+            <a:ext cx="10104120" cy="950976"/>
+          </a:xfrm>
+          <a:prstGeom prst="rect">
+            <a:avLst/>
+          </a:prstGeom>
+          <a:noFill/>
+        </p:spPr>
+        <p:txBody>
+          <a:bodyPr wrap="square" lIns="0" rIns="0" tIns="0" bIns="0" anchor="ctr">
+            <a:spAutoFit/>
+          </a:bodyPr>
+          <a:lstStyle/>
+          <a:p>
+            <a:pPr algn="l">
+              <a:spcAft>
+                <a:spcPts val="400"/>
+              </a:spcAft>
+            </a:pPr>
+            <a:r>
+              <a:rPr sz="1300" b="1" i="0">
+                <a:solidFill>
+                  <a:srgbClr val="3A106E"/>
+                </a:solidFill>
+                <a:latin typeface="Yu Gothic"/>
+                <a:ea typeface="Yu Gothic"/>
+                <a:cs typeface="Yu Gothic"/>
+              </a:rPr>
+              <a:t>37件すべてに回答済み（設計に7点を反映）</a:t>
+            </a:r>
+          </a:p>
+          <a:p>
+            <a:pPr algn="l">
+              <a:spcAft>
+                <a:spcPts val="0"/>
+              </a:spcAft>
+            </a:pPr>
+            <a:r>
+              <a:rPr sz="1050" b="0" i="0">
+                <a:solidFill>
+                  <a:srgbClr val="262630"/>
+                </a:solidFill>
+                <a:latin typeface="Yu Gothic"/>
+                <a:ea typeface="Yu Gothic"/>
+                <a:cs typeface="Yu Gothic"/>
+              </a:rPr>
+              <a:t>いただいた声を、その場で終わらせず、改革の設計に取り込みました</a:t>
+            </a:r>
+          </a:p>
+        </p:txBody>
+      </p:sp>
+      <p:sp>
+        <p:nvSpPr>
+          <p:cNvPr id="9" name="Rectangle 8"/>
           <p:cNvSpPr/>
           <p:nvPr/>
         </p:nvSpPr>
         <p:spPr>
           <a:xfrm>
-            <a:off x="3374136" y="2103120"/>
-            <a:ext cx="2542032" cy="1554480"/>
+            <a:off x="502920" y="3383280"/>
+            <a:ext cx="11183112" cy="1170432"/>
           </a:xfrm>
           <a:prstGeom prst="rect">
             <a:avLst/>
@@ -4897,14 +5064,14 @@
       </p:sp>
       <p:sp>
         <p:nvSpPr>
-          <p:cNvPr id="11" name="Rectangle 10"/>
+          <p:cNvPr id="10" name="Rectangle 9"/>
           <p:cNvSpPr/>
           <p:nvPr/>
         </p:nvSpPr>
         <p:spPr>
           <a:xfrm>
-            <a:off x="3374136" y="2103120"/>
-            <a:ext cx="2542032" cy="512064"/>
+            <a:off x="502920" y="3383280"/>
+            <a:ext cx="64008" cy="1170432"/>
           </a:xfrm>
           <a:prstGeom prst="rect">
             <a:avLst/>
@@ -4941,116 +5108,16 @@
       </p:sp>
       <p:sp>
         <p:nvSpPr>
-          <p:cNvPr id="12" name="TextBox 11"/>
-          <p:cNvSpPr txBox="1"/>
-          <p:nvPr/>
-        </p:nvSpPr>
-        <p:spPr>
-          <a:xfrm>
-            <a:off x="3374136" y="2176272"/>
-            <a:ext cx="2542032" cy="384048"/>
-          </a:xfrm>
-          <a:prstGeom prst="rect">
-            <a:avLst/>
-          </a:prstGeom>
-          <a:noFill/>
-        </p:spPr>
-        <p:txBody>
-          <a:bodyPr wrap="square" lIns="0" rIns="0" tIns="0" bIns="0" anchor="ctr">
-            <a:spAutoFit/>
-          </a:bodyPr>
-          <a:lstStyle/>
-          <a:p>
-            <a:pPr algn="ctr">
-              <a:spcAft>
-                <a:spcPts val="0"/>
-              </a:spcAft>
-            </a:pPr>
-            <a:r>
-              <a:rPr sz="1600" b="1" i="0">
-                <a:solidFill>
-                  <a:srgbClr val="FFFFFF"/>
-                </a:solidFill>
-                <a:latin typeface="Yu Gothic"/>
-                <a:ea typeface="Yu Gothic"/>
-                <a:cs typeface="Yu Gothic"/>
-              </a:rPr>
-              <a:t>〜30日</a:t>
-            </a:r>
-          </a:p>
-        </p:txBody>
-      </p:sp>
-      <p:sp>
-        <p:nvSpPr>
-          <p:cNvPr id="13" name="TextBox 12"/>
-          <p:cNvSpPr txBox="1"/>
-          <p:nvPr/>
-        </p:nvSpPr>
-        <p:spPr>
-          <a:xfrm>
-            <a:off x="3502152" y="2761488"/>
-            <a:ext cx="2286000" cy="822960"/>
-          </a:xfrm>
-          <a:prstGeom prst="rect">
-            <a:avLst/>
-          </a:prstGeom>
-          <a:noFill/>
-        </p:spPr>
-        <p:txBody>
-          <a:bodyPr wrap="square" lIns="0" rIns="0" tIns="0" bIns="0" anchor="ctr">
-            <a:spAutoFit/>
-          </a:bodyPr>
-          <a:lstStyle/>
-          <a:p>
-            <a:pPr algn="ctr">
-              <a:spcAft>
-                <a:spcPts val="200"/>
-              </a:spcAft>
-            </a:pPr>
-            <a:r>
-              <a:rPr sz="1100" b="1" i="0">
-                <a:solidFill>
-                  <a:srgbClr val="262630"/>
-                </a:solidFill>
-                <a:latin typeface="Yu Gothic"/>
-                <a:ea typeface="Yu Gothic"/>
-                <a:cs typeface="Yu Gothic"/>
-              </a:rPr>
-              <a:t>データ完成</a:t>
-            </a:r>
-          </a:p>
-          <a:p>
-            <a:pPr algn="ctr">
-              <a:spcAft>
-                <a:spcPts val="200"/>
-              </a:spcAft>
-            </a:pPr>
-            <a:r>
-              <a:rPr sz="1100" b="1" i="0">
-                <a:solidFill>
-                  <a:srgbClr val="262630"/>
-                </a:solidFill>
-                <a:latin typeface="Yu Gothic"/>
-                <a:ea typeface="Yu Gothic"/>
-                <a:cs typeface="Yu Gothic"/>
-              </a:rPr>
-              <a:t>工数計測開始</a:t>
-            </a:r>
-          </a:p>
-        </p:txBody>
-      </p:sp>
-      <p:sp>
-        <p:nvSpPr>
-          <p:cNvPr id="14" name="Right Arrow 13"/>
+          <p:cNvPr id="11" name="Oval 10"/>
           <p:cNvSpPr/>
           <p:nvPr/>
         </p:nvSpPr>
         <p:spPr>
           <a:xfrm>
-            <a:off x="5943600" y="2761488"/>
-            <a:ext cx="274320" cy="237744"/>
-          </a:xfrm>
-          <a:prstGeom prst="rightArrow">
+            <a:off x="722376" y="3739896"/>
+            <a:ext cx="457200" cy="457200"/>
+          </a:xfrm>
+          <a:prstGeom prst="ellipse">
             <a:avLst/>
           </a:prstGeom>
           <a:solidFill>
@@ -5076,23 +5143,97 @@
           </a:fontRef>
         </p:style>
         <p:txBody>
-          <a:bodyPr rtlCol="0" anchor="ctr"/>
-          <a:lstStyle/>
-          <a:p>
-            <a:pPr algn="ctr"/>
-          </a:p>
-        </p:txBody>
-      </p:sp>
-      <p:sp>
-        <p:nvSpPr>
-          <p:cNvPr id="15" name="Rectangle 14"/>
+          <a:bodyPr rtlCol="0" anchor="ctr" wrap="none" lIns="0" rIns="0" tIns="0" bIns="0"/>
+          <a:lstStyle/>
+          <a:p>
+            <a:pPr algn="ctr">
+              <a:spcAft>
+                <a:spcPts val="0"/>
+              </a:spcAft>
+            </a:pPr>
+            <a:r>
+              <a:rPr sz="1800" b="1" i="0">
+                <a:solidFill>
+                  <a:srgbClr val="FFFFFF"/>
+                </a:solidFill>
+                <a:latin typeface="Yu Gothic"/>
+                <a:ea typeface="Yu Gothic"/>
+                <a:cs typeface="Yu Gothic"/>
+              </a:rPr>
+              <a:t>2</a:t>
+            </a:r>
+          </a:p>
+        </p:txBody>
+      </p:sp>
+      <p:sp>
+        <p:nvSpPr>
+          <p:cNvPr id="12" name="TextBox 11"/>
+          <p:cNvSpPr txBox="1"/>
+          <p:nvPr/>
+        </p:nvSpPr>
+        <p:spPr>
+          <a:xfrm>
+            <a:off x="1380744" y="3511296"/>
+            <a:ext cx="10104120" cy="950976"/>
+          </a:xfrm>
+          <a:prstGeom prst="rect">
+            <a:avLst/>
+          </a:prstGeom>
+          <a:noFill/>
+        </p:spPr>
+        <p:txBody>
+          <a:bodyPr wrap="square" lIns="0" rIns="0" tIns="0" bIns="0" anchor="ctr">
+            <a:spAutoFit/>
+          </a:bodyPr>
+          <a:lstStyle/>
+          <a:p>
+            <a:pPr algn="l">
+              <a:spcAft>
+                <a:spcPts val="400"/>
+              </a:spcAft>
+            </a:pPr>
+            <a:r>
+              <a:rPr sz="1300" b="1" i="0">
+                <a:solidFill>
+                  <a:srgbClr val="3A106E"/>
+                </a:solidFill>
+                <a:latin typeface="Yu Gothic"/>
+                <a:ea typeface="Yu Gothic"/>
+                <a:cs typeface="Yu Gothic"/>
+              </a:rPr>
+              <a:t>回答は、方針と論点の位置づけまで</a:t>
+            </a:r>
+          </a:p>
+          <a:p>
+            <a:pPr algn="l">
+              <a:spcAft>
+                <a:spcPts val="0"/>
+              </a:spcAft>
+            </a:pPr>
+            <a:r>
+              <a:rPr sz="1050" b="0" i="0">
+                <a:solidFill>
+                  <a:srgbClr val="262630"/>
+                </a:solidFill>
+                <a:latin typeface="Yu Gothic"/>
+                <a:ea typeface="Yu Gothic"/>
+                <a:cs typeface="Yu Gothic"/>
+              </a:rPr>
+              <a:t>「策はまだ決めていない」段階のため。具体策は分科会で一緒に設計します</a:t>
+            </a:r>
+          </a:p>
+        </p:txBody>
+      </p:sp>
+      <p:sp>
+        <p:nvSpPr>
+          <p:cNvPr id="13" name="Rectangle 12"/>
           <p:cNvSpPr/>
           <p:nvPr/>
         </p:nvSpPr>
         <p:spPr>
           <a:xfrm>
-            <a:off x="6245352" y="2103120"/>
-            <a:ext cx="2542032" cy="1554480"/>
+            <a:off x="502920" y="4754880"/>
+            <a:ext cx="11183112" cy="1170432"/>
           </a:xfrm>
           <a:prstGeom prst="rect">
             <a:avLst/>
@@ -5131,14 +5272,14 @@
       </p:sp>
       <p:sp>
         <p:nvSpPr>
-          <p:cNvPr id="16" name="Rectangle 15"/>
+          <p:cNvPr id="14" name="Rectangle 13"/>
           <p:cNvSpPr/>
           <p:nvPr/>
         </p:nvSpPr>
         <p:spPr>
           <a:xfrm>
-            <a:off x="6245352" y="2103120"/>
-            <a:ext cx="2542032" cy="512064"/>
+            <a:off x="502920" y="4754880"/>
+            <a:ext cx="64008" cy="1170432"/>
           </a:xfrm>
           <a:prstGeom prst="rect">
             <a:avLst/>
@@ -5175,116 +5316,16 @@
       </p:sp>
       <p:sp>
         <p:nvSpPr>
-          <p:cNvPr id="17" name="TextBox 16"/>
-          <p:cNvSpPr txBox="1"/>
-          <p:nvPr/>
-        </p:nvSpPr>
-        <p:spPr>
-          <a:xfrm>
-            <a:off x="6245352" y="2176272"/>
-            <a:ext cx="2542032" cy="384048"/>
-          </a:xfrm>
-          <a:prstGeom prst="rect">
-            <a:avLst/>
-          </a:prstGeom>
-          <a:noFill/>
-        </p:spPr>
-        <p:txBody>
-          <a:bodyPr wrap="square" lIns="0" rIns="0" tIns="0" bIns="0" anchor="ctr">
-            <a:spAutoFit/>
-          </a:bodyPr>
-          <a:lstStyle/>
-          <a:p>
-            <a:pPr algn="ctr">
-              <a:spcAft>
-                <a:spcPts val="0"/>
-              </a:spcAft>
-            </a:pPr>
-            <a:r>
-              <a:rPr sz="1600" b="1" i="0">
-                <a:solidFill>
-                  <a:srgbClr val="FFFFFF"/>
-                </a:solidFill>
-                <a:latin typeface="Yu Gothic"/>
-                <a:ea typeface="Yu Gothic"/>
-                <a:cs typeface="Yu Gothic"/>
-              </a:rPr>
-              <a:t>〜60日</a:t>
-            </a:r>
-          </a:p>
-        </p:txBody>
-      </p:sp>
-      <p:sp>
-        <p:nvSpPr>
-          <p:cNvPr id="18" name="TextBox 17"/>
-          <p:cNvSpPr txBox="1"/>
-          <p:nvPr/>
-        </p:nvSpPr>
-        <p:spPr>
-          <a:xfrm>
-            <a:off x="6373368" y="2761488"/>
-            <a:ext cx="2286000" cy="822960"/>
-          </a:xfrm>
-          <a:prstGeom prst="rect">
-            <a:avLst/>
-          </a:prstGeom>
-          <a:noFill/>
-        </p:spPr>
-        <p:txBody>
-          <a:bodyPr wrap="square" lIns="0" rIns="0" tIns="0" bIns="0" anchor="ctr">
-            <a:spAutoFit/>
-          </a:bodyPr>
-          <a:lstStyle/>
-          <a:p>
-            <a:pPr algn="ctr">
-              <a:spcAft>
-                <a:spcPts val="200"/>
-              </a:spcAft>
-            </a:pPr>
-            <a:r>
-              <a:rPr sz="1100" b="1" i="0">
-                <a:solidFill>
-                  <a:srgbClr val="262630"/>
-                </a:solidFill>
-                <a:latin typeface="Yu Gothic"/>
-                <a:ea typeface="Yu Gothic"/>
-                <a:cs typeface="Yu Gothic"/>
-              </a:rPr>
-              <a:t>採点とランクの</a:t>
-            </a:r>
-          </a:p>
-          <a:p>
-            <a:pPr algn="ctr">
-              <a:spcAft>
-                <a:spcPts val="200"/>
-              </a:spcAft>
-            </a:pPr>
-            <a:r>
-              <a:rPr sz="1100" b="1" i="0">
-                <a:solidFill>
-                  <a:srgbClr val="262630"/>
-                </a:solidFill>
-                <a:latin typeface="Yu Gothic"/>
-                <a:ea typeface="Yu Gothic"/>
-                <a:cs typeface="Yu Gothic"/>
-              </a:rPr>
-              <a:t>初回確定</a:t>
-            </a:r>
-          </a:p>
-        </p:txBody>
-      </p:sp>
-      <p:sp>
-        <p:nvSpPr>
-          <p:cNvPr id="19" name="Right Arrow 18"/>
+          <p:cNvPr id="15" name="Oval 14"/>
           <p:cNvSpPr/>
           <p:nvPr/>
         </p:nvSpPr>
         <p:spPr>
           <a:xfrm>
-            <a:off x="8814816" y="2761488"/>
-            <a:ext cx="274320" cy="237744"/>
-          </a:xfrm>
-          <a:prstGeom prst="rightArrow">
+            <a:off x="722376" y="5111496"/>
+            <a:ext cx="457200" cy="457200"/>
+          </a:xfrm>
+          <a:prstGeom prst="ellipse">
             <a:avLst/>
           </a:prstGeom>
           <a:solidFill>
@@ -5310,123 +5351,7 @@
           </a:fontRef>
         </p:style>
         <p:txBody>
-          <a:bodyPr rtlCol="0" anchor="ctr"/>
-          <a:lstStyle/>
-          <a:p>
-            <a:pPr algn="ctr"/>
-          </a:p>
-        </p:txBody>
-      </p:sp>
-      <p:sp>
-        <p:nvSpPr>
-          <p:cNvPr id="20" name="Rectangle 19"/>
-          <p:cNvSpPr/>
-          <p:nvPr/>
-        </p:nvSpPr>
-        <p:spPr>
-          <a:xfrm>
-            <a:off x="9116568" y="2103120"/>
-            <a:ext cx="2542032" cy="1554480"/>
-          </a:xfrm>
-          <a:prstGeom prst="rect">
-            <a:avLst/>
-          </a:prstGeom>
-          <a:solidFill>
-            <a:srgbClr val="FFFFFF"/>
-          </a:solidFill>
-          <a:ln w="9525">
-            <a:solidFill>
-              <a:srgbClr val="D9D9E0"/>
-            </a:solidFill>
-          </a:ln>
-          <a:effectLst/>
-        </p:spPr>
-        <p:style>
-          <a:lnRef idx="1">
-            <a:schemeClr val="accent1"/>
-          </a:lnRef>
-          <a:fillRef idx="3">
-            <a:schemeClr val="accent1"/>
-          </a:fillRef>
-          <a:effectRef idx="2">
-            <a:schemeClr val="accent1"/>
-          </a:effectRef>
-          <a:fontRef idx="minor">
-            <a:schemeClr val="lt1"/>
-          </a:fontRef>
-        </p:style>
-        <p:txBody>
-          <a:bodyPr rtlCol="0" anchor="ctr"/>
-          <a:lstStyle/>
-          <a:p>
-            <a:pPr algn="ctr"/>
-          </a:p>
-        </p:txBody>
-      </p:sp>
-      <p:sp>
-        <p:nvSpPr>
-          <p:cNvPr id="21" name="Rectangle 20"/>
-          <p:cNvSpPr/>
-          <p:nvPr/>
-        </p:nvSpPr>
-        <p:spPr>
-          <a:xfrm>
-            <a:off x="9116568" y="2103120"/>
-            <a:ext cx="2542032" cy="512064"/>
-          </a:xfrm>
-          <a:prstGeom prst="rect">
-            <a:avLst/>
-          </a:prstGeom>
-          <a:solidFill>
-            <a:srgbClr val="3A106E"/>
-          </a:solidFill>
-          <a:ln>
-            <a:noFill/>
-          </a:ln>
-          <a:effectLst/>
-        </p:spPr>
-        <p:style>
-          <a:lnRef idx="1">
-            <a:schemeClr val="accent1"/>
-          </a:lnRef>
-          <a:fillRef idx="3">
-            <a:schemeClr val="accent1"/>
-          </a:fillRef>
-          <a:effectRef idx="2">
-            <a:schemeClr val="accent1"/>
-          </a:effectRef>
-          <a:fontRef idx="minor">
-            <a:schemeClr val="lt1"/>
-          </a:fontRef>
-        </p:style>
-        <p:txBody>
-          <a:bodyPr rtlCol="0" anchor="ctr"/>
-          <a:lstStyle/>
-          <a:p>
-            <a:pPr algn="ctr"/>
-          </a:p>
-        </p:txBody>
-      </p:sp>
-      <p:sp>
-        <p:nvSpPr>
-          <p:cNvPr id="22" name="TextBox 21"/>
-          <p:cNvSpPr txBox="1"/>
-          <p:nvPr/>
-        </p:nvSpPr>
-        <p:spPr>
-          <a:xfrm>
-            <a:off x="9116568" y="2176272"/>
-            <a:ext cx="2542032" cy="384048"/>
-          </a:xfrm>
-          <a:prstGeom prst="rect">
-            <a:avLst/>
-          </a:prstGeom>
-          <a:noFill/>
-        </p:spPr>
-        <p:txBody>
-          <a:bodyPr wrap="square" lIns="0" rIns="0" tIns="0" bIns="0" anchor="ctr">
-            <a:spAutoFit/>
-          </a:bodyPr>
+          <a:bodyPr rtlCol="0" anchor="ctr" wrap="none" lIns="0" rIns="0" tIns="0" bIns="0"/>
           <a:lstStyle/>
           <a:p>
             <a:pPr algn="ctr">
@@ -5435,7 +5360,7 @@
               </a:spcAft>
             </a:pPr>
             <a:r>
-              <a:rPr sz="1600" b="1" i="0">
+              <a:rPr sz="1800" b="1" i="0">
                 <a:solidFill>
                   <a:srgbClr val="FFFFFF"/>
                 </a:solidFill>
@@ -5443,21 +5368,21 @@
                 <a:ea typeface="Yu Gothic"/>
                 <a:cs typeface="Yu Gothic"/>
               </a:rPr>
-              <a:t>〜90日</a:t>
-            </a:r>
-          </a:p>
-        </p:txBody>
-      </p:sp>
-      <p:sp>
-        <p:nvSpPr>
-          <p:cNvPr id="23" name="TextBox 22"/>
+              <a:t>3</a:t>
+            </a:r>
+          </a:p>
+        </p:txBody>
+      </p:sp>
+      <p:sp>
+        <p:nvSpPr>
+          <p:cNvPr id="16" name="TextBox 15"/>
           <p:cNvSpPr txBox="1"/>
           <p:nvPr/>
         </p:nvSpPr>
         <p:spPr>
           <a:xfrm>
-            <a:off x="9244584" y="2761488"/>
-            <a:ext cx="2286000" cy="822960"/>
+            <a:off x="1380744" y="4882896"/>
+            <a:ext cx="10104120" cy="950976"/>
           </a:xfrm>
           <a:prstGeom prst="rect">
             <a:avLst/>
@@ -5470,152 +5395,23 @@
           </a:bodyPr>
           <a:lstStyle/>
           <a:p>
-            <a:pPr algn="ctr">
+            <a:pPr algn="l">
               <a:spcAft>
-                <a:spcPts val="200"/>
+                <a:spcPts val="400"/>
               </a:spcAft>
             </a:pPr>
             <a:r>
-              <a:rPr sz="1100" b="1" i="0">
-                <a:solidFill>
-                  <a:srgbClr val="262630"/>
+              <a:rPr sz="1300" b="1" i="0">
+                <a:solidFill>
+                  <a:srgbClr val="3A106E"/>
                 </a:solidFill>
                 <a:latin typeface="Yu Gothic"/>
                 <a:ea typeface="Yu Gothic"/>
                 <a:cs typeface="Yu Gothic"/>
               </a:rPr>
-              <a:t>力の入れ直し（資源配分）</a:t>
-            </a:r>
-          </a:p>
-          <a:p>
-            <a:pPr algn="ctr">
-              <a:spcAft>
-                <a:spcPts val="200"/>
-              </a:spcAft>
-            </a:pPr>
-            <a:r>
-              <a:rPr sz="1100" b="1" i="0">
-                <a:solidFill>
-                  <a:srgbClr val="262630"/>
-                </a:solidFill>
-                <a:latin typeface="Yu Gothic"/>
-                <a:ea typeface="Yu Gothic"/>
-                <a:cs typeface="Yu Gothic"/>
-              </a:rPr>
-              <a:t>の実行と効果検証</a:t>
-            </a:r>
-          </a:p>
-        </p:txBody>
-      </p:sp>
-      <p:sp>
-        <p:nvSpPr>
-          <p:cNvPr id="24" name="Rectangle 23"/>
-          <p:cNvSpPr/>
-          <p:nvPr/>
-        </p:nvSpPr>
-        <p:spPr>
-          <a:xfrm>
-            <a:off x="502920" y="5577840"/>
-            <a:ext cx="11183112" cy="768096"/>
-          </a:xfrm>
-          <a:prstGeom prst="rect">
-            <a:avLst/>
-          </a:prstGeom>
-          <a:solidFill>
-            <a:srgbClr val="F3EFFB"/>
-          </a:solidFill>
-          <a:ln>
-            <a:noFill/>
-          </a:ln>
-          <a:effectLst/>
-        </p:spPr>
-        <p:style>
-          <a:lnRef idx="1">
-            <a:schemeClr val="accent1"/>
-          </a:lnRef>
-          <a:fillRef idx="3">
-            <a:schemeClr val="accent1"/>
-          </a:fillRef>
-          <a:effectRef idx="2">
-            <a:schemeClr val="accent1"/>
-          </a:effectRef>
-          <a:fontRef idx="minor">
-            <a:schemeClr val="lt1"/>
-          </a:fontRef>
-        </p:style>
-        <p:txBody>
-          <a:bodyPr rtlCol="0" anchor="ctr"/>
-          <a:lstStyle/>
-          <a:p>
-            <a:pPr algn="ctr"/>
-          </a:p>
-        </p:txBody>
-      </p:sp>
-      <p:sp>
-        <p:nvSpPr>
-          <p:cNvPr id="25" name="Rectangle 24"/>
-          <p:cNvSpPr/>
-          <p:nvPr/>
-        </p:nvSpPr>
-        <p:spPr>
-          <a:xfrm>
-            <a:off x="502920" y="5577840"/>
-            <a:ext cx="38100" cy="768096"/>
-          </a:xfrm>
-          <a:prstGeom prst="rect">
-            <a:avLst/>
-          </a:prstGeom>
-          <a:solidFill>
-            <a:srgbClr val="7823DC"/>
-          </a:solidFill>
-          <a:ln>
-            <a:noFill/>
-          </a:ln>
-          <a:effectLst/>
-        </p:spPr>
-        <p:style>
-          <a:lnRef idx="1">
-            <a:schemeClr val="accent1"/>
-          </a:lnRef>
-          <a:fillRef idx="3">
-            <a:schemeClr val="accent1"/>
-          </a:fillRef>
-          <a:effectRef idx="2">
-            <a:schemeClr val="accent1"/>
-          </a:effectRef>
-          <a:fontRef idx="minor">
-            <a:schemeClr val="lt1"/>
-          </a:fontRef>
-        </p:style>
-        <p:txBody>
-          <a:bodyPr rtlCol="0" anchor="ctr"/>
-          <a:lstStyle/>
-          <a:p>
-            <a:pPr algn="ctr"/>
-          </a:p>
-        </p:txBody>
-      </p:sp>
-      <p:sp>
-        <p:nvSpPr>
-          <p:cNvPr id="26" name="TextBox 25"/>
-          <p:cNvSpPr txBox="1"/>
-          <p:nvPr/>
-        </p:nvSpPr>
-        <p:spPr>
-          <a:xfrm>
-            <a:off x="713232" y="5632704"/>
-            <a:ext cx="10835640" cy="658368"/>
-          </a:xfrm>
-          <a:prstGeom prst="rect">
-            <a:avLst/>
-          </a:prstGeom>
-          <a:noFill/>
-        </p:spPr>
-        <p:txBody>
-          <a:bodyPr wrap="square" lIns="0" rIns="0" tIns="0" bIns="0" anchor="ctr">
-            <a:spAutoFit/>
-          </a:bodyPr>
-          <a:lstStyle/>
+              <a:t>未回答の部門（海外・監修・法務）には個別にお話を伺います</a:t>
+            </a:r>
+          </a:p>
           <a:p>
             <a:pPr algn="l">
               <a:spcAft>
@@ -5623,22 +5419,22 @@
               </a:spcAft>
             </a:pPr>
             <a:r>
-              <a:rPr sz="1050" b="1" i="0">
-                <a:solidFill>
-                  <a:srgbClr val="3A106E"/>
+              <a:rPr sz="1050" b="0" i="0">
+                <a:solidFill>
+                  <a:srgbClr val="262630"/>
                 </a:solidFill>
                 <a:latin typeface="Yu Gothic"/>
                 <a:ea typeface="Yu Gothic"/>
                 <a:cs typeface="Yu Gothic"/>
               </a:rPr>
-              <a:t>点検会議には毎回「決めること」を3件以内でお持ちします。皆さんの現場の判断（担当替え・時間の使い方）は、会議を待たずに進めてください</a:t>
-            </a:r>
-          </a:p>
-        </p:txBody>
-      </p:sp>
-      <p:sp>
-        <p:nvSpPr>
-          <p:cNvPr id="27" name="Rectangle 26"/>
+              <a:t>沈黙を合意とみなしません。こちらから出向いてお聞きします</a:t>
+            </a:r>
+          </a:p>
+        </p:txBody>
+      </p:sp>
+      <p:sp>
+        <p:nvSpPr>
+          <p:cNvPr id="17" name="Rectangle 16"/>
           <p:cNvSpPr/>
           <p:nvPr/>
         </p:nvSpPr>
@@ -5682,7 +5478,7 @@
       </p:sp>
       <p:sp>
         <p:nvSpPr>
-          <p:cNvPr id="28" name="TextBox 27"/>
+          <p:cNvPr id="18" name="TextBox 17"/>
           <p:cNvSpPr txBox="1"/>
           <p:nvPr/>
         </p:nvSpPr>
@@ -5723,7 +5519,7 @@
       </p:sp>
       <p:sp>
         <p:nvSpPr>
-          <p:cNvPr id="29" name="TextBox 28"/>
+          <p:cNvPr id="19" name="TextBox 18"/>
           <p:cNvSpPr txBox="1"/>
           <p:nvPr/>
         </p:nvSpPr>
@@ -5782,14 +5578,96 @@
       <p:grpSpPr/>
       <p:sp>
         <p:nvSpPr>
-          <p:cNvPr id="2" name="Rectangle 1"/>
+          <p:cNvPr id="2" name="TextBox 1"/>
+          <p:cNvSpPr txBox="1"/>
+          <p:nvPr/>
+        </p:nvSpPr>
+        <p:spPr>
+          <a:xfrm>
+            <a:off x="502920" y="256032"/>
+            <a:ext cx="11155680" cy="256032"/>
+          </a:xfrm>
+          <a:prstGeom prst="rect">
+            <a:avLst/>
+          </a:prstGeom>
+          <a:noFill/>
+        </p:spPr>
+        <p:txBody>
+          <a:bodyPr wrap="square" lIns="0" rIns="0" tIns="0" bIns="0">
+            <a:spAutoFit/>
+          </a:bodyPr>
+          <a:lstStyle/>
+          <a:p>
+            <a:pPr algn="l">
+              <a:spcAft>
+                <a:spcPts val="400"/>
+              </a:spcAft>
+            </a:pPr>
+            <a:r>
+              <a:rPr sz="1000" b="1" i="0">
+                <a:solidFill>
+                  <a:srgbClr val="7823DC"/>
+                </a:solidFill>
+                <a:latin typeface="Yu Gothic"/>
+                <a:ea typeface="Yu Gothic"/>
+                <a:cs typeface="Yu Gothic"/>
+              </a:rPr>
+              <a:t>お願い</a:t>
+            </a:r>
+          </a:p>
+        </p:txBody>
+      </p:sp>
+      <p:sp>
+        <p:nvSpPr>
+          <p:cNvPr id="3" name="TextBox 2"/>
+          <p:cNvSpPr txBox="1"/>
+          <p:nvPr/>
+        </p:nvSpPr>
+        <p:spPr>
+          <a:xfrm>
+            <a:off x="502920" y="512064"/>
+            <a:ext cx="11155680" cy="868680"/>
+          </a:xfrm>
+          <a:prstGeom prst="rect">
+            <a:avLst/>
+          </a:prstGeom>
+          <a:noFill/>
+        </p:spPr>
+        <p:txBody>
+          <a:bodyPr wrap="square" lIns="0" rIns="0" tIns="0" bIns="0">
+            <a:spAutoFit/>
+          </a:bodyPr>
+          <a:lstStyle/>
+          <a:p>
+            <a:pPr algn="l">
+              <a:spcAft>
+                <a:spcPts val="0"/>
+              </a:spcAft>
+            </a:pPr>
+            <a:r>
+              <a:rPr sz="1900" b="1" i="0">
+                <a:solidFill>
+                  <a:srgbClr val="262630"/>
+                </a:solidFill>
+                <a:latin typeface="Yu Gothic"/>
+                <a:ea typeface="Yu Gothic"/>
+                <a:cs typeface="Yu Gothic"/>
+              </a:rPr>
+              <a:t>今週から、この4つをお願いします</a:t>
+            </a:r>
+          </a:p>
+        </p:txBody>
+      </p:sp>
+      <p:sp>
+        <p:nvSpPr>
+          <p:cNvPr id="4" name="Rectangle 3"/>
           <p:cNvSpPr/>
           <p:nvPr/>
         </p:nvSpPr>
         <p:spPr>
           <a:xfrm>
-            <a:off x="0" y="0"/>
-            <a:ext cx="256032" cy="6858000"/>
+            <a:off x="502920" y="1389888"/>
+            <a:ext cx="1463040" cy="33020"/>
           </a:xfrm>
           <a:prstGeom prst="rect">
             <a:avLst/>
@@ -5826,14 +5704,684 @@
       </p:sp>
       <p:sp>
         <p:nvSpPr>
-          <p:cNvPr id="3" name="Rectangle 2"/>
+          <p:cNvPr id="5" name="Rectangle 4"/>
           <p:cNvSpPr/>
           <p:nvPr/>
         </p:nvSpPr>
         <p:spPr>
           <a:xfrm>
-            <a:off x="822960" y="1691640"/>
-            <a:ext cx="10543032" cy="2103120"/>
+            <a:off x="502920" y="1920240"/>
+            <a:ext cx="11183112" cy="932688"/>
+          </a:xfrm>
+          <a:prstGeom prst="rect">
+            <a:avLst/>
+          </a:prstGeom>
+          <a:solidFill>
+            <a:srgbClr val="FFFFFF"/>
+          </a:solidFill>
+          <a:ln w="9525">
+            <a:solidFill>
+              <a:srgbClr val="D9D9E0"/>
+            </a:solidFill>
+          </a:ln>
+          <a:effectLst/>
+        </p:spPr>
+        <p:style>
+          <a:lnRef idx="1">
+            <a:schemeClr val="accent1"/>
+          </a:lnRef>
+          <a:fillRef idx="3">
+            <a:schemeClr val="accent1"/>
+          </a:fillRef>
+          <a:effectRef idx="2">
+            <a:schemeClr val="accent1"/>
+          </a:effectRef>
+          <a:fontRef idx="minor">
+            <a:schemeClr val="lt1"/>
+          </a:fontRef>
+        </p:style>
+        <p:txBody>
+          <a:bodyPr rtlCol="0" anchor="ctr"/>
+          <a:lstStyle/>
+          <a:p>
+            <a:pPr algn="ctr"/>
+          </a:p>
+        </p:txBody>
+      </p:sp>
+      <p:sp>
+        <p:nvSpPr>
+          <p:cNvPr id="6" name="Rectangle 5"/>
+          <p:cNvSpPr/>
+          <p:nvPr/>
+        </p:nvSpPr>
+        <p:spPr>
+          <a:xfrm>
+            <a:off x="502920" y="1920240"/>
+            <a:ext cx="64008" cy="932688"/>
+          </a:xfrm>
+          <a:prstGeom prst="rect">
+            <a:avLst/>
+          </a:prstGeom>
+          <a:solidFill>
+            <a:srgbClr val="7823DC"/>
+          </a:solidFill>
+          <a:ln>
+            <a:noFill/>
+          </a:ln>
+          <a:effectLst/>
+        </p:spPr>
+        <p:style>
+          <a:lnRef idx="1">
+            <a:schemeClr val="accent1"/>
+          </a:lnRef>
+          <a:fillRef idx="3">
+            <a:schemeClr val="accent1"/>
+          </a:fillRef>
+          <a:effectRef idx="2">
+            <a:schemeClr val="accent1"/>
+          </a:effectRef>
+          <a:fontRef idx="minor">
+            <a:schemeClr val="lt1"/>
+          </a:fontRef>
+        </p:style>
+        <p:txBody>
+          <a:bodyPr rtlCol="0" anchor="ctr"/>
+          <a:lstStyle/>
+          <a:p>
+            <a:pPr algn="ctr"/>
+          </a:p>
+        </p:txBody>
+      </p:sp>
+      <p:sp>
+        <p:nvSpPr>
+          <p:cNvPr id="7" name="Oval 6"/>
+          <p:cNvSpPr/>
+          <p:nvPr/>
+        </p:nvSpPr>
+        <p:spPr>
+          <a:xfrm>
+            <a:off x="722376" y="2157984"/>
+            <a:ext cx="457200" cy="457200"/>
+          </a:xfrm>
+          <a:prstGeom prst="ellipse">
+            <a:avLst/>
+          </a:prstGeom>
+          <a:solidFill>
+            <a:srgbClr val="7823DC"/>
+          </a:solidFill>
+          <a:ln>
+            <a:noFill/>
+          </a:ln>
+          <a:effectLst/>
+        </p:spPr>
+        <p:style>
+          <a:lnRef idx="1">
+            <a:schemeClr val="accent1"/>
+          </a:lnRef>
+          <a:fillRef idx="3">
+            <a:schemeClr val="accent1"/>
+          </a:fillRef>
+          <a:effectRef idx="2">
+            <a:schemeClr val="accent1"/>
+          </a:effectRef>
+          <a:fontRef idx="minor">
+            <a:schemeClr val="lt1"/>
+          </a:fontRef>
+        </p:style>
+        <p:txBody>
+          <a:bodyPr rtlCol="0" anchor="ctr" wrap="none" lIns="0" rIns="0" tIns="0" bIns="0"/>
+          <a:lstStyle/>
+          <a:p>
+            <a:pPr algn="ctr">
+              <a:spcAft>
+                <a:spcPts val="0"/>
+              </a:spcAft>
+            </a:pPr>
+            <a:r>
+              <a:rPr sz="1800" b="1" i="0">
+                <a:solidFill>
+                  <a:srgbClr val="FFFFFF"/>
+                </a:solidFill>
+                <a:latin typeface="Yu Gothic"/>
+                <a:ea typeface="Yu Gothic"/>
+                <a:cs typeface="Yu Gothic"/>
+              </a:rPr>
+              <a:t>1</a:t>
+            </a:r>
+          </a:p>
+        </p:txBody>
+      </p:sp>
+      <p:sp>
+        <p:nvSpPr>
+          <p:cNvPr id="8" name="TextBox 7"/>
+          <p:cNvSpPr txBox="1"/>
+          <p:nvPr/>
+        </p:nvSpPr>
+        <p:spPr>
+          <a:xfrm>
+            <a:off x="1380744" y="2048256"/>
+            <a:ext cx="10104120" cy="713232"/>
+          </a:xfrm>
+          <a:prstGeom prst="rect">
+            <a:avLst/>
+          </a:prstGeom>
+          <a:noFill/>
+        </p:spPr>
+        <p:txBody>
+          <a:bodyPr wrap="square" lIns="0" rIns="0" tIns="0" bIns="0" anchor="ctr">
+            <a:spAutoFit/>
+          </a:bodyPr>
+          <a:lstStyle/>
+          <a:p>
+            <a:pPr algn="l">
+              <a:spcAft>
+                <a:spcPts val="400"/>
+              </a:spcAft>
+            </a:pPr>
+            <a:r>
+              <a:rPr sz="1300" b="1" i="0">
+                <a:solidFill>
+                  <a:srgbClr val="3A106E"/>
+                </a:solidFill>
+                <a:latin typeface="Yu Gothic"/>
+                <a:ea typeface="Yu Gothic"/>
+                <a:cs typeface="Yu Gothic"/>
+              </a:rPr>
+              <a:t>確認会の日程確保（お一人2〜3時間）</a:t>
+            </a:r>
+          </a:p>
+          <a:p>
+            <a:pPr algn="l">
+              <a:spcAft>
+                <a:spcPts val="0"/>
+              </a:spcAft>
+            </a:pPr>
+            <a:r>
+              <a:rPr sz="1050" b="0" i="0">
+                <a:solidFill>
+                  <a:srgbClr val="262630"/>
+                </a:solidFill>
+                <a:latin typeface="Yu Gothic"/>
+                <a:ea typeface="Yu Gothic"/>
+                <a:cs typeface="Yu Gothic"/>
+              </a:rPr>
+              <a:t>担当者の確認と事実の確認だけ。事前準備は不要です</a:t>
+            </a:r>
+          </a:p>
+        </p:txBody>
+      </p:sp>
+      <p:sp>
+        <p:nvSpPr>
+          <p:cNvPr id="9" name="Rectangle 8"/>
+          <p:cNvSpPr/>
+          <p:nvPr/>
+        </p:nvSpPr>
+        <p:spPr>
+          <a:xfrm>
+            <a:off x="502920" y="2999232"/>
+            <a:ext cx="11183112" cy="932688"/>
+          </a:xfrm>
+          <a:prstGeom prst="rect">
+            <a:avLst/>
+          </a:prstGeom>
+          <a:solidFill>
+            <a:srgbClr val="FFFFFF"/>
+          </a:solidFill>
+          <a:ln w="9525">
+            <a:solidFill>
+              <a:srgbClr val="D9D9E0"/>
+            </a:solidFill>
+          </a:ln>
+          <a:effectLst/>
+        </p:spPr>
+        <p:style>
+          <a:lnRef idx="1">
+            <a:schemeClr val="accent1"/>
+          </a:lnRef>
+          <a:fillRef idx="3">
+            <a:schemeClr val="accent1"/>
+          </a:fillRef>
+          <a:effectRef idx="2">
+            <a:schemeClr val="accent1"/>
+          </a:effectRef>
+          <a:fontRef idx="minor">
+            <a:schemeClr val="lt1"/>
+          </a:fontRef>
+        </p:style>
+        <p:txBody>
+          <a:bodyPr rtlCol="0" anchor="ctr"/>
+          <a:lstStyle/>
+          <a:p>
+            <a:pPr algn="ctr"/>
+          </a:p>
+        </p:txBody>
+      </p:sp>
+      <p:sp>
+        <p:nvSpPr>
+          <p:cNvPr id="10" name="Rectangle 9"/>
+          <p:cNvSpPr/>
+          <p:nvPr/>
+        </p:nvSpPr>
+        <p:spPr>
+          <a:xfrm>
+            <a:off x="502920" y="2999232"/>
+            <a:ext cx="64008" cy="932688"/>
+          </a:xfrm>
+          <a:prstGeom prst="rect">
+            <a:avLst/>
+          </a:prstGeom>
+          <a:solidFill>
+            <a:srgbClr val="7823DC"/>
+          </a:solidFill>
+          <a:ln>
+            <a:noFill/>
+          </a:ln>
+          <a:effectLst/>
+        </p:spPr>
+        <p:style>
+          <a:lnRef idx="1">
+            <a:schemeClr val="accent1"/>
+          </a:lnRef>
+          <a:fillRef idx="3">
+            <a:schemeClr val="accent1"/>
+          </a:fillRef>
+          <a:effectRef idx="2">
+            <a:schemeClr val="accent1"/>
+          </a:effectRef>
+          <a:fontRef idx="minor">
+            <a:schemeClr val="lt1"/>
+          </a:fontRef>
+        </p:style>
+        <p:txBody>
+          <a:bodyPr rtlCol="0" anchor="ctr"/>
+          <a:lstStyle/>
+          <a:p>
+            <a:pPr algn="ctr"/>
+          </a:p>
+        </p:txBody>
+      </p:sp>
+      <p:sp>
+        <p:nvSpPr>
+          <p:cNvPr id="11" name="Oval 10"/>
+          <p:cNvSpPr/>
+          <p:nvPr/>
+        </p:nvSpPr>
+        <p:spPr>
+          <a:xfrm>
+            <a:off x="722376" y="3236976"/>
+            <a:ext cx="457200" cy="457200"/>
+          </a:xfrm>
+          <a:prstGeom prst="ellipse">
+            <a:avLst/>
+          </a:prstGeom>
+          <a:solidFill>
+            <a:srgbClr val="7823DC"/>
+          </a:solidFill>
+          <a:ln>
+            <a:noFill/>
+          </a:ln>
+          <a:effectLst/>
+        </p:spPr>
+        <p:style>
+          <a:lnRef idx="1">
+            <a:schemeClr val="accent1"/>
+          </a:lnRef>
+          <a:fillRef idx="3">
+            <a:schemeClr val="accent1"/>
+          </a:fillRef>
+          <a:effectRef idx="2">
+            <a:schemeClr val="accent1"/>
+          </a:effectRef>
+          <a:fontRef idx="minor">
+            <a:schemeClr val="lt1"/>
+          </a:fontRef>
+        </p:style>
+        <p:txBody>
+          <a:bodyPr rtlCol="0" anchor="ctr" wrap="none" lIns="0" rIns="0" tIns="0" bIns="0"/>
+          <a:lstStyle/>
+          <a:p>
+            <a:pPr algn="ctr">
+              <a:spcAft>
+                <a:spcPts val="0"/>
+              </a:spcAft>
+            </a:pPr>
+            <a:r>
+              <a:rPr sz="1800" b="1" i="0">
+                <a:solidFill>
+                  <a:srgbClr val="FFFFFF"/>
+                </a:solidFill>
+                <a:latin typeface="Yu Gothic"/>
+                <a:ea typeface="Yu Gothic"/>
+                <a:cs typeface="Yu Gothic"/>
+              </a:rPr>
+              <a:t>2</a:t>
+            </a:r>
+          </a:p>
+        </p:txBody>
+      </p:sp>
+      <p:sp>
+        <p:nvSpPr>
+          <p:cNvPr id="12" name="TextBox 11"/>
+          <p:cNvSpPr txBox="1"/>
+          <p:nvPr/>
+        </p:nvSpPr>
+        <p:spPr>
+          <a:xfrm>
+            <a:off x="1380744" y="3127248"/>
+            <a:ext cx="10104120" cy="713232"/>
+          </a:xfrm>
+          <a:prstGeom prst="rect">
+            <a:avLst/>
+          </a:prstGeom>
+          <a:noFill/>
+        </p:spPr>
+        <p:txBody>
+          <a:bodyPr wrap="square" lIns="0" rIns="0" tIns="0" bIns="0" anchor="ctr">
+            <a:spAutoFit/>
+          </a:bodyPr>
+          <a:lstStyle/>
+          <a:p>
+            <a:pPr algn="l">
+              <a:spcAft>
+                <a:spcPts val="400"/>
+              </a:spcAft>
+            </a:pPr>
+            <a:r>
+              <a:rPr sz="1300" b="1" i="0">
+                <a:solidFill>
+                  <a:srgbClr val="3A106E"/>
+                </a:solidFill>
+                <a:latin typeface="Yu Gothic"/>
+                <a:ea typeface="Yu Gothic"/>
+                <a:cs typeface="Yu Gothic"/>
+              </a:rPr>
+              <a:t>担当確認一覧への対応</a:t>
+            </a:r>
+          </a:p>
+          <a:p>
+            <a:pPr algn="l">
+              <a:spcAft>
+                <a:spcPts val="0"/>
+              </a:spcAft>
+            </a:pPr>
+            <a:r>
+              <a:rPr sz="1050" b="0" i="0">
+                <a:solidFill>
+                  <a:srgbClr val="262630"/>
+                </a:solidFill>
+                <a:latin typeface="Yu Gothic"/>
+                <a:ea typeface="Yu Gothic"/>
+                <a:cs typeface="Yu Gothic"/>
+              </a:rPr>
+              <a:t>事前に配布します。当日冒頭15分で確定します</a:t>
+            </a:r>
+          </a:p>
+        </p:txBody>
+      </p:sp>
+      <p:sp>
+        <p:nvSpPr>
+          <p:cNvPr id="13" name="Rectangle 12"/>
+          <p:cNvSpPr/>
+          <p:nvPr/>
+        </p:nvSpPr>
+        <p:spPr>
+          <a:xfrm>
+            <a:off x="502920" y="4078224"/>
+            <a:ext cx="11183112" cy="932688"/>
+          </a:xfrm>
+          <a:prstGeom prst="rect">
+            <a:avLst/>
+          </a:prstGeom>
+          <a:solidFill>
+            <a:srgbClr val="FFFFFF"/>
+          </a:solidFill>
+          <a:ln w="9525">
+            <a:solidFill>
+              <a:srgbClr val="D9D9E0"/>
+            </a:solidFill>
+          </a:ln>
+          <a:effectLst/>
+        </p:spPr>
+        <p:style>
+          <a:lnRef idx="1">
+            <a:schemeClr val="accent1"/>
+          </a:lnRef>
+          <a:fillRef idx="3">
+            <a:schemeClr val="accent1"/>
+          </a:fillRef>
+          <a:effectRef idx="2">
+            <a:schemeClr val="accent1"/>
+          </a:effectRef>
+          <a:fontRef idx="minor">
+            <a:schemeClr val="lt1"/>
+          </a:fontRef>
+        </p:style>
+        <p:txBody>
+          <a:bodyPr rtlCol="0" anchor="ctr"/>
+          <a:lstStyle/>
+          <a:p>
+            <a:pPr algn="ctr"/>
+          </a:p>
+        </p:txBody>
+      </p:sp>
+      <p:sp>
+        <p:nvSpPr>
+          <p:cNvPr id="14" name="Rectangle 13"/>
+          <p:cNvSpPr/>
+          <p:nvPr/>
+        </p:nvSpPr>
+        <p:spPr>
+          <a:xfrm>
+            <a:off x="502920" y="4078224"/>
+            <a:ext cx="64008" cy="932688"/>
+          </a:xfrm>
+          <a:prstGeom prst="rect">
+            <a:avLst/>
+          </a:prstGeom>
+          <a:solidFill>
+            <a:srgbClr val="7823DC"/>
+          </a:solidFill>
+          <a:ln>
+            <a:noFill/>
+          </a:ln>
+          <a:effectLst/>
+        </p:spPr>
+        <p:style>
+          <a:lnRef idx="1">
+            <a:schemeClr val="accent1"/>
+          </a:lnRef>
+          <a:fillRef idx="3">
+            <a:schemeClr val="accent1"/>
+          </a:fillRef>
+          <a:effectRef idx="2">
+            <a:schemeClr val="accent1"/>
+          </a:effectRef>
+          <a:fontRef idx="minor">
+            <a:schemeClr val="lt1"/>
+          </a:fontRef>
+        </p:style>
+        <p:txBody>
+          <a:bodyPr rtlCol="0" anchor="ctr"/>
+          <a:lstStyle/>
+          <a:p>
+            <a:pPr algn="ctr"/>
+          </a:p>
+        </p:txBody>
+      </p:sp>
+      <p:sp>
+        <p:nvSpPr>
+          <p:cNvPr id="15" name="Oval 14"/>
+          <p:cNvSpPr/>
+          <p:nvPr/>
+        </p:nvSpPr>
+        <p:spPr>
+          <a:xfrm>
+            <a:off x="722376" y="4315968"/>
+            <a:ext cx="457200" cy="457200"/>
+          </a:xfrm>
+          <a:prstGeom prst="ellipse">
+            <a:avLst/>
+          </a:prstGeom>
+          <a:solidFill>
+            <a:srgbClr val="7823DC"/>
+          </a:solidFill>
+          <a:ln>
+            <a:noFill/>
+          </a:ln>
+          <a:effectLst/>
+        </p:spPr>
+        <p:style>
+          <a:lnRef idx="1">
+            <a:schemeClr val="accent1"/>
+          </a:lnRef>
+          <a:fillRef idx="3">
+            <a:schemeClr val="accent1"/>
+          </a:fillRef>
+          <a:effectRef idx="2">
+            <a:schemeClr val="accent1"/>
+          </a:effectRef>
+          <a:fontRef idx="minor">
+            <a:schemeClr val="lt1"/>
+          </a:fontRef>
+        </p:style>
+        <p:txBody>
+          <a:bodyPr rtlCol="0" anchor="ctr" wrap="none" lIns="0" rIns="0" tIns="0" bIns="0"/>
+          <a:lstStyle/>
+          <a:p>
+            <a:pPr algn="ctr">
+              <a:spcAft>
+                <a:spcPts val="0"/>
+              </a:spcAft>
+            </a:pPr>
+            <a:r>
+              <a:rPr sz="1800" b="1" i="0">
+                <a:solidFill>
+                  <a:srgbClr val="FFFFFF"/>
+                </a:solidFill>
+                <a:latin typeface="Yu Gothic"/>
+                <a:ea typeface="Yu Gothic"/>
+                <a:cs typeface="Yu Gothic"/>
+              </a:rPr>
+              <a:t>3</a:t>
+            </a:r>
+          </a:p>
+        </p:txBody>
+      </p:sp>
+      <p:sp>
+        <p:nvSpPr>
+          <p:cNvPr id="16" name="TextBox 15"/>
+          <p:cNvSpPr txBox="1"/>
+          <p:nvPr/>
+        </p:nvSpPr>
+        <p:spPr>
+          <a:xfrm>
+            <a:off x="1380744" y="4206240"/>
+            <a:ext cx="10104120" cy="713232"/>
+          </a:xfrm>
+          <a:prstGeom prst="rect">
+            <a:avLst/>
+          </a:prstGeom>
+          <a:noFill/>
+        </p:spPr>
+        <p:txBody>
+          <a:bodyPr wrap="square" lIns="0" rIns="0" tIns="0" bIns="0" anchor="ctr">
+            <a:spAutoFit/>
+          </a:bodyPr>
+          <a:lstStyle/>
+          <a:p>
+            <a:pPr algn="l">
+              <a:spcAft>
+                <a:spcPts val="400"/>
+              </a:spcAft>
+            </a:pPr>
+            <a:r>
+              <a:rPr sz="1300" b="1" i="0">
+                <a:solidFill>
+                  <a:srgbClr val="3A106E"/>
+                </a:solidFill>
+                <a:latin typeface="Yu Gothic"/>
+                <a:ea typeface="Yu Gothic"/>
+                <a:cs typeface="Yu Gothic"/>
+              </a:rPr>
+              <a:t>分科会の初回日程</a:t>
+            </a:r>
+          </a:p>
+          <a:p>
+            <a:pPr algn="l">
+              <a:spcAft>
+                <a:spcPts val="0"/>
+              </a:spcAft>
+            </a:pPr>
+            <a:r>
+              <a:rPr sz="1050" b="0" i="0">
+                <a:solidFill>
+                  <a:srgbClr val="262630"/>
+                </a:solidFill>
+                <a:latin typeface="Yu Gothic"/>
+                <a:ea typeface="Yu Gothic"/>
+                <a:cs typeface="Yu Gothic"/>
+              </a:rPr>
+              <a:t>リーダーの皆さんと今週中に固めます</a:t>
+            </a:r>
+          </a:p>
+        </p:txBody>
+      </p:sp>
+      <p:sp>
+        <p:nvSpPr>
+          <p:cNvPr id="17" name="Rectangle 16"/>
+          <p:cNvSpPr/>
+          <p:nvPr/>
+        </p:nvSpPr>
+        <p:spPr>
+          <a:xfrm>
+            <a:off x="502920" y="5157216"/>
+            <a:ext cx="11183112" cy="932688"/>
+          </a:xfrm>
+          <a:prstGeom prst="rect">
+            <a:avLst/>
+          </a:prstGeom>
+          <a:solidFill>
+            <a:srgbClr val="FFFFFF"/>
+          </a:solidFill>
+          <a:ln w="9525">
+            <a:solidFill>
+              <a:srgbClr val="D9D9E0"/>
+            </a:solidFill>
+          </a:ln>
+          <a:effectLst/>
+        </p:spPr>
+        <p:style>
+          <a:lnRef idx="1">
+            <a:schemeClr val="accent1"/>
+          </a:lnRef>
+          <a:fillRef idx="3">
+            <a:schemeClr val="accent1"/>
+          </a:fillRef>
+          <a:effectRef idx="2">
+            <a:schemeClr val="accent1"/>
+          </a:effectRef>
+          <a:fontRef idx="minor">
+            <a:schemeClr val="lt1"/>
+          </a:fontRef>
+        </p:style>
+        <p:txBody>
+          <a:bodyPr rtlCol="0" anchor="ctr"/>
+          <a:lstStyle/>
+          <a:p>
+            <a:pPr algn="ctr"/>
+          </a:p>
+        </p:txBody>
+      </p:sp>
+      <p:sp>
+        <p:nvSpPr>
+          <p:cNvPr id="18" name="Rectangle 17"/>
+          <p:cNvSpPr/>
+          <p:nvPr/>
+        </p:nvSpPr>
+        <p:spPr>
+          <a:xfrm>
+            <a:off x="502920" y="5157216"/>
+            <a:ext cx="64008" cy="932688"/>
           </a:xfrm>
           <a:prstGeom prst="rect">
             <a:avLst/>
@@ -5870,14 +6418,358 @@
       </p:sp>
       <p:sp>
         <p:nvSpPr>
+          <p:cNvPr id="19" name="Oval 18"/>
+          <p:cNvSpPr/>
+          <p:nvPr/>
+        </p:nvSpPr>
+        <p:spPr>
+          <a:xfrm>
+            <a:off x="722376" y="5394960"/>
+            <a:ext cx="457200" cy="457200"/>
+          </a:xfrm>
+          <a:prstGeom prst="ellipse">
+            <a:avLst/>
+          </a:prstGeom>
+          <a:solidFill>
+            <a:srgbClr val="3A106E"/>
+          </a:solidFill>
+          <a:ln>
+            <a:noFill/>
+          </a:ln>
+          <a:effectLst/>
+        </p:spPr>
+        <p:style>
+          <a:lnRef idx="1">
+            <a:schemeClr val="accent1"/>
+          </a:lnRef>
+          <a:fillRef idx="3">
+            <a:schemeClr val="accent1"/>
+          </a:fillRef>
+          <a:effectRef idx="2">
+            <a:schemeClr val="accent1"/>
+          </a:effectRef>
+          <a:fontRef idx="minor">
+            <a:schemeClr val="lt1"/>
+          </a:fontRef>
+        </p:style>
+        <p:txBody>
+          <a:bodyPr rtlCol="0" anchor="ctr" wrap="none" lIns="0" rIns="0" tIns="0" bIns="0"/>
+          <a:lstStyle/>
+          <a:p>
+            <a:pPr algn="ctr">
+              <a:spcAft>
+                <a:spcPts val="0"/>
+              </a:spcAft>
+            </a:pPr>
+            <a:r>
+              <a:rPr sz="1800" b="1" i="0">
+                <a:solidFill>
+                  <a:srgbClr val="FFFFFF"/>
+                </a:solidFill>
+                <a:latin typeface="Yu Gothic"/>
+                <a:ea typeface="Yu Gothic"/>
+                <a:cs typeface="Yu Gothic"/>
+              </a:rPr>
+              <a:t>4</a:t>
+            </a:r>
+          </a:p>
+        </p:txBody>
+      </p:sp>
+      <p:sp>
+        <p:nvSpPr>
+          <p:cNvPr id="20" name="TextBox 19"/>
+          <p:cNvSpPr txBox="1"/>
+          <p:nvPr/>
+        </p:nvSpPr>
+        <p:spPr>
+          <a:xfrm>
+            <a:off x="1380744" y="5285232"/>
+            <a:ext cx="10104120" cy="713232"/>
+          </a:xfrm>
+          <a:prstGeom prst="rect">
+            <a:avLst/>
+          </a:prstGeom>
+          <a:noFill/>
+        </p:spPr>
+        <p:txBody>
+          <a:bodyPr wrap="square" lIns="0" rIns="0" tIns="0" bIns="0" anchor="ctr">
+            <a:spAutoFit/>
+          </a:bodyPr>
+          <a:lstStyle/>
+          <a:p>
+            <a:pPr algn="l">
+              <a:spcAft>
+                <a:spcPts val="400"/>
+              </a:spcAft>
+            </a:pPr>
+            <a:r>
+              <a:rPr sz="1300" b="1" i="0">
+                <a:solidFill>
+                  <a:srgbClr val="3A106E"/>
+                </a:solidFill>
+                <a:latin typeface="Yu Gothic"/>
+                <a:ea typeface="Yu Gothic"/>
+                <a:cs typeface="Yu Gothic"/>
+              </a:rPr>
+              <a:t>評価・採点はまだ始めません</a:t>
+            </a:r>
+          </a:p>
+          <a:p>
+            <a:pPr algn="l">
+              <a:spcAft>
+                <a:spcPts val="0"/>
+              </a:spcAft>
+            </a:pPr>
+            <a:r>
+              <a:rPr sz="1050" b="0" i="0">
+                <a:solidFill>
+                  <a:srgbClr val="262630"/>
+                </a:solidFill>
+                <a:latin typeface="Yu Gothic"/>
+                <a:ea typeface="Yu Gothic"/>
+                <a:cs typeface="Yu Gothic"/>
+              </a:rPr>
+              <a:t>金額データが揃ってから。順番を守ります</a:t>
+            </a:r>
+          </a:p>
+        </p:txBody>
+      </p:sp>
+      <p:sp>
+        <p:nvSpPr>
+          <p:cNvPr id="21" name="Rectangle 20"/>
+          <p:cNvSpPr/>
+          <p:nvPr/>
+        </p:nvSpPr>
+        <p:spPr>
+          <a:xfrm>
+            <a:off x="502920" y="6510528"/>
+            <a:ext cx="11183112" cy="15240"/>
+          </a:xfrm>
+          <a:prstGeom prst="rect">
+            <a:avLst/>
+          </a:prstGeom>
+          <a:solidFill>
+            <a:srgbClr val="D9D9E0"/>
+          </a:solidFill>
+          <a:ln>
+            <a:noFill/>
+          </a:ln>
+          <a:effectLst/>
+        </p:spPr>
+        <p:style>
+          <a:lnRef idx="1">
+            <a:schemeClr val="accent1"/>
+          </a:lnRef>
+          <a:fillRef idx="3">
+            <a:schemeClr val="accent1"/>
+          </a:fillRef>
+          <a:effectRef idx="2">
+            <a:schemeClr val="accent1"/>
+          </a:effectRef>
+          <a:fontRef idx="minor">
+            <a:schemeClr val="lt1"/>
+          </a:fontRef>
+        </p:style>
+        <p:txBody>
+          <a:bodyPr rtlCol="0" anchor="ctr"/>
+          <a:lstStyle/>
+          <a:p>
+            <a:pPr algn="ctr"/>
+          </a:p>
+        </p:txBody>
+      </p:sp>
+      <p:sp>
+        <p:nvSpPr>
+          <p:cNvPr id="22" name="TextBox 21"/>
+          <p:cNvSpPr txBox="1"/>
+          <p:nvPr/>
+        </p:nvSpPr>
+        <p:spPr>
+          <a:xfrm>
+            <a:off x="502920" y="6565392"/>
+            <a:ext cx="8686800" cy="274320"/>
+          </a:xfrm>
+          <a:prstGeom prst="rect">
+            <a:avLst/>
+          </a:prstGeom>
+          <a:noFill/>
+        </p:spPr>
+        <p:txBody>
+          <a:bodyPr wrap="square" lIns="0" rIns="0" tIns="0" bIns="0">
+            <a:spAutoFit/>
+          </a:bodyPr>
+          <a:lstStyle/>
+          <a:p>
+            <a:pPr algn="l">
+              <a:spcAft>
+                <a:spcPts val="400"/>
+              </a:spcAft>
+            </a:pPr>
+            <a:r>
+              <a:rPr sz="750" b="0" i="0">
+                <a:solidFill>
+                  <a:srgbClr val="8A8A99"/>
+                </a:solidFill>
+                <a:latin typeface="Yu Gothic"/>
+                <a:ea typeface="Yu Gothic"/>
+                <a:cs typeface="Yu Gothic"/>
+              </a:rPr>
+              <a:t>円谷プロダクション 営業改革 | 社外秘</a:t>
+            </a:r>
+          </a:p>
+        </p:txBody>
+      </p:sp>
+      <p:sp>
+        <p:nvSpPr>
+          <p:cNvPr id="23" name="TextBox 22"/>
+          <p:cNvSpPr txBox="1"/>
+          <p:nvPr/>
+        </p:nvSpPr>
+        <p:spPr>
+          <a:xfrm>
+            <a:off x="11247120" y="6565392"/>
+            <a:ext cx="457200" cy="274320"/>
+          </a:xfrm>
+          <a:prstGeom prst="rect">
+            <a:avLst/>
+          </a:prstGeom>
+          <a:noFill/>
+        </p:spPr>
+        <p:txBody>
+          <a:bodyPr wrap="square" lIns="0" rIns="0" tIns="0" bIns="0">
+            <a:spAutoFit/>
+          </a:bodyPr>
+          <a:lstStyle/>
+          <a:p>
+            <a:pPr algn="r">
+              <a:spcAft>
+                <a:spcPts val="400"/>
+              </a:spcAft>
+            </a:pPr>
+            <a:r>
+              <a:rPr sz="900" b="0" i="0">
+                <a:solidFill>
+                  <a:srgbClr val="5F5F6E"/>
+                </a:solidFill>
+                <a:latin typeface="Yu Gothic"/>
+                <a:ea typeface="Yu Gothic"/>
+                <a:cs typeface="Yu Gothic"/>
+              </a:rPr>
+              <a:t>12</a:t>
+            </a:r>
+          </a:p>
+        </p:txBody>
+      </p:sp>
+    </p:spTree>
+  </p:cSld>
+  <p:clrMapOvr>
+    <a:masterClrMapping/>
+  </p:clrMapOvr>
+</p:sld>
+</file>
+
+<file path=ppt/slides/slide13.xml><?xml version="1.0" encoding="utf-8"?>
+<p:sld xmlns:a="http://schemas.openxmlformats.org/drawingml/2006/main" xmlns:p="http://schemas.openxmlformats.org/presentationml/2006/main" xmlns:r="http://schemas.openxmlformats.org/officeDocument/2006/relationships">
+  <p:cSld>
+    <p:spTree>
+      <p:nvGrpSpPr>
+        <p:cNvPr id="1" name=""/>
+        <p:cNvGrpSpPr/>
+        <p:nvPr/>
+      </p:nvGrpSpPr>
+      <p:grpSpPr/>
+      <p:sp>
+        <p:nvSpPr>
+          <p:cNvPr id="2" name="TextBox 1"/>
+          <p:cNvSpPr txBox="1"/>
+          <p:nvPr/>
+        </p:nvSpPr>
+        <p:spPr>
+          <a:xfrm>
+            <a:off x="502920" y="256032"/>
+            <a:ext cx="11155680" cy="256032"/>
+          </a:xfrm>
+          <a:prstGeom prst="rect">
+            <a:avLst/>
+          </a:prstGeom>
+          <a:noFill/>
+        </p:spPr>
+        <p:txBody>
+          <a:bodyPr wrap="square" lIns="0" rIns="0" tIns="0" bIns="0">
+            <a:spAutoFit/>
+          </a:bodyPr>
+          <a:lstStyle/>
+          <a:p>
+            <a:pPr algn="l">
+              <a:spcAft>
+                <a:spcPts val="400"/>
+              </a:spcAft>
+            </a:pPr>
+            <a:r>
+              <a:rPr sz="1000" b="1" i="0">
+                <a:solidFill>
+                  <a:srgbClr val="7823DC"/>
+                </a:solidFill>
+                <a:latin typeface="Yu Gothic"/>
+                <a:ea typeface="Yu Gothic"/>
+                <a:cs typeface="Yu Gothic"/>
+              </a:rPr>
+              <a:t>道筋</a:t>
+            </a:r>
+          </a:p>
+        </p:txBody>
+      </p:sp>
+      <p:sp>
+        <p:nvSpPr>
+          <p:cNvPr id="3" name="TextBox 2"/>
+          <p:cNvSpPr txBox="1"/>
+          <p:nvPr/>
+        </p:nvSpPr>
+        <p:spPr>
+          <a:xfrm>
+            <a:off x="502920" y="512064"/>
+            <a:ext cx="11155680" cy="868680"/>
+          </a:xfrm>
+          <a:prstGeom prst="rect">
+            <a:avLst/>
+          </a:prstGeom>
+          <a:noFill/>
+        </p:spPr>
+        <p:txBody>
+          <a:bodyPr wrap="square" lIns="0" rIns="0" tIns="0" bIns="0">
+            <a:spAutoFit/>
+          </a:bodyPr>
+          <a:lstStyle/>
+          <a:p>
+            <a:pPr algn="l">
+              <a:spcAft>
+                <a:spcPts val="0"/>
+              </a:spcAft>
+            </a:pPr>
+            <a:r>
+              <a:rPr sz="1900" b="1" i="0">
+                <a:solidFill>
+                  <a:srgbClr val="262630"/>
+                </a:solidFill>
+                <a:latin typeface="Yu Gothic"/>
+                <a:ea typeface="Yu Gothic"/>
+                <a:cs typeface="Yu Gothic"/>
+              </a:rPr>
+              <a:t>これからの90日 — 順番を守って進めます</a:t>
+            </a:r>
+          </a:p>
+        </p:txBody>
+      </p:sp>
+      <p:sp>
+        <p:nvSpPr>
           <p:cNvPr id="4" name="Rectangle 3"/>
           <p:cNvSpPr/>
           <p:nvPr/>
         </p:nvSpPr>
         <p:spPr>
           <a:xfrm>
-            <a:off x="822960" y="1691640"/>
-            <a:ext cx="50800" cy="2103120"/>
+            <a:off x="502920" y="1389888"/>
+            <a:ext cx="1463040" cy="33020"/>
           </a:xfrm>
           <a:prstGeom prst="rect">
             <a:avLst/>
@@ -5914,14 +6806,104 @@
       </p:sp>
       <p:sp>
         <p:nvSpPr>
-          <p:cNvPr id="5" name="TextBox 4"/>
+          <p:cNvPr id="5" name="Rectangle 4"/>
+          <p:cNvSpPr/>
+          <p:nvPr/>
+        </p:nvSpPr>
+        <p:spPr>
+          <a:xfrm>
+            <a:off x="502920" y="2103120"/>
+            <a:ext cx="2542032" cy="1554480"/>
+          </a:xfrm>
+          <a:prstGeom prst="rect">
+            <a:avLst/>
+          </a:prstGeom>
+          <a:solidFill>
+            <a:srgbClr val="FFFFFF"/>
+          </a:solidFill>
+          <a:ln w="9525">
+            <a:solidFill>
+              <a:srgbClr val="D9D9E0"/>
+            </a:solidFill>
+          </a:ln>
+          <a:effectLst/>
+        </p:spPr>
+        <p:style>
+          <a:lnRef idx="1">
+            <a:schemeClr val="accent1"/>
+          </a:lnRef>
+          <a:fillRef idx="3">
+            <a:schemeClr val="accent1"/>
+          </a:fillRef>
+          <a:effectRef idx="2">
+            <a:schemeClr val="accent1"/>
+          </a:effectRef>
+          <a:fontRef idx="minor">
+            <a:schemeClr val="lt1"/>
+          </a:fontRef>
+        </p:style>
+        <p:txBody>
+          <a:bodyPr rtlCol="0" anchor="ctr"/>
+          <a:lstStyle/>
+          <a:p>
+            <a:pPr algn="ctr"/>
+          </a:p>
+        </p:txBody>
+      </p:sp>
+      <p:sp>
+        <p:nvSpPr>
+          <p:cNvPr id="6" name="Rectangle 5"/>
+          <p:cNvSpPr/>
+          <p:nvPr/>
+        </p:nvSpPr>
+        <p:spPr>
+          <a:xfrm>
+            <a:off x="502920" y="2103120"/>
+            <a:ext cx="2542032" cy="512064"/>
+          </a:xfrm>
+          <a:prstGeom prst="rect">
+            <a:avLst/>
+          </a:prstGeom>
+          <a:solidFill>
+            <a:srgbClr val="7823DC"/>
+          </a:solidFill>
+          <a:ln>
+            <a:noFill/>
+          </a:ln>
+          <a:effectLst/>
+        </p:spPr>
+        <p:style>
+          <a:lnRef idx="1">
+            <a:schemeClr val="accent1"/>
+          </a:lnRef>
+          <a:fillRef idx="3">
+            <a:schemeClr val="accent1"/>
+          </a:fillRef>
+          <a:effectRef idx="2">
+            <a:schemeClr val="accent1"/>
+          </a:effectRef>
+          <a:fontRef idx="minor">
+            <a:schemeClr val="lt1"/>
+          </a:fontRef>
+        </p:style>
+        <p:txBody>
+          <a:bodyPr rtlCol="0" anchor="ctr"/>
+          <a:lstStyle/>
+          <a:p>
+            <a:pPr algn="ctr"/>
+          </a:p>
+        </p:txBody>
+      </p:sp>
+      <p:sp>
+        <p:nvSpPr>
+          <p:cNvPr id="7" name="TextBox 6"/>
           <p:cNvSpPr txBox="1"/>
           <p:nvPr/>
         </p:nvSpPr>
         <p:spPr>
           <a:xfrm>
-            <a:off x="1234440" y="1920240"/>
-            <a:ext cx="9784080" cy="1645920"/>
+            <a:off x="502920" y="2176272"/>
+            <a:ext cx="2542032" cy="384048"/>
           </a:xfrm>
           <a:prstGeom prst="rect">
             <a:avLst/>
@@ -5934,13 +6916,13 @@
           </a:bodyPr>
           <a:lstStyle/>
           <a:p>
-            <a:pPr algn="l">
+            <a:pPr algn="ctr">
               <a:spcAft>
-                <a:spcPts val="800"/>
+                <a:spcPts val="0"/>
               </a:spcAft>
             </a:pPr>
             <a:r>
-              <a:rPr sz="2200" b="1" i="0">
+              <a:rPr sz="1600" b="1" i="0">
                 <a:solidFill>
                   <a:srgbClr val="FFFFFF"/>
                 </a:solidFill>
@@ -5948,9 +6930,881 @@
                 <a:ea typeface="Yu Gothic"/>
                 <a:cs typeface="Yu Gothic"/>
               </a:rPr>
-              <a:t>見える化は、管理のためではありません。</a:t>
-            </a:r>
-          </a:p>
+              <a:t>今週</a:t>
+            </a:r>
+          </a:p>
+        </p:txBody>
+      </p:sp>
+      <p:sp>
+        <p:nvSpPr>
+          <p:cNvPr id="8" name="TextBox 7"/>
+          <p:cNvSpPr txBox="1"/>
+          <p:nvPr/>
+        </p:nvSpPr>
+        <p:spPr>
+          <a:xfrm>
+            <a:off x="630936" y="2761488"/>
+            <a:ext cx="2286000" cy="822960"/>
+          </a:xfrm>
+          <a:prstGeom prst="rect">
+            <a:avLst/>
+          </a:prstGeom>
+          <a:noFill/>
+        </p:spPr>
+        <p:txBody>
+          <a:bodyPr wrap="square" lIns="0" rIns="0" tIns="0" bIns="0" anchor="ctr">
+            <a:spAutoFit/>
+          </a:bodyPr>
+          <a:lstStyle/>
+          <a:p>
+            <a:pPr algn="ctr">
+              <a:spcAft>
+                <a:spcPts val="200"/>
+              </a:spcAft>
+            </a:pPr>
+            <a:r>
+              <a:rPr sz="1100" b="1" i="0">
+                <a:solidFill>
+                  <a:srgbClr val="262630"/>
+                </a:solidFill>
+                <a:latin typeface="Yu Gothic"/>
+                <a:ea typeface="Yu Gothic"/>
+                <a:cs typeface="Yu Gothic"/>
+              </a:rPr>
+              <a:t>確認会開始</a:t>
+            </a:r>
+          </a:p>
+          <a:p>
+            <a:pPr algn="ctr">
+              <a:spcAft>
+                <a:spcPts val="200"/>
+              </a:spcAft>
+            </a:pPr>
+            <a:r>
+              <a:rPr sz="1100" b="1" i="0">
+                <a:solidFill>
+                  <a:srgbClr val="262630"/>
+                </a:solidFill>
+                <a:latin typeface="Yu Gothic"/>
+                <a:ea typeface="Yu Gothic"/>
+                <a:cs typeface="Yu Gothic"/>
+              </a:rPr>
+              <a:t>体制の残り確定</a:t>
+            </a:r>
+          </a:p>
+        </p:txBody>
+      </p:sp>
+      <p:sp>
+        <p:nvSpPr>
+          <p:cNvPr id="9" name="Right Arrow 8"/>
+          <p:cNvSpPr/>
+          <p:nvPr/>
+        </p:nvSpPr>
+        <p:spPr>
+          <a:xfrm>
+            <a:off x="3072384" y="2761488"/>
+            <a:ext cx="274320" cy="237744"/>
+          </a:xfrm>
+          <a:prstGeom prst="rightArrow">
+            <a:avLst/>
+          </a:prstGeom>
+          <a:solidFill>
+            <a:srgbClr val="7823DC"/>
+          </a:solidFill>
+          <a:ln>
+            <a:noFill/>
+          </a:ln>
+          <a:effectLst/>
+        </p:spPr>
+        <p:style>
+          <a:lnRef idx="1">
+            <a:schemeClr val="accent1"/>
+          </a:lnRef>
+          <a:fillRef idx="3">
+            <a:schemeClr val="accent1"/>
+          </a:fillRef>
+          <a:effectRef idx="2">
+            <a:schemeClr val="accent1"/>
+          </a:effectRef>
+          <a:fontRef idx="minor">
+            <a:schemeClr val="lt1"/>
+          </a:fontRef>
+        </p:style>
+        <p:txBody>
+          <a:bodyPr rtlCol="0" anchor="ctr"/>
+          <a:lstStyle/>
+          <a:p>
+            <a:pPr algn="ctr"/>
+          </a:p>
+        </p:txBody>
+      </p:sp>
+      <p:sp>
+        <p:nvSpPr>
+          <p:cNvPr id="10" name="Rectangle 9"/>
+          <p:cNvSpPr/>
+          <p:nvPr/>
+        </p:nvSpPr>
+        <p:spPr>
+          <a:xfrm>
+            <a:off x="3374136" y="2103120"/>
+            <a:ext cx="2542032" cy="1554480"/>
+          </a:xfrm>
+          <a:prstGeom prst="rect">
+            <a:avLst/>
+          </a:prstGeom>
+          <a:solidFill>
+            <a:srgbClr val="FFFFFF"/>
+          </a:solidFill>
+          <a:ln w="9525">
+            <a:solidFill>
+              <a:srgbClr val="D9D9E0"/>
+            </a:solidFill>
+          </a:ln>
+          <a:effectLst/>
+        </p:spPr>
+        <p:style>
+          <a:lnRef idx="1">
+            <a:schemeClr val="accent1"/>
+          </a:lnRef>
+          <a:fillRef idx="3">
+            <a:schemeClr val="accent1"/>
+          </a:fillRef>
+          <a:effectRef idx="2">
+            <a:schemeClr val="accent1"/>
+          </a:effectRef>
+          <a:fontRef idx="minor">
+            <a:schemeClr val="lt1"/>
+          </a:fontRef>
+        </p:style>
+        <p:txBody>
+          <a:bodyPr rtlCol="0" anchor="ctr"/>
+          <a:lstStyle/>
+          <a:p>
+            <a:pPr algn="ctr"/>
+          </a:p>
+        </p:txBody>
+      </p:sp>
+      <p:sp>
+        <p:nvSpPr>
+          <p:cNvPr id="11" name="Rectangle 10"/>
+          <p:cNvSpPr/>
+          <p:nvPr/>
+        </p:nvSpPr>
+        <p:spPr>
+          <a:xfrm>
+            <a:off x="3374136" y="2103120"/>
+            <a:ext cx="2542032" cy="512064"/>
+          </a:xfrm>
+          <a:prstGeom prst="rect">
+            <a:avLst/>
+          </a:prstGeom>
+          <a:solidFill>
+            <a:srgbClr val="7823DC"/>
+          </a:solidFill>
+          <a:ln>
+            <a:noFill/>
+          </a:ln>
+          <a:effectLst/>
+        </p:spPr>
+        <p:style>
+          <a:lnRef idx="1">
+            <a:schemeClr val="accent1"/>
+          </a:lnRef>
+          <a:fillRef idx="3">
+            <a:schemeClr val="accent1"/>
+          </a:fillRef>
+          <a:effectRef idx="2">
+            <a:schemeClr val="accent1"/>
+          </a:effectRef>
+          <a:fontRef idx="minor">
+            <a:schemeClr val="lt1"/>
+          </a:fontRef>
+        </p:style>
+        <p:txBody>
+          <a:bodyPr rtlCol="0" anchor="ctr"/>
+          <a:lstStyle/>
+          <a:p>
+            <a:pPr algn="ctr"/>
+          </a:p>
+        </p:txBody>
+      </p:sp>
+      <p:sp>
+        <p:nvSpPr>
+          <p:cNvPr id="12" name="TextBox 11"/>
+          <p:cNvSpPr txBox="1"/>
+          <p:nvPr/>
+        </p:nvSpPr>
+        <p:spPr>
+          <a:xfrm>
+            <a:off x="3374136" y="2176272"/>
+            <a:ext cx="2542032" cy="384048"/>
+          </a:xfrm>
+          <a:prstGeom prst="rect">
+            <a:avLst/>
+          </a:prstGeom>
+          <a:noFill/>
+        </p:spPr>
+        <p:txBody>
+          <a:bodyPr wrap="square" lIns="0" rIns="0" tIns="0" bIns="0" anchor="ctr">
+            <a:spAutoFit/>
+          </a:bodyPr>
+          <a:lstStyle/>
+          <a:p>
+            <a:pPr algn="ctr">
+              <a:spcAft>
+                <a:spcPts val="0"/>
+              </a:spcAft>
+            </a:pPr>
+            <a:r>
+              <a:rPr sz="1600" b="1" i="0">
+                <a:solidFill>
+                  <a:srgbClr val="FFFFFF"/>
+                </a:solidFill>
+                <a:latin typeface="Yu Gothic"/>
+                <a:ea typeface="Yu Gothic"/>
+                <a:cs typeface="Yu Gothic"/>
+              </a:rPr>
+              <a:t>〜30日</a:t>
+            </a:r>
+          </a:p>
+        </p:txBody>
+      </p:sp>
+      <p:sp>
+        <p:nvSpPr>
+          <p:cNvPr id="13" name="TextBox 12"/>
+          <p:cNvSpPr txBox="1"/>
+          <p:nvPr/>
+        </p:nvSpPr>
+        <p:spPr>
+          <a:xfrm>
+            <a:off x="3502152" y="2761488"/>
+            <a:ext cx="2286000" cy="822960"/>
+          </a:xfrm>
+          <a:prstGeom prst="rect">
+            <a:avLst/>
+          </a:prstGeom>
+          <a:noFill/>
+        </p:spPr>
+        <p:txBody>
+          <a:bodyPr wrap="square" lIns="0" rIns="0" tIns="0" bIns="0" anchor="ctr">
+            <a:spAutoFit/>
+          </a:bodyPr>
+          <a:lstStyle/>
+          <a:p>
+            <a:pPr algn="ctr">
+              <a:spcAft>
+                <a:spcPts val="200"/>
+              </a:spcAft>
+            </a:pPr>
+            <a:r>
+              <a:rPr sz="1100" b="1" i="0">
+                <a:solidFill>
+                  <a:srgbClr val="262630"/>
+                </a:solidFill>
+                <a:latin typeface="Yu Gothic"/>
+                <a:ea typeface="Yu Gothic"/>
+                <a:cs typeface="Yu Gothic"/>
+              </a:rPr>
+              <a:t>データ完成</a:t>
+            </a:r>
+          </a:p>
+          <a:p>
+            <a:pPr algn="ctr">
+              <a:spcAft>
+                <a:spcPts val="200"/>
+              </a:spcAft>
+            </a:pPr>
+            <a:r>
+              <a:rPr sz="1100" b="1" i="0">
+                <a:solidFill>
+                  <a:srgbClr val="262630"/>
+                </a:solidFill>
+                <a:latin typeface="Yu Gothic"/>
+                <a:ea typeface="Yu Gothic"/>
+                <a:cs typeface="Yu Gothic"/>
+              </a:rPr>
+              <a:t>工数計測開始</a:t>
+            </a:r>
+          </a:p>
+        </p:txBody>
+      </p:sp>
+      <p:sp>
+        <p:nvSpPr>
+          <p:cNvPr id="14" name="Right Arrow 13"/>
+          <p:cNvSpPr/>
+          <p:nvPr/>
+        </p:nvSpPr>
+        <p:spPr>
+          <a:xfrm>
+            <a:off x="5943600" y="2761488"/>
+            <a:ext cx="274320" cy="237744"/>
+          </a:xfrm>
+          <a:prstGeom prst="rightArrow">
+            <a:avLst/>
+          </a:prstGeom>
+          <a:solidFill>
+            <a:srgbClr val="7823DC"/>
+          </a:solidFill>
+          <a:ln>
+            <a:noFill/>
+          </a:ln>
+          <a:effectLst/>
+        </p:spPr>
+        <p:style>
+          <a:lnRef idx="1">
+            <a:schemeClr val="accent1"/>
+          </a:lnRef>
+          <a:fillRef idx="3">
+            <a:schemeClr val="accent1"/>
+          </a:fillRef>
+          <a:effectRef idx="2">
+            <a:schemeClr val="accent1"/>
+          </a:effectRef>
+          <a:fontRef idx="minor">
+            <a:schemeClr val="lt1"/>
+          </a:fontRef>
+        </p:style>
+        <p:txBody>
+          <a:bodyPr rtlCol="0" anchor="ctr"/>
+          <a:lstStyle/>
+          <a:p>
+            <a:pPr algn="ctr"/>
+          </a:p>
+        </p:txBody>
+      </p:sp>
+      <p:sp>
+        <p:nvSpPr>
+          <p:cNvPr id="15" name="Rectangle 14"/>
+          <p:cNvSpPr/>
+          <p:nvPr/>
+        </p:nvSpPr>
+        <p:spPr>
+          <a:xfrm>
+            <a:off x="6245352" y="2103120"/>
+            <a:ext cx="2542032" cy="1554480"/>
+          </a:xfrm>
+          <a:prstGeom prst="rect">
+            <a:avLst/>
+          </a:prstGeom>
+          <a:solidFill>
+            <a:srgbClr val="FFFFFF"/>
+          </a:solidFill>
+          <a:ln w="9525">
+            <a:solidFill>
+              <a:srgbClr val="D9D9E0"/>
+            </a:solidFill>
+          </a:ln>
+          <a:effectLst/>
+        </p:spPr>
+        <p:style>
+          <a:lnRef idx="1">
+            <a:schemeClr val="accent1"/>
+          </a:lnRef>
+          <a:fillRef idx="3">
+            <a:schemeClr val="accent1"/>
+          </a:fillRef>
+          <a:effectRef idx="2">
+            <a:schemeClr val="accent1"/>
+          </a:effectRef>
+          <a:fontRef idx="minor">
+            <a:schemeClr val="lt1"/>
+          </a:fontRef>
+        </p:style>
+        <p:txBody>
+          <a:bodyPr rtlCol="0" anchor="ctr"/>
+          <a:lstStyle/>
+          <a:p>
+            <a:pPr algn="ctr"/>
+          </a:p>
+        </p:txBody>
+      </p:sp>
+      <p:sp>
+        <p:nvSpPr>
+          <p:cNvPr id="16" name="Rectangle 15"/>
+          <p:cNvSpPr/>
+          <p:nvPr/>
+        </p:nvSpPr>
+        <p:spPr>
+          <a:xfrm>
+            <a:off x="6245352" y="2103120"/>
+            <a:ext cx="2542032" cy="512064"/>
+          </a:xfrm>
+          <a:prstGeom prst="rect">
+            <a:avLst/>
+          </a:prstGeom>
+          <a:solidFill>
+            <a:srgbClr val="7823DC"/>
+          </a:solidFill>
+          <a:ln>
+            <a:noFill/>
+          </a:ln>
+          <a:effectLst/>
+        </p:spPr>
+        <p:style>
+          <a:lnRef idx="1">
+            <a:schemeClr val="accent1"/>
+          </a:lnRef>
+          <a:fillRef idx="3">
+            <a:schemeClr val="accent1"/>
+          </a:fillRef>
+          <a:effectRef idx="2">
+            <a:schemeClr val="accent1"/>
+          </a:effectRef>
+          <a:fontRef idx="minor">
+            <a:schemeClr val="lt1"/>
+          </a:fontRef>
+        </p:style>
+        <p:txBody>
+          <a:bodyPr rtlCol="0" anchor="ctr"/>
+          <a:lstStyle/>
+          <a:p>
+            <a:pPr algn="ctr"/>
+          </a:p>
+        </p:txBody>
+      </p:sp>
+      <p:sp>
+        <p:nvSpPr>
+          <p:cNvPr id="17" name="TextBox 16"/>
+          <p:cNvSpPr txBox="1"/>
+          <p:nvPr/>
+        </p:nvSpPr>
+        <p:spPr>
+          <a:xfrm>
+            <a:off x="6245352" y="2176272"/>
+            <a:ext cx="2542032" cy="384048"/>
+          </a:xfrm>
+          <a:prstGeom prst="rect">
+            <a:avLst/>
+          </a:prstGeom>
+          <a:noFill/>
+        </p:spPr>
+        <p:txBody>
+          <a:bodyPr wrap="square" lIns="0" rIns="0" tIns="0" bIns="0" anchor="ctr">
+            <a:spAutoFit/>
+          </a:bodyPr>
+          <a:lstStyle/>
+          <a:p>
+            <a:pPr algn="ctr">
+              <a:spcAft>
+                <a:spcPts val="0"/>
+              </a:spcAft>
+            </a:pPr>
+            <a:r>
+              <a:rPr sz="1600" b="1" i="0">
+                <a:solidFill>
+                  <a:srgbClr val="FFFFFF"/>
+                </a:solidFill>
+                <a:latin typeface="Yu Gothic"/>
+                <a:ea typeface="Yu Gothic"/>
+                <a:cs typeface="Yu Gothic"/>
+              </a:rPr>
+              <a:t>〜60日</a:t>
+            </a:r>
+          </a:p>
+        </p:txBody>
+      </p:sp>
+      <p:sp>
+        <p:nvSpPr>
+          <p:cNvPr id="18" name="TextBox 17"/>
+          <p:cNvSpPr txBox="1"/>
+          <p:nvPr/>
+        </p:nvSpPr>
+        <p:spPr>
+          <a:xfrm>
+            <a:off x="6373368" y="2761488"/>
+            <a:ext cx="2286000" cy="822960"/>
+          </a:xfrm>
+          <a:prstGeom prst="rect">
+            <a:avLst/>
+          </a:prstGeom>
+          <a:noFill/>
+        </p:spPr>
+        <p:txBody>
+          <a:bodyPr wrap="square" lIns="0" rIns="0" tIns="0" bIns="0" anchor="ctr">
+            <a:spAutoFit/>
+          </a:bodyPr>
+          <a:lstStyle/>
+          <a:p>
+            <a:pPr algn="ctr">
+              <a:spcAft>
+                <a:spcPts val="200"/>
+              </a:spcAft>
+            </a:pPr>
+            <a:r>
+              <a:rPr sz="1100" b="1" i="0">
+                <a:solidFill>
+                  <a:srgbClr val="262630"/>
+                </a:solidFill>
+                <a:latin typeface="Yu Gothic"/>
+                <a:ea typeface="Yu Gothic"/>
+                <a:cs typeface="Yu Gothic"/>
+              </a:rPr>
+              <a:t>採点とランクの</a:t>
+            </a:r>
+          </a:p>
+          <a:p>
+            <a:pPr algn="ctr">
+              <a:spcAft>
+                <a:spcPts val="200"/>
+              </a:spcAft>
+            </a:pPr>
+            <a:r>
+              <a:rPr sz="1100" b="1" i="0">
+                <a:solidFill>
+                  <a:srgbClr val="262630"/>
+                </a:solidFill>
+                <a:latin typeface="Yu Gothic"/>
+                <a:ea typeface="Yu Gothic"/>
+                <a:cs typeface="Yu Gothic"/>
+              </a:rPr>
+              <a:t>初回確定</a:t>
+            </a:r>
+          </a:p>
+        </p:txBody>
+      </p:sp>
+      <p:sp>
+        <p:nvSpPr>
+          <p:cNvPr id="19" name="Right Arrow 18"/>
+          <p:cNvSpPr/>
+          <p:nvPr/>
+        </p:nvSpPr>
+        <p:spPr>
+          <a:xfrm>
+            <a:off x="8814816" y="2761488"/>
+            <a:ext cx="274320" cy="237744"/>
+          </a:xfrm>
+          <a:prstGeom prst="rightArrow">
+            <a:avLst/>
+          </a:prstGeom>
+          <a:solidFill>
+            <a:srgbClr val="7823DC"/>
+          </a:solidFill>
+          <a:ln>
+            <a:noFill/>
+          </a:ln>
+          <a:effectLst/>
+        </p:spPr>
+        <p:style>
+          <a:lnRef idx="1">
+            <a:schemeClr val="accent1"/>
+          </a:lnRef>
+          <a:fillRef idx="3">
+            <a:schemeClr val="accent1"/>
+          </a:fillRef>
+          <a:effectRef idx="2">
+            <a:schemeClr val="accent1"/>
+          </a:effectRef>
+          <a:fontRef idx="minor">
+            <a:schemeClr val="lt1"/>
+          </a:fontRef>
+        </p:style>
+        <p:txBody>
+          <a:bodyPr rtlCol="0" anchor="ctr"/>
+          <a:lstStyle/>
+          <a:p>
+            <a:pPr algn="ctr"/>
+          </a:p>
+        </p:txBody>
+      </p:sp>
+      <p:sp>
+        <p:nvSpPr>
+          <p:cNvPr id="20" name="Rectangle 19"/>
+          <p:cNvSpPr/>
+          <p:nvPr/>
+        </p:nvSpPr>
+        <p:spPr>
+          <a:xfrm>
+            <a:off x="9116568" y="2103120"/>
+            <a:ext cx="2542032" cy="1554480"/>
+          </a:xfrm>
+          <a:prstGeom prst="rect">
+            <a:avLst/>
+          </a:prstGeom>
+          <a:solidFill>
+            <a:srgbClr val="FFFFFF"/>
+          </a:solidFill>
+          <a:ln w="9525">
+            <a:solidFill>
+              <a:srgbClr val="D9D9E0"/>
+            </a:solidFill>
+          </a:ln>
+          <a:effectLst/>
+        </p:spPr>
+        <p:style>
+          <a:lnRef idx="1">
+            <a:schemeClr val="accent1"/>
+          </a:lnRef>
+          <a:fillRef idx="3">
+            <a:schemeClr val="accent1"/>
+          </a:fillRef>
+          <a:effectRef idx="2">
+            <a:schemeClr val="accent1"/>
+          </a:effectRef>
+          <a:fontRef idx="minor">
+            <a:schemeClr val="lt1"/>
+          </a:fontRef>
+        </p:style>
+        <p:txBody>
+          <a:bodyPr rtlCol="0" anchor="ctr"/>
+          <a:lstStyle/>
+          <a:p>
+            <a:pPr algn="ctr"/>
+          </a:p>
+        </p:txBody>
+      </p:sp>
+      <p:sp>
+        <p:nvSpPr>
+          <p:cNvPr id="21" name="Rectangle 20"/>
+          <p:cNvSpPr/>
+          <p:nvPr/>
+        </p:nvSpPr>
+        <p:spPr>
+          <a:xfrm>
+            <a:off x="9116568" y="2103120"/>
+            <a:ext cx="2542032" cy="512064"/>
+          </a:xfrm>
+          <a:prstGeom prst="rect">
+            <a:avLst/>
+          </a:prstGeom>
+          <a:solidFill>
+            <a:srgbClr val="3A106E"/>
+          </a:solidFill>
+          <a:ln>
+            <a:noFill/>
+          </a:ln>
+          <a:effectLst/>
+        </p:spPr>
+        <p:style>
+          <a:lnRef idx="1">
+            <a:schemeClr val="accent1"/>
+          </a:lnRef>
+          <a:fillRef idx="3">
+            <a:schemeClr val="accent1"/>
+          </a:fillRef>
+          <a:effectRef idx="2">
+            <a:schemeClr val="accent1"/>
+          </a:effectRef>
+          <a:fontRef idx="minor">
+            <a:schemeClr val="lt1"/>
+          </a:fontRef>
+        </p:style>
+        <p:txBody>
+          <a:bodyPr rtlCol="0" anchor="ctr"/>
+          <a:lstStyle/>
+          <a:p>
+            <a:pPr algn="ctr"/>
+          </a:p>
+        </p:txBody>
+      </p:sp>
+      <p:sp>
+        <p:nvSpPr>
+          <p:cNvPr id="22" name="TextBox 21"/>
+          <p:cNvSpPr txBox="1"/>
+          <p:nvPr/>
+        </p:nvSpPr>
+        <p:spPr>
+          <a:xfrm>
+            <a:off x="9116568" y="2176272"/>
+            <a:ext cx="2542032" cy="384048"/>
+          </a:xfrm>
+          <a:prstGeom prst="rect">
+            <a:avLst/>
+          </a:prstGeom>
+          <a:noFill/>
+        </p:spPr>
+        <p:txBody>
+          <a:bodyPr wrap="square" lIns="0" rIns="0" tIns="0" bIns="0" anchor="ctr">
+            <a:spAutoFit/>
+          </a:bodyPr>
+          <a:lstStyle/>
+          <a:p>
+            <a:pPr algn="ctr">
+              <a:spcAft>
+                <a:spcPts val="0"/>
+              </a:spcAft>
+            </a:pPr>
+            <a:r>
+              <a:rPr sz="1600" b="1" i="0">
+                <a:solidFill>
+                  <a:srgbClr val="FFFFFF"/>
+                </a:solidFill>
+                <a:latin typeface="Yu Gothic"/>
+                <a:ea typeface="Yu Gothic"/>
+                <a:cs typeface="Yu Gothic"/>
+              </a:rPr>
+              <a:t>〜90日</a:t>
+            </a:r>
+          </a:p>
+        </p:txBody>
+      </p:sp>
+      <p:sp>
+        <p:nvSpPr>
+          <p:cNvPr id="23" name="TextBox 22"/>
+          <p:cNvSpPr txBox="1"/>
+          <p:nvPr/>
+        </p:nvSpPr>
+        <p:spPr>
+          <a:xfrm>
+            <a:off x="9244584" y="2761488"/>
+            <a:ext cx="2286000" cy="822960"/>
+          </a:xfrm>
+          <a:prstGeom prst="rect">
+            <a:avLst/>
+          </a:prstGeom>
+          <a:noFill/>
+        </p:spPr>
+        <p:txBody>
+          <a:bodyPr wrap="square" lIns="0" rIns="0" tIns="0" bIns="0" anchor="ctr">
+            <a:spAutoFit/>
+          </a:bodyPr>
+          <a:lstStyle/>
+          <a:p>
+            <a:pPr algn="ctr">
+              <a:spcAft>
+                <a:spcPts val="200"/>
+              </a:spcAft>
+            </a:pPr>
+            <a:r>
+              <a:rPr sz="1100" b="1" i="0">
+                <a:solidFill>
+                  <a:srgbClr val="262630"/>
+                </a:solidFill>
+                <a:latin typeface="Yu Gothic"/>
+                <a:ea typeface="Yu Gothic"/>
+                <a:cs typeface="Yu Gothic"/>
+              </a:rPr>
+              <a:t>力の入れ直し（資源配分）</a:t>
+            </a:r>
+          </a:p>
+          <a:p>
+            <a:pPr algn="ctr">
+              <a:spcAft>
+                <a:spcPts val="200"/>
+              </a:spcAft>
+            </a:pPr>
+            <a:r>
+              <a:rPr sz="1100" b="1" i="0">
+                <a:solidFill>
+                  <a:srgbClr val="262630"/>
+                </a:solidFill>
+                <a:latin typeface="Yu Gothic"/>
+                <a:ea typeface="Yu Gothic"/>
+                <a:cs typeface="Yu Gothic"/>
+              </a:rPr>
+              <a:t>の実行と効果検証</a:t>
+            </a:r>
+          </a:p>
+        </p:txBody>
+      </p:sp>
+      <p:sp>
+        <p:nvSpPr>
+          <p:cNvPr id="24" name="Rectangle 23"/>
+          <p:cNvSpPr/>
+          <p:nvPr/>
+        </p:nvSpPr>
+        <p:spPr>
+          <a:xfrm>
+            <a:off x="502920" y="5577840"/>
+            <a:ext cx="11183112" cy="768096"/>
+          </a:xfrm>
+          <a:prstGeom prst="rect">
+            <a:avLst/>
+          </a:prstGeom>
+          <a:solidFill>
+            <a:srgbClr val="F3EFFB"/>
+          </a:solidFill>
+          <a:ln>
+            <a:noFill/>
+          </a:ln>
+          <a:effectLst/>
+        </p:spPr>
+        <p:style>
+          <a:lnRef idx="1">
+            <a:schemeClr val="accent1"/>
+          </a:lnRef>
+          <a:fillRef idx="3">
+            <a:schemeClr val="accent1"/>
+          </a:fillRef>
+          <a:effectRef idx="2">
+            <a:schemeClr val="accent1"/>
+          </a:effectRef>
+          <a:fontRef idx="minor">
+            <a:schemeClr val="lt1"/>
+          </a:fontRef>
+        </p:style>
+        <p:txBody>
+          <a:bodyPr rtlCol="0" anchor="ctr"/>
+          <a:lstStyle/>
+          <a:p>
+            <a:pPr algn="ctr"/>
+          </a:p>
+        </p:txBody>
+      </p:sp>
+      <p:sp>
+        <p:nvSpPr>
+          <p:cNvPr id="25" name="Rectangle 24"/>
+          <p:cNvSpPr/>
+          <p:nvPr/>
+        </p:nvSpPr>
+        <p:spPr>
+          <a:xfrm>
+            <a:off x="502920" y="5577840"/>
+            <a:ext cx="38100" cy="768096"/>
+          </a:xfrm>
+          <a:prstGeom prst="rect">
+            <a:avLst/>
+          </a:prstGeom>
+          <a:solidFill>
+            <a:srgbClr val="7823DC"/>
+          </a:solidFill>
+          <a:ln>
+            <a:noFill/>
+          </a:ln>
+          <a:effectLst/>
+        </p:spPr>
+        <p:style>
+          <a:lnRef idx="1">
+            <a:schemeClr val="accent1"/>
+          </a:lnRef>
+          <a:fillRef idx="3">
+            <a:schemeClr val="accent1"/>
+          </a:fillRef>
+          <a:effectRef idx="2">
+            <a:schemeClr val="accent1"/>
+          </a:effectRef>
+          <a:fontRef idx="minor">
+            <a:schemeClr val="lt1"/>
+          </a:fontRef>
+        </p:style>
+        <p:txBody>
+          <a:bodyPr rtlCol="0" anchor="ctr"/>
+          <a:lstStyle/>
+          <a:p>
+            <a:pPr algn="ctr"/>
+          </a:p>
+        </p:txBody>
+      </p:sp>
+      <p:sp>
+        <p:nvSpPr>
+          <p:cNvPr id="26" name="TextBox 25"/>
+          <p:cNvSpPr txBox="1"/>
+          <p:nvPr/>
+        </p:nvSpPr>
+        <p:spPr>
+          <a:xfrm>
+            <a:off x="713232" y="5632704"/>
+            <a:ext cx="10835640" cy="658368"/>
+          </a:xfrm>
+          <a:prstGeom prst="rect">
+            <a:avLst/>
+          </a:prstGeom>
+          <a:noFill/>
+        </p:spPr>
+        <p:txBody>
+          <a:bodyPr wrap="square" lIns="0" rIns="0" tIns="0" bIns="0" anchor="ctr">
+            <a:spAutoFit/>
+          </a:bodyPr>
+          <a:lstStyle/>
           <a:p>
             <a:pPr algn="l">
               <a:spcAft>
@@ -5958,99 +7812,22 @@
               </a:spcAft>
             </a:pPr>
             <a:r>
-              <a:rPr sz="2200" b="1" i="0">
-                <a:solidFill>
-                  <a:srgbClr val="E0D2F6"/>
+              <a:rPr sz="1050" b="1" i="0">
+                <a:solidFill>
+                  <a:srgbClr val="3A106E"/>
                 </a:solidFill>
                 <a:latin typeface="Yu Gothic"/>
                 <a:ea typeface="Yu Gothic"/>
                 <a:cs typeface="Yu Gothic"/>
               </a:rPr>
-              <a:t>皆さんが自分の領域で決められる範囲を、広げるためのものです。</a:t>
-            </a:r>
-          </a:p>
-        </p:txBody>
-      </p:sp>
-      <p:sp>
-        <p:nvSpPr>
-          <p:cNvPr id="6" name="TextBox 5"/>
-          <p:cNvSpPr txBox="1"/>
-          <p:nvPr/>
-        </p:nvSpPr>
-        <p:spPr>
-          <a:xfrm>
-            <a:off x="1234440" y="4160520"/>
-            <a:ext cx="10058400" cy="1463040"/>
-          </a:xfrm>
-          <a:prstGeom prst="rect">
-            <a:avLst/>
-          </a:prstGeom>
-          <a:noFill/>
-        </p:spPr>
-        <p:txBody>
-          <a:bodyPr wrap="square" lIns="0" rIns="0" tIns="0" bIns="0">
-            <a:spAutoFit/>
-          </a:bodyPr>
-          <a:lstStyle/>
-          <a:p>
-            <a:pPr algn="l">
-              <a:spcAft>
-                <a:spcPts val="800"/>
-              </a:spcAft>
-            </a:pPr>
-            <a:r>
-              <a:rPr sz="1600" b="1" i="0">
-                <a:solidFill>
-                  <a:srgbClr val="262630"/>
-                </a:solidFill>
-                <a:latin typeface="Yu Gothic"/>
-                <a:ea typeface="Yu Gothic"/>
-                <a:cs typeface="Yu Gothic"/>
-              </a:rPr>
-              <a:t>改革の主役は、部長の皆さんです。</a:t>
-            </a:r>
-          </a:p>
-          <a:p>
-            <a:pPr algn="l">
-              <a:spcAft>
-                <a:spcPts val="800"/>
-              </a:spcAft>
-            </a:pPr>
-            <a:r>
-              <a:rPr sz="1600" b="1" i="0">
-                <a:solidFill>
-                  <a:srgbClr val="262630"/>
-                </a:solidFill>
-                <a:latin typeface="Yu Gothic"/>
-                <a:ea typeface="Yu Gothic"/>
-                <a:cs typeface="Yu Gothic"/>
-              </a:rPr>
-              <a:t>STOは、道具と会議を整えます。</a:t>
-            </a:r>
-          </a:p>
-          <a:p>
-            <a:pPr algn="l">
-              <a:spcAft>
-                <a:spcPts val="0"/>
-              </a:spcAft>
-            </a:pPr>
-            <a:r>
-              <a:rPr sz="1600" b="1" i="0">
-                <a:solidFill>
-                  <a:srgbClr val="7823DC"/>
-                </a:solidFill>
-                <a:latin typeface="Yu Gothic"/>
-                <a:ea typeface="Yu Gothic"/>
-                <a:cs typeface="Yu Gothic"/>
-              </a:rPr>
-              <a:t>詰まったら、24時間以内に新谷まで。</a:t>
-            </a:r>
-          </a:p>
-        </p:txBody>
-      </p:sp>
-      <p:sp>
-        <p:nvSpPr>
-          <p:cNvPr id="7" name="Rectangle 6"/>
+              <a:t>点検会議には毎回「決めること」を3件以内でお持ちします。皆さんの現場の判断（担当替え・時間の使い方）は、会議を待たずに進めてください</a:t>
+            </a:r>
+          </a:p>
+        </p:txBody>
+      </p:sp>
+      <p:sp>
+        <p:nvSpPr>
+          <p:cNvPr id="27" name="Rectangle 26"/>
           <p:cNvSpPr/>
           <p:nvPr/>
         </p:nvSpPr>
@@ -6094,7 +7871,7 @@
       </p:sp>
       <p:sp>
         <p:nvSpPr>
-          <p:cNvPr id="8" name="TextBox 7"/>
+          <p:cNvPr id="28" name="TextBox 27"/>
           <p:cNvSpPr txBox="1"/>
           <p:nvPr/>
         </p:nvSpPr>
@@ -6135,7 +7912,7 @@
       </p:sp>
       <p:sp>
         <p:nvSpPr>
-          <p:cNvPr id="9" name="TextBox 8"/>
+          <p:cNvPr id="29" name="TextBox 28"/>
           <p:cNvSpPr txBox="1"/>
           <p:nvPr/>
         </p:nvSpPr>
@@ -6169,7 +7946,419 @@
                 <a:ea typeface="Yu Gothic"/>
                 <a:cs typeface="Yu Gothic"/>
               </a:rPr>
-              <a:t>12</a:t>
+              <a:t>13</a:t>
+            </a:r>
+          </a:p>
+        </p:txBody>
+      </p:sp>
+    </p:spTree>
+  </p:cSld>
+  <p:clrMapOvr>
+    <a:masterClrMapping/>
+  </p:clrMapOvr>
+</p:sld>
+</file>
+
+<file path=ppt/slides/slide14.xml><?xml version="1.0" encoding="utf-8"?>
+<p:sld xmlns:a="http://schemas.openxmlformats.org/drawingml/2006/main" xmlns:p="http://schemas.openxmlformats.org/presentationml/2006/main" xmlns:r="http://schemas.openxmlformats.org/officeDocument/2006/relationships">
+  <p:cSld>
+    <p:spTree>
+      <p:nvGrpSpPr>
+        <p:cNvPr id="1" name=""/>
+        <p:cNvGrpSpPr/>
+        <p:nvPr/>
+      </p:nvGrpSpPr>
+      <p:grpSpPr/>
+      <p:sp>
+        <p:nvSpPr>
+          <p:cNvPr id="2" name="Rectangle 1"/>
+          <p:cNvSpPr/>
+          <p:nvPr/>
+        </p:nvSpPr>
+        <p:spPr>
+          <a:xfrm>
+            <a:off x="0" y="0"/>
+            <a:ext cx="256032" cy="6858000"/>
+          </a:xfrm>
+          <a:prstGeom prst="rect">
+            <a:avLst/>
+          </a:prstGeom>
+          <a:solidFill>
+            <a:srgbClr val="7823DC"/>
+          </a:solidFill>
+          <a:ln>
+            <a:noFill/>
+          </a:ln>
+          <a:effectLst/>
+        </p:spPr>
+        <p:style>
+          <a:lnRef idx="1">
+            <a:schemeClr val="accent1"/>
+          </a:lnRef>
+          <a:fillRef idx="3">
+            <a:schemeClr val="accent1"/>
+          </a:fillRef>
+          <a:effectRef idx="2">
+            <a:schemeClr val="accent1"/>
+          </a:effectRef>
+          <a:fontRef idx="minor">
+            <a:schemeClr val="lt1"/>
+          </a:fontRef>
+        </p:style>
+        <p:txBody>
+          <a:bodyPr rtlCol="0" anchor="ctr"/>
+          <a:lstStyle/>
+          <a:p>
+            <a:pPr algn="ctr"/>
+          </a:p>
+        </p:txBody>
+      </p:sp>
+      <p:sp>
+        <p:nvSpPr>
+          <p:cNvPr id="3" name="Rectangle 2"/>
+          <p:cNvSpPr/>
+          <p:nvPr/>
+        </p:nvSpPr>
+        <p:spPr>
+          <a:xfrm>
+            <a:off x="822960" y="1691640"/>
+            <a:ext cx="10543032" cy="2103120"/>
+          </a:xfrm>
+          <a:prstGeom prst="rect">
+            <a:avLst/>
+          </a:prstGeom>
+          <a:solidFill>
+            <a:srgbClr val="3A106E"/>
+          </a:solidFill>
+          <a:ln>
+            <a:noFill/>
+          </a:ln>
+          <a:effectLst/>
+        </p:spPr>
+        <p:style>
+          <a:lnRef idx="1">
+            <a:schemeClr val="accent1"/>
+          </a:lnRef>
+          <a:fillRef idx="3">
+            <a:schemeClr val="accent1"/>
+          </a:fillRef>
+          <a:effectRef idx="2">
+            <a:schemeClr val="accent1"/>
+          </a:effectRef>
+          <a:fontRef idx="minor">
+            <a:schemeClr val="lt1"/>
+          </a:fontRef>
+        </p:style>
+        <p:txBody>
+          <a:bodyPr rtlCol="0" anchor="ctr"/>
+          <a:lstStyle/>
+          <a:p>
+            <a:pPr algn="ctr"/>
+          </a:p>
+        </p:txBody>
+      </p:sp>
+      <p:sp>
+        <p:nvSpPr>
+          <p:cNvPr id="4" name="Rectangle 3"/>
+          <p:cNvSpPr/>
+          <p:nvPr/>
+        </p:nvSpPr>
+        <p:spPr>
+          <a:xfrm>
+            <a:off x="822960" y="1691640"/>
+            <a:ext cx="50800" cy="2103120"/>
+          </a:xfrm>
+          <a:prstGeom prst="rect">
+            <a:avLst/>
+          </a:prstGeom>
+          <a:solidFill>
+            <a:srgbClr val="7823DC"/>
+          </a:solidFill>
+          <a:ln>
+            <a:noFill/>
+          </a:ln>
+          <a:effectLst/>
+        </p:spPr>
+        <p:style>
+          <a:lnRef idx="1">
+            <a:schemeClr val="accent1"/>
+          </a:lnRef>
+          <a:fillRef idx="3">
+            <a:schemeClr val="accent1"/>
+          </a:fillRef>
+          <a:effectRef idx="2">
+            <a:schemeClr val="accent1"/>
+          </a:effectRef>
+          <a:fontRef idx="minor">
+            <a:schemeClr val="lt1"/>
+          </a:fontRef>
+        </p:style>
+        <p:txBody>
+          <a:bodyPr rtlCol="0" anchor="ctr"/>
+          <a:lstStyle/>
+          <a:p>
+            <a:pPr algn="ctr"/>
+          </a:p>
+        </p:txBody>
+      </p:sp>
+      <p:sp>
+        <p:nvSpPr>
+          <p:cNvPr id="5" name="TextBox 4"/>
+          <p:cNvSpPr txBox="1"/>
+          <p:nvPr/>
+        </p:nvSpPr>
+        <p:spPr>
+          <a:xfrm>
+            <a:off x="1234440" y="1920240"/>
+            <a:ext cx="9784080" cy="1645920"/>
+          </a:xfrm>
+          <a:prstGeom prst="rect">
+            <a:avLst/>
+          </a:prstGeom>
+          <a:noFill/>
+        </p:spPr>
+        <p:txBody>
+          <a:bodyPr wrap="square" lIns="0" rIns="0" tIns="0" bIns="0" anchor="ctr">
+            <a:spAutoFit/>
+          </a:bodyPr>
+          <a:lstStyle/>
+          <a:p>
+            <a:pPr algn="l">
+              <a:spcAft>
+                <a:spcPts val="800"/>
+              </a:spcAft>
+            </a:pPr>
+            <a:r>
+              <a:rPr sz="2200" b="1" i="0">
+                <a:solidFill>
+                  <a:srgbClr val="FFFFFF"/>
+                </a:solidFill>
+                <a:latin typeface="Yu Gothic"/>
+                <a:ea typeface="Yu Gothic"/>
+                <a:cs typeface="Yu Gothic"/>
+              </a:rPr>
+              <a:t>見える化は、管理のためではありません。</a:t>
+            </a:r>
+          </a:p>
+          <a:p>
+            <a:pPr algn="l">
+              <a:spcAft>
+                <a:spcPts val="0"/>
+              </a:spcAft>
+            </a:pPr>
+            <a:r>
+              <a:rPr sz="2200" b="1" i="0">
+                <a:solidFill>
+                  <a:srgbClr val="E0D2F6"/>
+                </a:solidFill>
+                <a:latin typeface="Yu Gothic"/>
+                <a:ea typeface="Yu Gothic"/>
+                <a:cs typeface="Yu Gothic"/>
+              </a:rPr>
+              <a:t>皆さんが自分の領域で決められる範囲を、広げるためのものです。</a:t>
+            </a:r>
+          </a:p>
+        </p:txBody>
+      </p:sp>
+      <p:sp>
+        <p:nvSpPr>
+          <p:cNvPr id="6" name="TextBox 5"/>
+          <p:cNvSpPr txBox="1"/>
+          <p:nvPr/>
+        </p:nvSpPr>
+        <p:spPr>
+          <a:xfrm>
+            <a:off x="1234440" y="4160520"/>
+            <a:ext cx="10058400" cy="1463040"/>
+          </a:xfrm>
+          <a:prstGeom prst="rect">
+            <a:avLst/>
+          </a:prstGeom>
+          <a:noFill/>
+        </p:spPr>
+        <p:txBody>
+          <a:bodyPr wrap="square" lIns="0" rIns="0" tIns="0" bIns="0">
+            <a:spAutoFit/>
+          </a:bodyPr>
+          <a:lstStyle/>
+          <a:p>
+            <a:pPr algn="l">
+              <a:spcAft>
+                <a:spcPts val="800"/>
+              </a:spcAft>
+            </a:pPr>
+            <a:r>
+              <a:rPr sz="1600" b="1" i="0">
+                <a:solidFill>
+                  <a:srgbClr val="262630"/>
+                </a:solidFill>
+                <a:latin typeface="Yu Gothic"/>
+                <a:ea typeface="Yu Gothic"/>
+                <a:cs typeface="Yu Gothic"/>
+              </a:rPr>
+              <a:t>改革の主役は、部長の皆さんです。</a:t>
+            </a:r>
+          </a:p>
+          <a:p>
+            <a:pPr algn="l">
+              <a:spcAft>
+                <a:spcPts val="800"/>
+              </a:spcAft>
+            </a:pPr>
+            <a:r>
+              <a:rPr sz="1600" b="1" i="0">
+                <a:solidFill>
+                  <a:srgbClr val="262630"/>
+                </a:solidFill>
+                <a:latin typeface="Yu Gothic"/>
+                <a:ea typeface="Yu Gothic"/>
+                <a:cs typeface="Yu Gothic"/>
+              </a:rPr>
+              <a:t>STOは、道具と会議を整えます。</a:t>
+            </a:r>
+          </a:p>
+          <a:p>
+            <a:pPr algn="l">
+              <a:spcAft>
+                <a:spcPts val="0"/>
+              </a:spcAft>
+            </a:pPr>
+            <a:r>
+              <a:rPr sz="1600" b="1" i="0">
+                <a:solidFill>
+                  <a:srgbClr val="7823DC"/>
+                </a:solidFill>
+                <a:latin typeface="Yu Gothic"/>
+                <a:ea typeface="Yu Gothic"/>
+                <a:cs typeface="Yu Gothic"/>
+              </a:rPr>
+              <a:t>詰まったら、24時間以内に新谷まで。</a:t>
+            </a:r>
+          </a:p>
+        </p:txBody>
+      </p:sp>
+      <p:sp>
+        <p:nvSpPr>
+          <p:cNvPr id="7" name="Rectangle 6"/>
+          <p:cNvSpPr/>
+          <p:nvPr/>
+        </p:nvSpPr>
+        <p:spPr>
+          <a:xfrm>
+            <a:off x="502920" y="6510528"/>
+            <a:ext cx="11183112" cy="15240"/>
+          </a:xfrm>
+          <a:prstGeom prst="rect">
+            <a:avLst/>
+          </a:prstGeom>
+          <a:solidFill>
+            <a:srgbClr val="D9D9E0"/>
+          </a:solidFill>
+          <a:ln>
+            <a:noFill/>
+          </a:ln>
+          <a:effectLst/>
+        </p:spPr>
+        <p:style>
+          <a:lnRef idx="1">
+            <a:schemeClr val="accent1"/>
+          </a:lnRef>
+          <a:fillRef idx="3">
+            <a:schemeClr val="accent1"/>
+          </a:fillRef>
+          <a:effectRef idx="2">
+            <a:schemeClr val="accent1"/>
+          </a:effectRef>
+          <a:fontRef idx="minor">
+            <a:schemeClr val="lt1"/>
+          </a:fontRef>
+        </p:style>
+        <p:txBody>
+          <a:bodyPr rtlCol="0" anchor="ctr"/>
+          <a:lstStyle/>
+          <a:p>
+            <a:pPr algn="ctr"/>
+          </a:p>
+        </p:txBody>
+      </p:sp>
+      <p:sp>
+        <p:nvSpPr>
+          <p:cNvPr id="8" name="TextBox 7"/>
+          <p:cNvSpPr txBox="1"/>
+          <p:nvPr/>
+        </p:nvSpPr>
+        <p:spPr>
+          <a:xfrm>
+            <a:off x="502920" y="6565392"/>
+            <a:ext cx="8686800" cy="274320"/>
+          </a:xfrm>
+          <a:prstGeom prst="rect">
+            <a:avLst/>
+          </a:prstGeom>
+          <a:noFill/>
+        </p:spPr>
+        <p:txBody>
+          <a:bodyPr wrap="square" lIns="0" rIns="0" tIns="0" bIns="0">
+            <a:spAutoFit/>
+          </a:bodyPr>
+          <a:lstStyle/>
+          <a:p>
+            <a:pPr algn="l">
+              <a:spcAft>
+                <a:spcPts val="400"/>
+              </a:spcAft>
+            </a:pPr>
+            <a:r>
+              <a:rPr sz="750" b="0" i="0">
+                <a:solidFill>
+                  <a:srgbClr val="8A8A99"/>
+                </a:solidFill>
+                <a:latin typeface="Yu Gothic"/>
+                <a:ea typeface="Yu Gothic"/>
+                <a:cs typeface="Yu Gothic"/>
+              </a:rPr>
+              <a:t>円谷プロダクション 営業改革 | 社外秘</a:t>
+            </a:r>
+          </a:p>
+        </p:txBody>
+      </p:sp>
+      <p:sp>
+        <p:nvSpPr>
+          <p:cNvPr id="9" name="TextBox 8"/>
+          <p:cNvSpPr txBox="1"/>
+          <p:nvPr/>
+        </p:nvSpPr>
+        <p:spPr>
+          <a:xfrm>
+            <a:off x="11247120" y="6565392"/>
+            <a:ext cx="457200" cy="274320"/>
+          </a:xfrm>
+          <a:prstGeom prst="rect">
+            <a:avLst/>
+          </a:prstGeom>
+          <a:noFill/>
+        </p:spPr>
+        <p:txBody>
+          <a:bodyPr wrap="square" lIns="0" rIns="0" tIns="0" bIns="0">
+            <a:spAutoFit/>
+          </a:bodyPr>
+          <a:lstStyle/>
+          <a:p>
+            <a:pPr algn="r">
+              <a:spcAft>
+                <a:spcPts val="400"/>
+              </a:spcAft>
+            </a:pPr>
+            <a:r>
+              <a:rPr sz="900" b="0" i="0">
+                <a:solidFill>
+                  <a:srgbClr val="5F5F6E"/>
+                </a:solidFill>
+                <a:latin typeface="Yu Gothic"/>
+                <a:ea typeface="Yu Gothic"/>
+                <a:cs typeface="Yu Gothic"/>
+              </a:rPr>
+              <a:t>14</a:t>
             </a:r>
           </a:p>
         </p:txBody>
@@ -12822,7 +15011,7 @@
                 <a:ea typeface="Yu Gothic"/>
                 <a:cs typeface="Yu Gothic"/>
               </a:rPr>
-              <a:t>進捗 ④</a:t>
+              <a:t>分科会の詳細 ①</a:t>
             </a:r>
           </a:p>
         </p:txBody>
@@ -12863,7 +15052,7 @@
                 <a:ea typeface="Yu Gothic"/>
                 <a:cs typeface="Yu Gothic"/>
               </a:rPr>
-              <a:t>用意した道具立て — 一式そろいました</a:t>
+              <a:t>3つの分科会と、扱うテーマ</a:t>
             </a:r>
           </a:p>
         </p:txBody>
@@ -12912,52 +15101,614 @@
           </a:p>
         </p:txBody>
       </p:sp>
-      <p:sp>
-        <p:nvSpPr>
-          <p:cNvPr id="5" name="Rectangle 4"/>
-          <p:cNvSpPr/>
-          <p:nvPr/>
-        </p:nvSpPr>
-        <p:spPr>
-          <a:xfrm>
-            <a:off x="502920" y="1956816"/>
-            <a:ext cx="5504688" cy="969264"/>
-          </a:xfrm>
-          <a:prstGeom prst="rect">
-            <a:avLst/>
-          </a:prstGeom>
-          <a:solidFill>
-            <a:srgbClr val="FFFFFF"/>
-          </a:solidFill>
-          <a:ln w="9525">
-            <a:solidFill>
-              <a:srgbClr val="D9D9E0"/>
-            </a:solidFill>
-          </a:ln>
-          <a:effectLst/>
-        </p:spPr>
-        <p:style>
-          <a:lnRef idx="1">
-            <a:schemeClr val="accent1"/>
-          </a:lnRef>
-          <a:fillRef idx="3">
-            <a:schemeClr val="accent1"/>
-          </a:fillRef>
-          <a:effectRef idx="2">
-            <a:schemeClr val="accent1"/>
-          </a:effectRef>
-          <a:fontRef idx="minor">
-            <a:schemeClr val="lt1"/>
-          </a:fontRef>
-        </p:style>
-        <p:txBody>
-          <a:bodyPr rtlCol="0" anchor="ctr"/>
-          <a:lstStyle/>
-          <a:p>
-            <a:pPr algn="ctr"/>
-          </a:p>
-        </p:txBody>
-      </p:sp>
+      <p:graphicFrame>
+        <p:nvGraphicFramePr>
+          <p:cNvPr id="5" name="Table 4"/>
+          <p:cNvGraphicFramePr>
+            <a:graphicFrameLocks noGrp="1"/>
+          </p:cNvGraphicFramePr>
+          <p:nvPr/>
+        </p:nvGraphicFramePr>
+        <p:xfrm>
+          <a:off x="502920" y="1883664"/>
+          <a:ext cx="11183110" cy="3364992"/>
+        </p:xfrm>
+        <a:graphic>
+          <a:graphicData uri="http://schemas.openxmlformats.org/drawingml/2006/table">
+            <a:tbl>
+              <a:tblPr firstRow="1" bandRow="1">
+                <a:tableStyleId>{5C22544A-7EE6-4342-B048-85BDC9FD1C3A}</a:tableStyleId>
+              </a:tblPr>
+              <a:tblGrid>
+                <a:gridCol w="1909311"/>
+                <a:gridCol w="1091035"/>
+                <a:gridCol w="5182417"/>
+                <a:gridCol w="3000347"/>
+              </a:tblGrid>
+              <a:tr h="841248">
+                <a:tc>
+                  <a:txBody>
+                    <a:bodyPr wrap="square"/>
+                    <a:lstStyle/>
+                    <a:p>
+                      <a:pPr algn="l">
+                        <a:spcAft>
+                          <a:spcPts val="0"/>
+                        </a:spcAft>
+                      </a:pPr>
+                      <a:r>
+                        <a:rPr sz="1050" b="1" i="0">
+                          <a:solidFill>
+                            <a:srgbClr val="FFFFFF"/>
+                          </a:solidFill>
+                          <a:latin typeface="Yu Gothic"/>
+                          <a:ea typeface="Yu Gothic"/>
+                          <a:cs typeface="Yu Gothic"/>
+                        </a:rPr>
+                        <a:t>分科会</a:t>
+                      </a:r>
+                    </a:p>
+                  </a:txBody>
+                  <a:tcPr marL="54864" marR="54864" marT="18288" marB="18288" anchor="ctr">
+                    <a:solidFill>
+                      <a:srgbClr val="3A106E"/>
+                    </a:solidFill>
+                  </a:tcPr>
+                </a:tc>
+                <a:tc>
+                  <a:txBody>
+                    <a:bodyPr wrap="square"/>
+                    <a:lstStyle/>
+                    <a:p>
+                      <a:pPr algn="l">
+                        <a:spcAft>
+                          <a:spcPts val="0"/>
+                        </a:spcAft>
+                      </a:pPr>
+                      <a:r>
+                        <a:rPr sz="1050" b="1" i="0">
+                          <a:solidFill>
+                            <a:srgbClr val="FFFFFF"/>
+                          </a:solidFill>
+                          <a:latin typeface="Yu Gothic"/>
+                          <a:ea typeface="Yu Gothic"/>
+                          <a:cs typeface="Yu Gothic"/>
+                        </a:rPr>
+                        <a:t>リーダー</a:t>
+                      </a:r>
+                    </a:p>
+                  </a:txBody>
+                  <a:tcPr marL="54864" marR="54864" marT="18288" marB="18288" anchor="ctr">
+                    <a:solidFill>
+                      <a:srgbClr val="3A106E"/>
+                    </a:solidFill>
+                  </a:tcPr>
+                </a:tc>
+                <a:tc>
+                  <a:txBody>
+                    <a:bodyPr wrap="square"/>
+                    <a:lstStyle/>
+                    <a:p>
+                      <a:pPr algn="l">
+                        <a:spcAft>
+                          <a:spcPts val="0"/>
+                        </a:spcAft>
+                      </a:pPr>
+                      <a:r>
+                        <a:rPr sz="1050" b="1" i="0">
+                          <a:solidFill>
+                            <a:srgbClr val="FFFFFF"/>
+                          </a:solidFill>
+                          <a:latin typeface="Yu Gothic"/>
+                          <a:ea typeface="Yu Gothic"/>
+                          <a:cs typeface="Yu Gothic"/>
+                        </a:rPr>
+                        <a:t>扱うテーマ</a:t>
+                      </a:r>
+                    </a:p>
+                  </a:txBody>
+                  <a:tcPr marL="54864" marR="54864" marT="18288" marB="18288" anchor="ctr">
+                    <a:solidFill>
+                      <a:srgbClr val="3A106E"/>
+                    </a:solidFill>
+                  </a:tcPr>
+                </a:tc>
+                <a:tc>
+                  <a:txBody>
+                    <a:bodyPr wrap="square"/>
+                    <a:lstStyle/>
+                    <a:p>
+                      <a:pPr algn="l">
+                        <a:spcAft>
+                          <a:spcPts val="0"/>
+                        </a:spcAft>
+                      </a:pPr>
+                      <a:r>
+                        <a:rPr sz="1050" b="1" i="0">
+                          <a:solidFill>
+                            <a:srgbClr val="FFFFFF"/>
+                          </a:solidFill>
+                          <a:latin typeface="Yu Gothic"/>
+                          <a:ea typeface="Yu Gothic"/>
+                          <a:cs typeface="Yu Gothic"/>
+                        </a:rPr>
+                        <a:t>ねらい</a:t>
+                      </a:r>
+                    </a:p>
+                  </a:txBody>
+                  <a:tcPr marL="54864" marR="54864" marT="18288" marB="18288" anchor="ctr">
+                    <a:solidFill>
+                      <a:srgbClr val="3A106E"/>
+                    </a:solidFill>
+                  </a:tcPr>
+                </a:tc>
+              </a:tr>
+              <a:tr h="841248">
+                <a:tc>
+                  <a:txBody>
+                    <a:bodyPr wrap="square"/>
+                    <a:lstStyle/>
+                    <a:p>
+                      <a:pPr algn="l">
+                        <a:spcAft>
+                          <a:spcPts val="100"/>
+                        </a:spcAft>
+                      </a:pPr>
+                      <a:r>
+                        <a:rPr sz="1000" b="1" i="0">
+                          <a:solidFill>
+                            <a:srgbClr val="3A106E"/>
+                          </a:solidFill>
+                          <a:latin typeface="Yu Gothic"/>
+                          <a:ea typeface="Yu Gothic"/>
+                          <a:cs typeface="Yu Gothic"/>
+                        </a:rPr>
+                        <a:t>接点づくり</a:t>
+                      </a:r>
+                    </a:p>
+                    <a:p>
+                      <a:pPr algn="l">
+                        <a:spcAft>
+                          <a:spcPts val="100"/>
+                        </a:spcAft>
+                      </a:pPr>
+                      <a:r>
+                        <a:rPr sz="1000" b="1" i="0">
+                          <a:solidFill>
+                            <a:srgbClr val="3A106E"/>
+                          </a:solidFill>
+                          <a:latin typeface="Yu Gothic"/>
+                          <a:ea typeface="Yu Gothic"/>
+                          <a:cs typeface="Yu Gothic"/>
+                        </a:rPr>
+                        <a:t>分科会</a:t>
+                      </a:r>
+                    </a:p>
+                  </a:txBody>
+                  <a:tcPr marL="54864" marR="54864" marT="18288" marB="18288" anchor="ctr">
+                    <a:solidFill>
+                      <a:srgbClr val="FFFFFF"/>
+                    </a:solidFill>
+                  </a:tcPr>
+                </a:tc>
+                <a:tc>
+                  <a:txBody>
+                    <a:bodyPr wrap="square"/>
+                    <a:lstStyle/>
+                    <a:p>
+                      <a:pPr algn="l">
+                        <a:spcAft>
+                          <a:spcPts val="100"/>
+                        </a:spcAft>
+                      </a:pPr>
+                      <a:r>
+                        <a:rPr sz="1000" b="0" i="0">
+                          <a:solidFill>
+                            <a:srgbClr val="262630"/>
+                          </a:solidFill>
+                          <a:latin typeface="Yu Gothic"/>
+                          <a:ea typeface="Yu Gothic"/>
+                          <a:cs typeface="Yu Gothic"/>
+                        </a:rPr>
+                        <a:t>黒澤</a:t>
+                      </a:r>
+                    </a:p>
+                  </a:txBody>
+                  <a:tcPr marL="54864" marR="54864" marT="18288" marB="18288" anchor="ctr">
+                    <a:solidFill>
+                      <a:srgbClr val="FFFFFF"/>
+                    </a:solidFill>
+                  </a:tcPr>
+                </a:tc>
+                <a:tc>
+                  <a:txBody>
+                    <a:bodyPr wrap="square"/>
+                    <a:lstStyle/>
+                    <a:p>
+                      <a:pPr algn="l">
+                        <a:spcAft>
+                          <a:spcPts val="100"/>
+                        </a:spcAft>
+                      </a:pPr>
+                      <a:r>
+                        <a:rPr sz="1000" b="0" i="0">
+                          <a:solidFill>
+                            <a:srgbClr val="262630"/>
+                          </a:solidFill>
+                          <a:latin typeface="Yu Gothic"/>
+                          <a:ea typeface="Yu Gothic"/>
+                          <a:cs typeface="Yu Gothic"/>
+                        </a:rPr>
+                        <a:t>お客様・ファンとの日常接点づくり：EC・イベント・SNS・ファン施策、接点データの定点観測</a:t>
+                      </a:r>
+                    </a:p>
+                  </a:txBody>
+                  <a:tcPr marL="54864" marR="54864" marT="18288" marB="18288" anchor="ctr">
+                    <a:solidFill>
+                      <a:srgbClr val="FFFFFF"/>
+                    </a:solidFill>
+                  </a:tcPr>
+                </a:tc>
+                <a:tc>
+                  <a:txBody>
+                    <a:bodyPr wrap="square"/>
+                    <a:lstStyle/>
+                    <a:p>
+                      <a:pPr algn="l">
+                        <a:spcAft>
+                          <a:spcPts val="100"/>
+                        </a:spcAft>
+                      </a:pPr>
+                      <a:r>
+                        <a:rPr sz="1000" b="0" i="0">
+                          <a:solidFill>
+                            <a:srgbClr val="262630"/>
+                          </a:solidFill>
+                          <a:latin typeface="Yu Gothic"/>
+                          <a:ea typeface="Yu Gothic"/>
+                          <a:cs typeface="Yu Gothic"/>
+                        </a:rPr>
+                        <a:t>「待ちの窓口」から</a:t>
+                      </a:r>
+                    </a:p>
+                    <a:p>
+                      <a:pPr algn="l">
+                        <a:spcAft>
+                          <a:spcPts val="100"/>
+                        </a:spcAft>
+                      </a:pPr>
+                      <a:r>
+                        <a:rPr sz="1000" b="0" i="0">
+                          <a:solidFill>
+                            <a:srgbClr val="262630"/>
+                          </a:solidFill>
+                          <a:latin typeface="Yu Gothic"/>
+                          <a:ea typeface="Yu Gothic"/>
+                          <a:cs typeface="Yu Gothic"/>
+                        </a:rPr>
+                        <a:t>「接点を作りに行く」への転換</a:t>
+                      </a:r>
+                    </a:p>
+                  </a:txBody>
+                  <a:tcPr marL="54864" marR="54864" marT="18288" marB="18288" anchor="ctr">
+                    <a:solidFill>
+                      <a:srgbClr val="FFFFFF"/>
+                    </a:solidFill>
+                  </a:tcPr>
+                </a:tc>
+              </a:tr>
+              <a:tr h="841248">
+                <a:tc>
+                  <a:txBody>
+                    <a:bodyPr wrap="square"/>
+                    <a:lstStyle/>
+                    <a:p>
+                      <a:pPr algn="l">
+                        <a:spcAft>
+                          <a:spcPts val="100"/>
+                        </a:spcAft>
+                      </a:pPr>
+                      <a:r>
+                        <a:rPr sz="1000" b="1" i="0">
+                          <a:solidFill>
+                            <a:srgbClr val="3A106E"/>
+                          </a:solidFill>
+                          <a:latin typeface="Yu Gothic"/>
+                          <a:ea typeface="Yu Gothic"/>
+                          <a:cs typeface="Yu Gothic"/>
+                        </a:rPr>
+                        <a:t>ライセンス</a:t>
+                      </a:r>
+                    </a:p>
+                    <a:p>
+                      <a:pPr algn="l">
+                        <a:spcAft>
+                          <a:spcPts val="100"/>
+                        </a:spcAft>
+                      </a:pPr>
+                      <a:r>
+                        <a:rPr sz="1000" b="1" i="0">
+                          <a:solidFill>
+                            <a:srgbClr val="3A106E"/>
+                          </a:solidFill>
+                          <a:latin typeface="Yu Gothic"/>
+                          <a:ea typeface="Yu Gothic"/>
+                          <a:cs typeface="Yu Gothic"/>
+                        </a:rPr>
+                        <a:t>営業改革分科会</a:t>
+                      </a:r>
+                    </a:p>
+                  </a:txBody>
+                  <a:tcPr marL="54864" marR="54864" marT="18288" marB="18288" anchor="ctr">
+                    <a:solidFill>
+                      <a:srgbClr val="F7F7F9"/>
+                    </a:solidFill>
+                  </a:tcPr>
+                </a:tc>
+                <a:tc>
+                  <a:txBody>
+                    <a:bodyPr wrap="square"/>
+                    <a:lstStyle/>
+                    <a:p>
+                      <a:pPr algn="l">
+                        <a:spcAft>
+                          <a:spcPts val="100"/>
+                        </a:spcAft>
+                      </a:pPr>
+                      <a:r>
+                        <a:rPr sz="1000" b="0" i="0">
+                          <a:solidFill>
+                            <a:srgbClr val="262630"/>
+                          </a:solidFill>
+                          <a:latin typeface="Yu Gothic"/>
+                          <a:ea typeface="Yu Gothic"/>
+                          <a:cs typeface="Yu Gothic"/>
+                        </a:rPr>
+                        <a:t>南谷</a:t>
+                      </a:r>
+                    </a:p>
+                  </a:txBody>
+                  <a:tcPr marL="54864" marR="54864" marT="18288" marB="18288" anchor="ctr">
+                    <a:solidFill>
+                      <a:srgbClr val="F7F7F9"/>
+                    </a:solidFill>
+                  </a:tcPr>
+                </a:tc>
+                <a:tc>
+                  <a:txBody>
+                    <a:bodyPr wrap="square"/>
+                    <a:lstStyle/>
+                    <a:p>
+                      <a:pPr algn="l">
+                        <a:spcAft>
+                          <a:spcPts val="100"/>
+                        </a:spcAft>
+                      </a:pPr>
+                      <a:r>
+                        <a:rPr sz="1000" b="0" i="0">
+                          <a:solidFill>
+                            <a:srgbClr val="262630"/>
+                          </a:solidFill>
+                          <a:latin typeface="Yu Gothic"/>
+                          <a:ea typeface="Yu Gothic"/>
+                          <a:cs typeface="Yu Gothic"/>
+                        </a:rPr>
+                        <a:t>棚卸しとランクの運用、案件の進み具合と停滞の解消、新規開拓、営業資料の強化</a:t>
+                      </a:r>
+                    </a:p>
+                  </a:txBody>
+                  <a:tcPr marL="54864" marR="54864" marT="18288" marB="18288" anchor="ctr">
+                    <a:solidFill>
+                      <a:srgbClr val="F7F7F9"/>
+                    </a:solidFill>
+                  </a:tcPr>
+                </a:tc>
+                <a:tc>
+                  <a:txBody>
+                    <a:bodyPr wrap="square"/>
+                    <a:lstStyle/>
+                    <a:p>
+                      <a:pPr algn="l">
+                        <a:spcAft>
+                          <a:spcPts val="100"/>
+                        </a:spcAft>
+                      </a:pPr>
+                      <a:r>
+                        <a:rPr sz="1000" b="0" i="0">
+                          <a:solidFill>
+                            <a:srgbClr val="262630"/>
+                          </a:solidFill>
+                          <a:latin typeface="Yu Gothic"/>
+                          <a:ea typeface="Yu Gothic"/>
+                          <a:cs typeface="Yu Gothic"/>
+                        </a:rPr>
+                        <a:t>改革の本丸。棚卸しシートと</a:t>
+                      </a:r>
+                    </a:p>
+                    <a:p>
+                      <a:pPr algn="l">
+                        <a:spcAft>
+                          <a:spcPts val="100"/>
+                        </a:spcAft>
+                      </a:pPr>
+                      <a:r>
+                        <a:rPr sz="1000" b="0" i="0">
+                          <a:solidFill>
+                            <a:srgbClr val="262630"/>
+                          </a:solidFill>
+                          <a:latin typeface="Yu Gothic"/>
+                          <a:ea typeface="Yu Gothic"/>
+                          <a:cs typeface="Yu Gothic"/>
+                        </a:rPr>
+                        <a:t>直結する唯一の分科会</a:t>
+                      </a:r>
+                    </a:p>
+                  </a:txBody>
+                  <a:tcPr marL="54864" marR="54864" marT="18288" marB="18288" anchor="ctr">
+                    <a:solidFill>
+                      <a:srgbClr val="F7F7F9"/>
+                    </a:solidFill>
+                  </a:tcPr>
+                </a:tc>
+              </a:tr>
+              <a:tr h="841248">
+                <a:tc>
+                  <a:txBody>
+                    <a:bodyPr wrap="square"/>
+                    <a:lstStyle/>
+                    <a:p>
+                      <a:pPr algn="l">
+                        <a:spcAft>
+                          <a:spcPts val="100"/>
+                        </a:spcAft>
+                      </a:pPr>
+                      <a:r>
+                        <a:rPr sz="1000" b="1" i="0">
+                          <a:solidFill>
+                            <a:srgbClr val="3A106E"/>
+                          </a:solidFill>
+                          <a:latin typeface="Yu Gothic"/>
+                          <a:ea typeface="Yu Gothic"/>
+                          <a:cs typeface="Yu Gothic"/>
+                        </a:rPr>
+                        <a:t>経営基盤</a:t>
+                      </a:r>
+                    </a:p>
+                    <a:p>
+                      <a:pPr algn="l">
+                        <a:spcAft>
+                          <a:spcPts val="100"/>
+                        </a:spcAft>
+                      </a:pPr>
+                      <a:r>
+                        <a:rPr sz="1000" b="1" i="0">
+                          <a:solidFill>
+                            <a:srgbClr val="3A106E"/>
+                          </a:solidFill>
+                          <a:latin typeface="Yu Gothic"/>
+                          <a:ea typeface="Yu Gothic"/>
+                          <a:cs typeface="Yu Gothic"/>
+                        </a:rPr>
+                        <a:t>強化分科会</a:t>
+                      </a:r>
+                    </a:p>
+                  </a:txBody>
+                  <a:tcPr marL="54864" marR="54864" marT="18288" marB="18288" anchor="ctr">
+                    <a:solidFill>
+                      <a:srgbClr val="FFFFFF"/>
+                    </a:solidFill>
+                  </a:tcPr>
+                </a:tc>
+                <a:tc>
+                  <a:txBody>
+                    <a:bodyPr wrap="square"/>
+                    <a:lstStyle/>
+                    <a:p>
+                      <a:pPr algn="l">
+                        <a:spcAft>
+                          <a:spcPts val="100"/>
+                        </a:spcAft>
+                      </a:pPr>
+                      <a:r>
+                        <a:rPr sz="1000" b="0" i="0">
+                          <a:solidFill>
+                            <a:srgbClr val="262630"/>
+                          </a:solidFill>
+                          <a:latin typeface="Yu Gothic"/>
+                          <a:ea typeface="Yu Gothic"/>
+                          <a:cs typeface="Yu Gothic"/>
+                        </a:rPr>
+                        <a:t>高橋</a:t>
+                      </a:r>
+                    </a:p>
+                  </a:txBody>
+                  <a:tcPr marL="54864" marR="54864" marT="18288" marB="18288" anchor="ctr">
+                    <a:solidFill>
+                      <a:srgbClr val="FFFFFF"/>
+                    </a:solidFill>
+                  </a:tcPr>
+                </a:tc>
+                <a:tc>
+                  <a:txBody>
+                    <a:bodyPr wrap="square"/>
+                    <a:lstStyle/>
+                    <a:p>
+                      <a:pPr algn="l">
+                        <a:spcAft>
+                          <a:spcPts val="100"/>
+                        </a:spcAft>
+                      </a:pPr>
+                      <a:r>
+                        <a:rPr sz="1000" b="0" i="0">
+                          <a:solidFill>
+                            <a:srgbClr val="262630"/>
+                          </a:solidFill>
+                          <a:latin typeface="Yu Gothic"/>
+                          <a:ea typeface="Yu Gothic"/>
+                          <a:cs typeface="Yu Gothic"/>
+                        </a:rPr>
+                        <a:t>指標（KPI）の設計、ルール・ガイドラインづくり、工数の記録、AI活用</a:t>
+                      </a:r>
+                    </a:p>
+                  </a:txBody>
+                  <a:tcPr marL="54864" marR="54864" marT="18288" marB="18288" anchor="ctr">
+                    <a:solidFill>
+                      <a:srgbClr val="FFFFFF"/>
+                    </a:solidFill>
+                  </a:tcPr>
+                </a:tc>
+                <a:tc>
+                  <a:txBody>
+                    <a:bodyPr wrap="square"/>
+                    <a:lstStyle/>
+                    <a:p>
+                      <a:pPr algn="l">
+                        <a:spcAft>
+                          <a:spcPts val="100"/>
+                        </a:spcAft>
+                      </a:pPr>
+                      <a:r>
+                        <a:rPr sz="1000" b="0" i="0">
+                          <a:solidFill>
+                            <a:srgbClr val="262630"/>
+                          </a:solidFill>
+                          <a:latin typeface="Yu Gothic"/>
+                          <a:ea typeface="Yu Gothic"/>
+                          <a:cs typeface="Yu Gothic"/>
+                        </a:rPr>
+                        <a:t>他の2つが走るための</a:t>
+                      </a:r>
+                    </a:p>
+                    <a:p>
+                      <a:pPr algn="l">
+                        <a:spcAft>
+                          <a:spcPts val="100"/>
+                        </a:spcAft>
+                      </a:pPr>
+                      <a:r>
+                        <a:rPr sz="1000" b="0" i="0">
+                          <a:solidFill>
+                            <a:srgbClr val="262630"/>
+                          </a:solidFill>
+                          <a:latin typeface="Yu Gothic"/>
+                          <a:ea typeface="Yu Gothic"/>
+                          <a:cs typeface="Yu Gothic"/>
+                        </a:rPr>
+                        <a:t>道路を敷く</a:t>
+                      </a:r>
+                    </a:p>
+                  </a:txBody>
+                  <a:tcPr marL="54864" marR="54864" marT="18288" marB="18288" anchor="ctr">
+                    <a:solidFill>
+                      <a:srgbClr val="FFFFFF"/>
+                    </a:solidFill>
+                  </a:tcPr>
+                </a:tc>
+              </a:tr>
+            </a:tbl>
+          </a:graphicData>
+        </a:graphic>
+      </p:graphicFrame>
       <p:sp>
         <p:nvSpPr>
           <p:cNvPr id="6" name="Rectangle 5"/>
@@ -12966,8 +15717,8 @@
         </p:nvSpPr>
         <p:spPr>
           <a:xfrm>
-            <a:off x="502920" y="1956816"/>
-            <a:ext cx="64008" cy="969264"/>
+            <a:off x="566928" y="5486400"/>
+            <a:ext cx="137160" cy="137160"/>
           </a:xfrm>
           <a:prstGeom prst="rect">
             <a:avLst/>
@@ -13010,8 +15761,8 @@
         </p:nvSpPr>
         <p:spPr>
           <a:xfrm>
-            <a:off x="758952" y="2103120"/>
-            <a:ext cx="5047488" cy="694944"/>
+            <a:off x="841248" y="5431536"/>
+            <a:ext cx="10789920" cy="384048"/>
           </a:xfrm>
           <a:prstGeom prst="rect">
             <a:avLst/>
@@ -13019,28 +15770,10 @@
           <a:noFill/>
         </p:spPr>
         <p:txBody>
-          <a:bodyPr wrap="square" lIns="0" rIns="0" tIns="0" bIns="0" anchor="ctr">
+          <a:bodyPr wrap="square" lIns="0" rIns="0" tIns="0" bIns="0">
             <a:spAutoFit/>
           </a:bodyPr>
           <a:lstStyle/>
-          <a:p>
-            <a:pPr algn="l">
-              <a:spcAft>
-                <a:spcPts val="400"/>
-              </a:spcAft>
-            </a:pPr>
-            <a:r>
-              <a:rPr sz="1300" b="1" i="0">
-                <a:solidFill>
-                  <a:srgbClr val="3A106E"/>
-                </a:solidFill>
-                <a:latin typeface="Yu Gothic"/>
-                <a:ea typeface="Yu Gothic"/>
-                <a:cs typeface="Yu Gothic"/>
-              </a:rPr>
-              <a:t>棚卸し・スコアリングマスター</a:t>
-            </a:r>
-          </a:p>
           <a:p>
             <a:pPr algn="l">
               <a:spcAft>
@@ -13048,15 +15781,15 @@
               </a:spcAft>
             </a:pPr>
             <a:r>
-              <a:rPr sz="1050" b="0" i="0">
-                <a:solidFill>
-                  <a:srgbClr val="5F5F6E"/>
+              <a:rPr sz="1050" b="1" i="0">
+                <a:solidFill>
+                  <a:srgbClr val="3A106E"/>
                 </a:solidFill>
                 <a:latin typeface="Yu Gothic"/>
                 <a:ea typeface="Yu Gothic"/>
                 <a:cs typeface="Yu Gothic"/>
               </a:rPr>
-              <a:t>採点定義込み</a:t>
+              <a:t>関係する部長・メンバーはテーマに応じて出席をお願いします（全員が毎回ではありません）</a:t>
             </a:r>
           </a:p>
         </p:txBody>
@@ -13069,54 +15802,8 @@
         </p:nvSpPr>
         <p:spPr>
           <a:xfrm>
-            <a:off x="6181344" y="1956816"/>
-            <a:ext cx="5504688" cy="969264"/>
-          </a:xfrm>
-          <a:prstGeom prst="rect">
-            <a:avLst/>
-          </a:prstGeom>
-          <a:solidFill>
-            <a:srgbClr val="FFFFFF"/>
-          </a:solidFill>
-          <a:ln w="9525">
-            <a:solidFill>
-              <a:srgbClr val="D9D9E0"/>
-            </a:solidFill>
-          </a:ln>
-          <a:effectLst/>
-        </p:spPr>
-        <p:style>
-          <a:lnRef idx="1">
-            <a:schemeClr val="accent1"/>
-          </a:lnRef>
-          <a:fillRef idx="3">
-            <a:schemeClr val="accent1"/>
-          </a:fillRef>
-          <a:effectRef idx="2">
-            <a:schemeClr val="accent1"/>
-          </a:effectRef>
-          <a:fontRef idx="minor">
-            <a:schemeClr val="lt1"/>
-          </a:fontRef>
-        </p:style>
-        <p:txBody>
-          <a:bodyPr rtlCol="0" anchor="ctr"/>
-          <a:lstStyle/>
-          <a:p>
-            <a:pPr algn="ctr"/>
-          </a:p>
-        </p:txBody>
-      </p:sp>
-      <p:sp>
-        <p:nvSpPr>
-          <p:cNvPr id="9" name="Rectangle 8"/>
-          <p:cNvSpPr/>
-          <p:nvPr/>
-        </p:nvSpPr>
-        <p:spPr>
-          <a:xfrm>
-            <a:off x="6181344" y="1956816"/>
-            <a:ext cx="64008" cy="969264"/>
+            <a:off x="566928" y="5961888"/>
+            <a:ext cx="137160" cy="137160"/>
           </a:xfrm>
           <a:prstGeom prst="rect">
             <a:avLst/>
@@ -13153,14 +15840,14 @@
       </p:sp>
       <p:sp>
         <p:nvSpPr>
-          <p:cNvPr id="10" name="TextBox 9"/>
+          <p:cNvPr id="9" name="TextBox 8"/>
           <p:cNvSpPr txBox="1"/>
           <p:nvPr/>
         </p:nvSpPr>
         <p:spPr>
           <a:xfrm>
-            <a:off x="6437376" y="2103120"/>
-            <a:ext cx="5047488" cy="694944"/>
+            <a:off x="841248" y="5907024"/>
+            <a:ext cx="10789920" cy="384048"/>
           </a:xfrm>
           <a:prstGeom prst="rect">
             <a:avLst/>
@@ -13168,28 +15855,10 @@
           <a:noFill/>
         </p:spPr>
         <p:txBody>
-          <a:bodyPr wrap="square" lIns="0" rIns="0" tIns="0" bIns="0" anchor="ctr">
+          <a:bodyPr wrap="square" lIns="0" rIns="0" tIns="0" bIns="0">
             <a:spAutoFit/>
           </a:bodyPr>
           <a:lstStyle/>
-          <a:p>
-            <a:pPr algn="l">
-              <a:spcAft>
-                <a:spcPts val="400"/>
-              </a:spcAft>
-            </a:pPr>
-            <a:r>
-              <a:rPr sz="1300" b="1" i="0">
-                <a:solidFill>
-                  <a:srgbClr val="3A106E"/>
-                </a:solidFill>
-                <a:latin typeface="Yu Gothic"/>
-                <a:ea typeface="Yu Gothic"/>
-                <a:cs typeface="Yu Gothic"/>
-              </a:rPr>
-              <a:t>工数申告テンプレート</a:t>
-            </a:r>
-          </a:p>
           <a:p>
             <a:pPr algn="l">
               <a:spcAft>
@@ -13199,745 +15868,20 @@
             <a:r>
               <a:rPr sz="1050" b="1" i="0">
                 <a:solidFill>
-                  <a:srgbClr val="C03030"/>
+                  <a:srgbClr val="3A106E"/>
                 </a:solidFill>
                 <a:latin typeface="Yu Gothic"/>
                 <a:ea typeface="Yu Gothic"/>
                 <a:cs typeface="Yu Gothic"/>
               </a:rPr>
-              <a:t>評価には一切使いません</a:t>
-            </a:r>
-          </a:p>
-        </p:txBody>
-      </p:sp>
-      <p:sp>
-        <p:nvSpPr>
-          <p:cNvPr id="11" name="Rectangle 10"/>
-          <p:cNvSpPr/>
-          <p:nvPr/>
-        </p:nvSpPr>
-        <p:spPr>
-          <a:xfrm>
-            <a:off x="502920" y="3090672"/>
-            <a:ext cx="5504688" cy="969264"/>
-          </a:xfrm>
-          <a:prstGeom prst="rect">
-            <a:avLst/>
-          </a:prstGeom>
-          <a:solidFill>
-            <a:srgbClr val="FFFFFF"/>
-          </a:solidFill>
-          <a:ln w="9525">
-            <a:solidFill>
-              <a:srgbClr val="D9D9E0"/>
-            </a:solidFill>
-          </a:ln>
-          <a:effectLst/>
-        </p:spPr>
-        <p:style>
-          <a:lnRef idx="1">
-            <a:schemeClr val="accent1"/>
-          </a:lnRef>
-          <a:fillRef idx="3">
-            <a:schemeClr val="accent1"/>
-          </a:fillRef>
-          <a:effectRef idx="2">
-            <a:schemeClr val="accent1"/>
-          </a:effectRef>
-          <a:fontRef idx="minor">
-            <a:schemeClr val="lt1"/>
-          </a:fontRef>
-        </p:style>
-        <p:txBody>
-          <a:bodyPr rtlCol="0" anchor="ctr"/>
-          <a:lstStyle/>
-          <a:p>
-            <a:pPr algn="ctr"/>
-          </a:p>
-        </p:txBody>
-      </p:sp>
-      <p:sp>
-        <p:nvSpPr>
-          <p:cNvPr id="12" name="Rectangle 11"/>
-          <p:cNvSpPr/>
-          <p:nvPr/>
-        </p:nvSpPr>
-        <p:spPr>
-          <a:xfrm>
-            <a:off x="502920" y="3090672"/>
-            <a:ext cx="64008" cy="969264"/>
-          </a:xfrm>
-          <a:prstGeom prst="rect">
-            <a:avLst/>
-          </a:prstGeom>
-          <a:solidFill>
-            <a:srgbClr val="7823DC"/>
-          </a:solidFill>
-          <a:ln>
-            <a:noFill/>
-          </a:ln>
-          <a:effectLst/>
-        </p:spPr>
-        <p:style>
-          <a:lnRef idx="1">
-            <a:schemeClr val="accent1"/>
-          </a:lnRef>
-          <a:fillRef idx="3">
-            <a:schemeClr val="accent1"/>
-          </a:fillRef>
-          <a:effectRef idx="2">
-            <a:schemeClr val="accent1"/>
-          </a:effectRef>
-          <a:fontRef idx="minor">
-            <a:schemeClr val="lt1"/>
-          </a:fontRef>
-        </p:style>
-        <p:txBody>
-          <a:bodyPr rtlCol="0" anchor="ctr"/>
-          <a:lstStyle/>
-          <a:p>
-            <a:pPr algn="ctr"/>
-          </a:p>
-        </p:txBody>
-      </p:sp>
-      <p:sp>
-        <p:nvSpPr>
-          <p:cNvPr id="13" name="TextBox 12"/>
-          <p:cNvSpPr txBox="1"/>
-          <p:nvPr/>
-        </p:nvSpPr>
-        <p:spPr>
-          <a:xfrm>
-            <a:off x="758952" y="3236976"/>
-            <a:ext cx="5047488" cy="694944"/>
-          </a:xfrm>
-          <a:prstGeom prst="rect">
-            <a:avLst/>
-          </a:prstGeom>
-          <a:noFill/>
-        </p:spPr>
-        <p:txBody>
-          <a:bodyPr wrap="square" lIns="0" rIns="0" tIns="0" bIns="0" anchor="ctr">
-            <a:spAutoFit/>
-          </a:bodyPr>
-          <a:lstStyle/>
-          <a:p>
-            <a:pPr algn="l">
-              <a:spcAft>
-                <a:spcPts val="400"/>
-              </a:spcAft>
-            </a:pPr>
-            <a:r>
-              <a:rPr sz="1300" b="1" i="0">
-                <a:solidFill>
-                  <a:srgbClr val="3A106E"/>
-                </a:solidFill>
-                <a:latin typeface="Yu Gothic"/>
-                <a:ea typeface="Yu Gothic"/>
-                <a:cs typeface="Yu Gothic"/>
-              </a:rPr>
-              <a:t>KPI・決定ログ・90日計画</a:t>
-            </a:r>
-          </a:p>
-          <a:p>
-            <a:pPr algn="l">
-              <a:spcAft>
-                <a:spcPts val="0"/>
-              </a:spcAft>
-            </a:pPr>
-            <a:r>
-              <a:rPr sz="1050" b="0" i="0">
-                <a:solidFill>
-                  <a:srgbClr val="5F5F6E"/>
-                </a:solidFill>
-                <a:latin typeface="Yu Gothic"/>
-                <a:ea typeface="Yu Gothic"/>
-                <a:cs typeface="Yu Gothic"/>
-              </a:rPr>
-              <a:t>進捗と決定を残す</a:t>
-            </a:r>
-          </a:p>
-        </p:txBody>
-      </p:sp>
-      <p:sp>
-        <p:nvSpPr>
-          <p:cNvPr id="14" name="Rectangle 13"/>
-          <p:cNvSpPr/>
-          <p:nvPr/>
-        </p:nvSpPr>
-        <p:spPr>
-          <a:xfrm>
-            <a:off x="6181344" y="3090672"/>
-            <a:ext cx="5504688" cy="969264"/>
-          </a:xfrm>
-          <a:prstGeom prst="rect">
-            <a:avLst/>
-          </a:prstGeom>
-          <a:solidFill>
-            <a:srgbClr val="FFFFFF"/>
-          </a:solidFill>
-          <a:ln w="9525">
-            <a:solidFill>
-              <a:srgbClr val="D9D9E0"/>
-            </a:solidFill>
-          </a:ln>
-          <a:effectLst/>
-        </p:spPr>
-        <p:style>
-          <a:lnRef idx="1">
-            <a:schemeClr val="accent1"/>
-          </a:lnRef>
-          <a:fillRef idx="3">
-            <a:schemeClr val="accent1"/>
-          </a:fillRef>
-          <a:effectRef idx="2">
-            <a:schemeClr val="accent1"/>
-          </a:effectRef>
-          <a:fontRef idx="minor">
-            <a:schemeClr val="lt1"/>
-          </a:fontRef>
-        </p:style>
-        <p:txBody>
-          <a:bodyPr rtlCol="0" anchor="ctr"/>
-          <a:lstStyle/>
-          <a:p>
-            <a:pPr algn="ctr"/>
-          </a:p>
-        </p:txBody>
-      </p:sp>
-      <p:sp>
-        <p:nvSpPr>
-          <p:cNvPr id="15" name="Rectangle 14"/>
-          <p:cNvSpPr/>
-          <p:nvPr/>
-        </p:nvSpPr>
-        <p:spPr>
-          <a:xfrm>
-            <a:off x="6181344" y="3090672"/>
-            <a:ext cx="64008" cy="969264"/>
-          </a:xfrm>
-          <a:prstGeom prst="rect">
-            <a:avLst/>
-          </a:prstGeom>
-          <a:solidFill>
-            <a:srgbClr val="7823DC"/>
-          </a:solidFill>
-          <a:ln>
-            <a:noFill/>
-          </a:ln>
-          <a:effectLst/>
-        </p:spPr>
-        <p:style>
-          <a:lnRef idx="1">
-            <a:schemeClr val="accent1"/>
-          </a:lnRef>
-          <a:fillRef idx="3">
-            <a:schemeClr val="accent1"/>
-          </a:fillRef>
-          <a:effectRef idx="2">
-            <a:schemeClr val="accent1"/>
-          </a:effectRef>
-          <a:fontRef idx="minor">
-            <a:schemeClr val="lt1"/>
-          </a:fontRef>
-        </p:style>
-        <p:txBody>
-          <a:bodyPr rtlCol="0" anchor="ctr"/>
-          <a:lstStyle/>
-          <a:p>
-            <a:pPr algn="ctr"/>
-          </a:p>
-        </p:txBody>
-      </p:sp>
-      <p:sp>
-        <p:nvSpPr>
-          <p:cNvPr id="16" name="TextBox 15"/>
-          <p:cNvSpPr txBox="1"/>
-          <p:nvPr/>
-        </p:nvSpPr>
-        <p:spPr>
-          <a:xfrm>
-            <a:off x="6437376" y="3236976"/>
-            <a:ext cx="5047488" cy="694944"/>
-          </a:xfrm>
-          <a:prstGeom prst="rect">
-            <a:avLst/>
-          </a:prstGeom>
-          <a:noFill/>
-        </p:spPr>
-        <p:txBody>
-          <a:bodyPr wrap="square" lIns="0" rIns="0" tIns="0" bIns="0" anchor="ctr">
-            <a:spAutoFit/>
-          </a:bodyPr>
-          <a:lstStyle/>
-          <a:p>
-            <a:pPr algn="l">
-              <a:spcAft>
-                <a:spcPts val="400"/>
-              </a:spcAft>
-            </a:pPr>
-            <a:r>
-              <a:rPr sz="1300" b="1" i="0">
-                <a:solidFill>
-                  <a:srgbClr val="3A106E"/>
-                </a:solidFill>
-                <a:latin typeface="Yu Gothic"/>
-                <a:ea typeface="Yu Gothic"/>
-                <a:cs typeface="Yu Gothic"/>
-              </a:rPr>
-              <a:t>会議のアジェンダ・議事録様式</a:t>
-            </a:r>
-          </a:p>
-          <a:p>
-            <a:pPr algn="l">
-              <a:spcAft>
-                <a:spcPts val="0"/>
-              </a:spcAft>
-            </a:pPr>
-            <a:r>
-              <a:rPr sz="1050" b="0" i="0">
-                <a:solidFill>
-                  <a:srgbClr val="5F5F6E"/>
-                </a:solidFill>
-                <a:latin typeface="Yu Gothic"/>
-                <a:ea typeface="Yu Gothic"/>
-                <a:cs typeface="Yu Gothic"/>
-              </a:rPr>
-              <a:t>会議を軽く回す</a:t>
-            </a:r>
-          </a:p>
-        </p:txBody>
-      </p:sp>
-      <p:sp>
-        <p:nvSpPr>
-          <p:cNvPr id="17" name="Rectangle 16"/>
-          <p:cNvSpPr/>
-          <p:nvPr/>
-        </p:nvSpPr>
-        <p:spPr>
-          <a:xfrm>
-            <a:off x="502920" y="4224528"/>
-            <a:ext cx="5504688" cy="969264"/>
-          </a:xfrm>
-          <a:prstGeom prst="rect">
-            <a:avLst/>
-          </a:prstGeom>
-          <a:solidFill>
-            <a:srgbClr val="FFFFFF"/>
-          </a:solidFill>
-          <a:ln w="9525">
-            <a:solidFill>
-              <a:srgbClr val="D9D9E0"/>
-            </a:solidFill>
-          </a:ln>
-          <a:effectLst/>
-        </p:spPr>
-        <p:style>
-          <a:lnRef idx="1">
-            <a:schemeClr val="accent1"/>
-          </a:lnRef>
-          <a:fillRef idx="3">
-            <a:schemeClr val="accent1"/>
-          </a:fillRef>
-          <a:effectRef idx="2">
-            <a:schemeClr val="accent1"/>
-          </a:effectRef>
-          <a:fontRef idx="minor">
-            <a:schemeClr val="lt1"/>
-          </a:fontRef>
-        </p:style>
-        <p:txBody>
-          <a:bodyPr rtlCol="0" anchor="ctr"/>
-          <a:lstStyle/>
-          <a:p>
-            <a:pPr algn="ctr"/>
-          </a:p>
-        </p:txBody>
-      </p:sp>
-      <p:sp>
-        <p:nvSpPr>
-          <p:cNvPr id="18" name="Rectangle 17"/>
-          <p:cNvSpPr/>
-          <p:nvPr/>
-        </p:nvSpPr>
-        <p:spPr>
-          <a:xfrm>
-            <a:off x="502920" y="4224528"/>
-            <a:ext cx="64008" cy="969264"/>
-          </a:xfrm>
-          <a:prstGeom prst="rect">
-            <a:avLst/>
-          </a:prstGeom>
-          <a:solidFill>
-            <a:srgbClr val="7823DC"/>
-          </a:solidFill>
-          <a:ln>
-            <a:noFill/>
-          </a:ln>
-          <a:effectLst/>
-        </p:spPr>
-        <p:style>
-          <a:lnRef idx="1">
-            <a:schemeClr val="accent1"/>
-          </a:lnRef>
-          <a:fillRef idx="3">
-            <a:schemeClr val="accent1"/>
-          </a:fillRef>
-          <a:effectRef idx="2">
-            <a:schemeClr val="accent1"/>
-          </a:effectRef>
-          <a:fontRef idx="minor">
-            <a:schemeClr val="lt1"/>
-          </a:fontRef>
-        </p:style>
-        <p:txBody>
-          <a:bodyPr rtlCol="0" anchor="ctr"/>
-          <a:lstStyle/>
-          <a:p>
-            <a:pPr algn="ctr"/>
-          </a:p>
-        </p:txBody>
-      </p:sp>
-      <p:sp>
-        <p:nvSpPr>
-          <p:cNvPr id="19" name="TextBox 18"/>
-          <p:cNvSpPr txBox="1"/>
-          <p:nvPr/>
-        </p:nvSpPr>
-        <p:spPr>
-          <a:xfrm>
-            <a:off x="758952" y="4370832"/>
-            <a:ext cx="5047488" cy="694944"/>
-          </a:xfrm>
-          <a:prstGeom prst="rect">
-            <a:avLst/>
-          </a:prstGeom>
-          <a:noFill/>
-        </p:spPr>
-        <p:txBody>
-          <a:bodyPr wrap="square" lIns="0" rIns="0" tIns="0" bIns="0" anchor="ctr">
-            <a:spAutoFit/>
-          </a:bodyPr>
-          <a:lstStyle/>
-          <a:p>
-            <a:pPr algn="l">
-              <a:spcAft>
-                <a:spcPts val="400"/>
-              </a:spcAft>
-            </a:pPr>
-            <a:r>
-              <a:rPr sz="1300" b="1" i="0">
-                <a:solidFill>
-                  <a:srgbClr val="3A106E"/>
-                </a:solidFill>
-                <a:latin typeface="Yu Gothic"/>
-                <a:ea typeface="Yu Gothic"/>
-                <a:cs typeface="Yu Gothic"/>
-              </a:rPr>
-              <a:t>STOの設計書と運用指南書</a:t>
-            </a:r>
-          </a:p>
-          <a:p>
-            <a:pPr algn="l">
-              <a:spcAft>
-                <a:spcPts val="0"/>
-              </a:spcAft>
-            </a:pPr>
-            <a:r>
-              <a:rPr sz="1050" b="0" i="0">
-                <a:solidFill>
-                  <a:srgbClr val="5F5F6E"/>
-                </a:solidFill>
-                <a:latin typeface="Yu Gothic"/>
-                <a:ea typeface="Yu Gothic"/>
-                <a:cs typeface="Yu Gothic"/>
-              </a:rPr>
-              <a:t>役割別の実務マニュアル</a:t>
-            </a:r>
-          </a:p>
-        </p:txBody>
-      </p:sp>
-      <p:sp>
-        <p:nvSpPr>
-          <p:cNvPr id="20" name="Rectangle 19"/>
-          <p:cNvSpPr/>
-          <p:nvPr/>
-        </p:nvSpPr>
-        <p:spPr>
-          <a:xfrm>
-            <a:off x="6181344" y="4224528"/>
-            <a:ext cx="5504688" cy="969264"/>
-          </a:xfrm>
-          <a:prstGeom prst="rect">
-            <a:avLst/>
-          </a:prstGeom>
-          <a:solidFill>
-            <a:srgbClr val="FFFFFF"/>
-          </a:solidFill>
-          <a:ln w="9525">
-            <a:solidFill>
-              <a:srgbClr val="D9D9E0"/>
-            </a:solidFill>
-          </a:ln>
-          <a:effectLst/>
-        </p:spPr>
-        <p:style>
-          <a:lnRef idx="1">
-            <a:schemeClr val="accent1"/>
-          </a:lnRef>
-          <a:fillRef idx="3">
-            <a:schemeClr val="accent1"/>
-          </a:fillRef>
-          <a:effectRef idx="2">
-            <a:schemeClr val="accent1"/>
-          </a:effectRef>
-          <a:fontRef idx="minor">
-            <a:schemeClr val="lt1"/>
-          </a:fontRef>
-        </p:style>
-        <p:txBody>
-          <a:bodyPr rtlCol="0" anchor="ctr"/>
-          <a:lstStyle/>
-          <a:p>
-            <a:pPr algn="ctr"/>
-          </a:p>
-        </p:txBody>
-      </p:sp>
-      <p:sp>
-        <p:nvSpPr>
-          <p:cNvPr id="21" name="Rectangle 20"/>
-          <p:cNvSpPr/>
-          <p:nvPr/>
-        </p:nvSpPr>
-        <p:spPr>
-          <a:xfrm>
-            <a:off x="6181344" y="4224528"/>
-            <a:ext cx="64008" cy="969264"/>
-          </a:xfrm>
-          <a:prstGeom prst="rect">
-            <a:avLst/>
-          </a:prstGeom>
-          <a:solidFill>
-            <a:srgbClr val="7823DC"/>
-          </a:solidFill>
-          <a:ln>
-            <a:noFill/>
-          </a:ln>
-          <a:effectLst/>
-        </p:spPr>
-        <p:style>
-          <a:lnRef idx="1">
-            <a:schemeClr val="accent1"/>
-          </a:lnRef>
-          <a:fillRef idx="3">
-            <a:schemeClr val="accent1"/>
-          </a:fillRef>
-          <a:effectRef idx="2">
-            <a:schemeClr val="accent1"/>
-          </a:effectRef>
-          <a:fontRef idx="minor">
-            <a:schemeClr val="lt1"/>
-          </a:fontRef>
-        </p:style>
-        <p:txBody>
-          <a:bodyPr rtlCol="0" anchor="ctr"/>
-          <a:lstStyle/>
-          <a:p>
-            <a:pPr algn="ctr"/>
-          </a:p>
-        </p:txBody>
-      </p:sp>
-      <p:sp>
-        <p:nvSpPr>
-          <p:cNvPr id="22" name="TextBox 21"/>
-          <p:cNvSpPr txBox="1"/>
-          <p:nvPr/>
-        </p:nvSpPr>
-        <p:spPr>
-          <a:xfrm>
-            <a:off x="6437376" y="4370832"/>
-            <a:ext cx="5047488" cy="694944"/>
-          </a:xfrm>
-          <a:prstGeom prst="rect">
-            <a:avLst/>
-          </a:prstGeom>
-          <a:noFill/>
-        </p:spPr>
-        <p:txBody>
-          <a:bodyPr wrap="square" lIns="0" rIns="0" tIns="0" bIns="0" anchor="ctr">
-            <a:spAutoFit/>
-          </a:bodyPr>
-          <a:lstStyle/>
-          <a:p>
-            <a:pPr algn="l">
-              <a:spcAft>
-                <a:spcPts val="400"/>
-              </a:spcAft>
-            </a:pPr>
-            <a:r>
-              <a:rPr sz="1300" b="1" i="0">
-                <a:solidFill>
-                  <a:srgbClr val="3A106E"/>
-                </a:solidFill>
-                <a:latin typeface="Yu Gothic"/>
-                <a:ea typeface="Yu Gothic"/>
-                <a:cs typeface="Yu Gothic"/>
-              </a:rPr>
-              <a:t>資料一覧</a:t>
-            </a:r>
-          </a:p>
-          <a:p>
-            <a:pPr algn="l">
-              <a:spcAft>
-                <a:spcPts val="0"/>
-              </a:spcAft>
-            </a:pPr>
-            <a:r>
-              <a:rPr sz="1050" b="0" i="0">
-                <a:solidFill>
-                  <a:srgbClr val="5F5F6E"/>
-                </a:solidFill>
-                <a:latin typeface="Yu Gothic"/>
-                <a:ea typeface="Yu Gothic"/>
-                <a:cs typeface="Yu Gothic"/>
-              </a:rPr>
-              <a:t>どれが最新版かの正本管理</a:t>
-            </a:r>
-          </a:p>
-        </p:txBody>
-      </p:sp>
-      <p:sp>
-        <p:nvSpPr>
-          <p:cNvPr id="23" name="Rectangle 22"/>
-          <p:cNvSpPr/>
-          <p:nvPr/>
-        </p:nvSpPr>
-        <p:spPr>
-          <a:xfrm>
-            <a:off x="502920" y="5724144"/>
-            <a:ext cx="11183112" cy="621792"/>
-          </a:xfrm>
-          <a:prstGeom prst="rect">
-            <a:avLst/>
-          </a:prstGeom>
-          <a:solidFill>
-            <a:srgbClr val="F3EFFB"/>
-          </a:solidFill>
-          <a:ln>
-            <a:noFill/>
-          </a:ln>
-          <a:effectLst/>
-        </p:spPr>
-        <p:style>
-          <a:lnRef idx="1">
-            <a:schemeClr val="accent1"/>
-          </a:lnRef>
-          <a:fillRef idx="3">
-            <a:schemeClr val="accent1"/>
-          </a:fillRef>
-          <a:effectRef idx="2">
-            <a:schemeClr val="accent1"/>
-          </a:effectRef>
-          <a:fontRef idx="minor">
-            <a:schemeClr val="lt1"/>
-          </a:fontRef>
-        </p:style>
-        <p:txBody>
-          <a:bodyPr rtlCol="0" anchor="ctr"/>
-          <a:lstStyle/>
-          <a:p>
-            <a:pPr algn="ctr"/>
-          </a:p>
-        </p:txBody>
-      </p:sp>
-      <p:sp>
-        <p:nvSpPr>
-          <p:cNvPr id="24" name="Rectangle 23"/>
-          <p:cNvSpPr/>
-          <p:nvPr/>
-        </p:nvSpPr>
-        <p:spPr>
-          <a:xfrm>
-            <a:off x="502920" y="5724144"/>
-            <a:ext cx="38100" cy="621792"/>
-          </a:xfrm>
-          <a:prstGeom prst="rect">
-            <a:avLst/>
-          </a:prstGeom>
-          <a:solidFill>
-            <a:srgbClr val="3A106E"/>
-          </a:solidFill>
-          <a:ln>
-            <a:noFill/>
-          </a:ln>
-          <a:effectLst/>
-        </p:spPr>
-        <p:style>
-          <a:lnRef idx="1">
-            <a:schemeClr val="accent1"/>
-          </a:lnRef>
-          <a:fillRef idx="3">
-            <a:schemeClr val="accent1"/>
-          </a:fillRef>
-          <a:effectRef idx="2">
-            <a:schemeClr val="accent1"/>
-          </a:effectRef>
-          <a:fontRef idx="minor">
-            <a:schemeClr val="lt1"/>
-          </a:fontRef>
-        </p:style>
-        <p:txBody>
-          <a:bodyPr rtlCol="0" anchor="ctr"/>
-          <a:lstStyle/>
-          <a:p>
-            <a:pPr algn="ctr"/>
-          </a:p>
-        </p:txBody>
-      </p:sp>
-      <p:sp>
-        <p:nvSpPr>
-          <p:cNvPr id="25" name="TextBox 24"/>
-          <p:cNvSpPr txBox="1"/>
-          <p:nvPr/>
-        </p:nvSpPr>
-        <p:spPr>
-          <a:xfrm>
-            <a:off x="713232" y="5779008"/>
-            <a:ext cx="10835640" cy="512064"/>
-          </a:xfrm>
-          <a:prstGeom prst="rect">
-            <a:avLst/>
-          </a:prstGeom>
-          <a:noFill/>
-        </p:spPr>
-        <p:txBody>
-          <a:bodyPr wrap="square" lIns="0" rIns="0" tIns="0" bIns="0" anchor="ctr">
-            <a:spAutoFit/>
-          </a:bodyPr>
-          <a:lstStyle/>
-          <a:p>
-            <a:pPr algn="l">
-              <a:spcAft>
-                <a:spcPts val="0"/>
-              </a:spcAft>
-            </a:pPr>
-            <a:r>
-              <a:rPr sz="1050" b="1" i="0">
-                <a:solidFill>
-                  <a:srgbClr val="3A106E"/>
-                </a:solidFill>
-                <a:latin typeface="Yu Gothic"/>
-                <a:ea typeface="Yu Gothic"/>
-                <a:cs typeface="Yu Gothic"/>
-              </a:rPr>
-              <a:t>すべて一式パッケージで共有します。迷ったら「資料一覧」を見てください</a:t>
-            </a:r>
-          </a:p>
-        </p:txBody>
-      </p:sp>
-      <p:sp>
-        <p:nvSpPr>
-          <p:cNvPr id="26" name="Rectangle 25"/>
+              <a:t>部門をまたぐ相談（例：キャラクター稼働の依頼整理、製作と営業の情報連携）は、該当する分科会に論点として持ち込めます</a:t>
+            </a:r>
+          </a:p>
+        </p:txBody>
+      </p:sp>
+      <p:sp>
+        <p:nvSpPr>
+          <p:cNvPr id="10" name="Rectangle 9"/>
           <p:cNvSpPr/>
           <p:nvPr/>
         </p:nvSpPr>
@@ -13981,7 +15925,7 @@
       </p:sp>
       <p:sp>
         <p:nvSpPr>
-          <p:cNvPr id="27" name="TextBox 26"/>
+          <p:cNvPr id="11" name="TextBox 10"/>
           <p:cNvSpPr txBox="1"/>
           <p:nvPr/>
         </p:nvSpPr>
@@ -14022,7 +15966,7 @@
       </p:sp>
       <p:sp>
         <p:nvSpPr>
-          <p:cNvPr id="28" name="TextBox 27"/>
+          <p:cNvPr id="12" name="TextBox 11"/>
           <p:cNvSpPr txBox="1"/>
           <p:nvPr/>
         </p:nvSpPr>
@@ -14115,7 +16059,7 @@
                 <a:ea typeface="Yu Gothic"/>
                 <a:cs typeface="Yu Gothic"/>
               </a:rPr>
-              <a:t>フィードバックへの対応</a:t>
+              <a:t>分科会の詳細 ②</a:t>
             </a:r>
           </a:p>
         </p:txBody>
@@ -14156,7 +16100,7 @@
                 <a:ea typeface="Yu Gothic"/>
                 <a:cs typeface="Yu Gothic"/>
               </a:rPr>
-              <a:t>37件すべてに、回答済みです</a:t>
+              <a:t>毎週75分の、進め方</a:t>
             </a:r>
           </a:p>
         </p:txBody>
@@ -14207,14 +16151,542 @@
       </p:sp>
       <p:sp>
         <p:nvSpPr>
-          <p:cNvPr id="5" name="Rectangle 4"/>
+          <p:cNvPr id="5" name="TextBox 4"/>
+          <p:cNvSpPr txBox="1"/>
+          <p:nvPr/>
+        </p:nvSpPr>
+        <p:spPr>
+          <a:xfrm>
+            <a:off x="502920" y="1847088"/>
+            <a:ext cx="6766560" cy="274320"/>
+          </a:xfrm>
+          <a:prstGeom prst="rect">
+            <a:avLst/>
+          </a:prstGeom>
+          <a:noFill/>
+        </p:spPr>
+        <p:txBody>
+          <a:bodyPr wrap="square" lIns="0" rIns="0" tIns="0" bIns="0">
+            <a:spAutoFit/>
+          </a:bodyPr>
+          <a:lstStyle/>
+          <a:p>
+            <a:pPr algn="l">
+              <a:spcAft>
+                <a:spcPts val="0"/>
+              </a:spcAft>
+            </a:pPr>
+            <a:r>
+              <a:rPr sz="1200" b="1" i="0">
+                <a:solidFill>
+                  <a:srgbClr val="3A106E"/>
+                </a:solidFill>
+                <a:latin typeface="Yu Gothic"/>
+                <a:ea typeface="Yu Gothic"/>
+                <a:cs typeface="Yu Gothic"/>
+              </a:rPr>
+              <a:t>75分の時間割</a:t>
+            </a:r>
+          </a:p>
+        </p:txBody>
+      </p:sp>
+      <p:graphicFrame>
+        <p:nvGraphicFramePr>
+          <p:cNvPr id="6" name="Table 5"/>
+          <p:cNvGraphicFramePr>
+            <a:graphicFrameLocks noGrp="1"/>
+          </p:cNvGraphicFramePr>
+          <p:nvPr/>
+        </p:nvGraphicFramePr>
+        <p:xfrm>
+          <a:off x="502920" y="2139696"/>
+          <a:ext cx="6766559" cy="3264408"/>
+        </p:xfrm>
+        <a:graphic>
+          <a:graphicData uri="http://schemas.openxmlformats.org/drawingml/2006/table">
+            <a:tbl>
+              <a:tblPr firstRow="1" bandRow="1">
+                <a:tableStyleId>{5C22544A-7EE6-4342-B048-85BDC9FD1C3A}</a:tableStyleId>
+              </a:tblPr>
+              <a:tblGrid>
+                <a:gridCol w="1449977"/>
+                <a:gridCol w="5316582"/>
+              </a:tblGrid>
+              <a:tr h="466344">
+                <a:tc>
+                  <a:txBody>
+                    <a:bodyPr wrap="square"/>
+                    <a:lstStyle/>
+                    <a:p>
+                      <a:pPr algn="l">
+                        <a:spcAft>
+                          <a:spcPts val="0"/>
+                        </a:spcAft>
+                      </a:pPr>
+                      <a:r>
+                        <a:rPr sz="1050" b="1" i="0">
+                          <a:solidFill>
+                            <a:srgbClr val="FFFFFF"/>
+                          </a:solidFill>
+                          <a:latin typeface="Yu Gothic"/>
+                          <a:ea typeface="Yu Gothic"/>
+                          <a:cs typeface="Yu Gothic"/>
+                        </a:rPr>
+                        <a:t>時間</a:t>
+                      </a:r>
+                    </a:p>
+                  </a:txBody>
+                  <a:tcPr marL="54864" marR="54864" marT="18288" marB="18288" anchor="ctr">
+                    <a:solidFill>
+                      <a:srgbClr val="3A106E"/>
+                    </a:solidFill>
+                  </a:tcPr>
+                </a:tc>
+                <a:tc>
+                  <a:txBody>
+                    <a:bodyPr wrap="square"/>
+                    <a:lstStyle/>
+                    <a:p>
+                      <a:pPr algn="l">
+                        <a:spcAft>
+                          <a:spcPts val="0"/>
+                        </a:spcAft>
+                      </a:pPr>
+                      <a:r>
+                        <a:rPr sz="1050" b="1" i="0">
+                          <a:solidFill>
+                            <a:srgbClr val="FFFFFF"/>
+                          </a:solidFill>
+                          <a:latin typeface="Yu Gothic"/>
+                          <a:ea typeface="Yu Gothic"/>
+                          <a:cs typeface="Yu Gothic"/>
+                        </a:rPr>
+                        <a:t>内容</a:t>
+                      </a:r>
+                    </a:p>
+                  </a:txBody>
+                  <a:tcPr marL="54864" marR="54864" marT="18288" marB="18288" anchor="ctr">
+                    <a:solidFill>
+                      <a:srgbClr val="3A106E"/>
+                    </a:solidFill>
+                  </a:tcPr>
+                </a:tc>
+              </a:tr>
+              <a:tr h="466344">
+                <a:tc>
+                  <a:txBody>
+                    <a:bodyPr wrap="square"/>
+                    <a:lstStyle/>
+                    <a:p>
+                      <a:pPr algn="l">
+                        <a:spcAft>
+                          <a:spcPts val="100"/>
+                        </a:spcAft>
+                      </a:pPr>
+                      <a:r>
+                        <a:rPr sz="1000" b="1" i="0">
+                          <a:solidFill>
+                            <a:srgbClr val="3A106E"/>
+                          </a:solidFill>
+                          <a:latin typeface="Yu Gothic"/>
+                          <a:ea typeface="Yu Gothic"/>
+                          <a:cs typeface="Yu Gothic"/>
+                        </a:rPr>
+                        <a:t>0–5分</a:t>
+                      </a:r>
+                    </a:p>
+                  </a:txBody>
+                  <a:tcPr marL="54864" marR="54864" marT="18288" marB="18288" anchor="ctr">
+                    <a:solidFill>
+                      <a:srgbClr val="FFFFFF"/>
+                    </a:solidFill>
+                  </a:tcPr>
+                </a:tc>
+                <a:tc>
+                  <a:txBody>
+                    <a:bodyPr wrap="square"/>
+                    <a:lstStyle/>
+                    <a:p>
+                      <a:pPr algn="l">
+                        <a:spcAft>
+                          <a:spcPts val="100"/>
+                        </a:spcAft>
+                      </a:pPr>
+                      <a:r>
+                        <a:rPr sz="1000" b="0" i="0">
+                          <a:solidFill>
+                            <a:srgbClr val="262630"/>
+                          </a:solidFill>
+                          <a:latin typeface="Yu Gothic"/>
+                          <a:ea typeface="Yu Gothic"/>
+                          <a:cs typeface="Yu Gothic"/>
+                        </a:rPr>
+                        <a:t>前回の宿題の確認（できた/できていないを機械的に）</a:t>
+                      </a:r>
+                    </a:p>
+                  </a:txBody>
+                  <a:tcPr marL="54864" marR="54864" marT="18288" marB="18288" anchor="ctr">
+                    <a:solidFill>
+                      <a:srgbClr val="FFFFFF"/>
+                    </a:solidFill>
+                  </a:tcPr>
+                </a:tc>
+              </a:tr>
+              <a:tr h="466344">
+                <a:tc>
+                  <a:txBody>
+                    <a:bodyPr wrap="square"/>
+                    <a:lstStyle/>
+                    <a:p>
+                      <a:pPr algn="l">
+                        <a:spcAft>
+                          <a:spcPts val="100"/>
+                        </a:spcAft>
+                      </a:pPr>
+                      <a:r>
+                        <a:rPr sz="1000" b="1" i="0">
+                          <a:solidFill>
+                            <a:srgbClr val="3A106E"/>
+                          </a:solidFill>
+                          <a:latin typeface="Yu Gothic"/>
+                          <a:ea typeface="Yu Gothic"/>
+                          <a:cs typeface="Yu Gothic"/>
+                        </a:rPr>
+                        <a:t>5–20分</a:t>
+                      </a:r>
+                    </a:p>
+                  </a:txBody>
+                  <a:tcPr marL="54864" marR="54864" marT="18288" marB="18288" anchor="ctr">
+                    <a:solidFill>
+                      <a:srgbClr val="F7F7F9"/>
+                    </a:solidFill>
+                  </a:tcPr>
+                </a:tc>
+                <a:tc>
+                  <a:txBody>
+                    <a:bodyPr wrap="square"/>
+                    <a:lstStyle/>
+                    <a:p>
+                      <a:pPr algn="l">
+                        <a:spcAft>
+                          <a:spcPts val="100"/>
+                        </a:spcAft>
+                      </a:pPr>
+                      <a:r>
+                        <a:rPr sz="1000" b="0" i="0">
+                          <a:solidFill>
+                            <a:srgbClr val="262630"/>
+                          </a:solidFill>
+                          <a:latin typeface="Yu Gothic"/>
+                          <a:ea typeface="Yu Gothic"/>
+                          <a:cs typeface="Yu Gothic"/>
+                        </a:rPr>
+                        <a:t>数字の定点（シートから自動で出る数字だけ。資料は作りません）</a:t>
+                      </a:r>
+                    </a:p>
+                  </a:txBody>
+                  <a:tcPr marL="54864" marR="54864" marT="18288" marB="18288" anchor="ctr">
+                    <a:solidFill>
+                      <a:srgbClr val="F7F7F9"/>
+                    </a:solidFill>
+                  </a:tcPr>
+                </a:tc>
+              </a:tr>
+              <a:tr h="466344">
+                <a:tc>
+                  <a:txBody>
+                    <a:bodyPr wrap="square"/>
+                    <a:lstStyle/>
+                    <a:p>
+                      <a:pPr algn="l">
+                        <a:spcAft>
+                          <a:spcPts val="100"/>
+                        </a:spcAft>
+                      </a:pPr>
+                      <a:r>
+                        <a:rPr sz="1000" b="1" i="0">
+                          <a:solidFill>
+                            <a:srgbClr val="3A106E"/>
+                          </a:solidFill>
+                          <a:latin typeface="Yu Gothic"/>
+                          <a:ea typeface="Yu Gothic"/>
+                          <a:cs typeface="Yu Gothic"/>
+                        </a:rPr>
+                        <a:t>20–45分</a:t>
+                      </a:r>
+                    </a:p>
+                  </a:txBody>
+                  <a:tcPr marL="54864" marR="54864" marT="18288" marB="18288" anchor="ctr">
+                    <a:solidFill>
+                      <a:srgbClr val="FFFFFF"/>
+                    </a:solidFill>
+                  </a:tcPr>
+                </a:tc>
+                <a:tc>
+                  <a:txBody>
+                    <a:bodyPr wrap="square"/>
+                    <a:lstStyle/>
+                    <a:p>
+                      <a:pPr algn="l">
+                        <a:spcAft>
+                          <a:spcPts val="100"/>
+                        </a:spcAft>
+                      </a:pPr>
+                      <a:r>
+                        <a:rPr sz="1000" b="0" i="0">
+                          <a:solidFill>
+                            <a:srgbClr val="262630"/>
+                          </a:solidFill>
+                          <a:latin typeface="Yu Gothic"/>
+                          <a:ea typeface="Yu Gothic"/>
+                          <a:cs typeface="Yu Gothic"/>
+                        </a:rPr>
+                        <a:t>本日の論点（1〜2件。「問い→現状→選択肢→決める」の順）</a:t>
+                      </a:r>
+                    </a:p>
+                  </a:txBody>
+                  <a:tcPr marL="54864" marR="54864" marT="18288" marB="18288" anchor="ctr">
+                    <a:solidFill>
+                      <a:srgbClr val="FFFFFF"/>
+                    </a:solidFill>
+                  </a:tcPr>
+                </a:tc>
+              </a:tr>
+              <a:tr h="466344">
+                <a:tc>
+                  <a:txBody>
+                    <a:bodyPr wrap="square"/>
+                    <a:lstStyle/>
+                    <a:p>
+                      <a:pPr algn="l">
+                        <a:spcAft>
+                          <a:spcPts val="100"/>
+                        </a:spcAft>
+                      </a:pPr>
+                      <a:r>
+                        <a:rPr sz="1000" b="1" i="0">
+                          <a:solidFill>
+                            <a:srgbClr val="3A106E"/>
+                          </a:solidFill>
+                          <a:latin typeface="Yu Gothic"/>
+                          <a:ea typeface="Yu Gothic"/>
+                          <a:cs typeface="Yu Gothic"/>
+                        </a:rPr>
+                        <a:t>45–60分</a:t>
+                      </a:r>
+                    </a:p>
+                  </a:txBody>
+                  <a:tcPr marL="54864" marR="54864" marT="18288" marB="18288" anchor="ctr">
+                    <a:solidFill>
+                      <a:srgbClr val="F7F7F9"/>
+                    </a:solidFill>
+                  </a:tcPr>
+                </a:tc>
+                <a:tc>
+                  <a:txBody>
+                    <a:bodyPr wrap="square"/>
+                    <a:lstStyle/>
+                    <a:p>
+                      <a:pPr algn="l">
+                        <a:spcAft>
+                          <a:spcPts val="100"/>
+                        </a:spcAft>
+                      </a:pPr>
+                      <a:r>
+                        <a:rPr sz="1000" b="0" i="0">
+                          <a:solidFill>
+                            <a:srgbClr val="262630"/>
+                          </a:solidFill>
+                          <a:latin typeface="Yu Gothic"/>
+                          <a:ea typeface="Yu Gothic"/>
+                          <a:cs typeface="Yu Gothic"/>
+                        </a:rPr>
+                        <a:t>実行の振り返りと支援の相談（停滞していることの助け合い）</a:t>
+                      </a:r>
+                    </a:p>
+                  </a:txBody>
+                  <a:tcPr marL="54864" marR="54864" marT="18288" marB="18288" anchor="ctr">
+                    <a:solidFill>
+                      <a:srgbClr val="F7F7F9"/>
+                    </a:solidFill>
+                  </a:tcPr>
+                </a:tc>
+              </a:tr>
+              <a:tr h="466344">
+                <a:tc>
+                  <a:txBody>
+                    <a:bodyPr wrap="square"/>
+                    <a:lstStyle/>
+                    <a:p>
+                      <a:pPr algn="l">
+                        <a:spcAft>
+                          <a:spcPts val="100"/>
+                        </a:spcAft>
+                      </a:pPr>
+                      <a:r>
+                        <a:rPr sz="1000" b="1" i="0">
+                          <a:solidFill>
+                            <a:srgbClr val="3A106E"/>
+                          </a:solidFill>
+                          <a:latin typeface="Yu Gothic"/>
+                          <a:ea typeface="Yu Gothic"/>
+                          <a:cs typeface="Yu Gothic"/>
+                        </a:rPr>
+                        <a:t>60–70分</a:t>
+                      </a:r>
+                    </a:p>
+                  </a:txBody>
+                  <a:tcPr marL="54864" marR="54864" marT="18288" marB="18288" anchor="ctr">
+                    <a:solidFill>
+                      <a:srgbClr val="FFFFFF"/>
+                    </a:solidFill>
+                  </a:tcPr>
+                </a:tc>
+                <a:tc>
+                  <a:txBody>
+                    <a:bodyPr wrap="square"/>
+                    <a:lstStyle/>
+                    <a:p>
+                      <a:pPr algn="l">
+                        <a:spcAft>
+                          <a:spcPts val="100"/>
+                        </a:spcAft>
+                      </a:pPr>
+                      <a:r>
+                        <a:rPr sz="1000" b="0" i="0">
+                          <a:solidFill>
+                            <a:srgbClr val="262630"/>
+                          </a:solidFill>
+                          <a:latin typeface="Yu Gothic"/>
+                          <a:ea typeface="Yu Gothic"/>
+                          <a:cs typeface="Yu Gothic"/>
+                        </a:rPr>
+                        <a:t>決めたことの確認と、上に上げる論点の確定</a:t>
+                      </a:r>
+                    </a:p>
+                  </a:txBody>
+                  <a:tcPr marL="54864" marR="54864" marT="18288" marB="18288" anchor="ctr">
+                    <a:solidFill>
+                      <a:srgbClr val="FFFFFF"/>
+                    </a:solidFill>
+                  </a:tcPr>
+                </a:tc>
+              </a:tr>
+              <a:tr h="466344">
+                <a:tc>
+                  <a:txBody>
+                    <a:bodyPr wrap="square"/>
+                    <a:lstStyle/>
+                    <a:p>
+                      <a:pPr algn="l">
+                        <a:spcAft>
+                          <a:spcPts val="100"/>
+                        </a:spcAft>
+                      </a:pPr>
+                      <a:r>
+                        <a:rPr sz="1000" b="1" i="0">
+                          <a:solidFill>
+                            <a:srgbClr val="3A106E"/>
+                          </a:solidFill>
+                          <a:latin typeface="Yu Gothic"/>
+                          <a:ea typeface="Yu Gothic"/>
+                          <a:cs typeface="Yu Gothic"/>
+                        </a:rPr>
+                        <a:t>70–75分</a:t>
+                      </a:r>
+                    </a:p>
+                  </a:txBody>
+                  <a:tcPr marL="54864" marR="54864" marT="18288" marB="18288" anchor="ctr">
+                    <a:solidFill>
+                      <a:srgbClr val="F7F7F9"/>
+                    </a:solidFill>
+                  </a:tcPr>
+                </a:tc>
+                <a:tc>
+                  <a:txBody>
+                    <a:bodyPr wrap="square"/>
+                    <a:lstStyle/>
+                    <a:p>
+                      <a:pPr algn="l">
+                        <a:spcAft>
+                          <a:spcPts val="100"/>
+                        </a:spcAft>
+                      </a:pPr>
+                      <a:r>
+                        <a:rPr sz="1000" b="0" i="0">
+                          <a:solidFill>
+                            <a:srgbClr val="262630"/>
+                          </a:solidFill>
+                          <a:latin typeface="Yu Gothic"/>
+                          <a:ea typeface="Yu Gothic"/>
+                          <a:cs typeface="Yu Gothic"/>
+                        </a:rPr>
+                        <a:t>宿題の読み上げ（誰が・何を・いつまでに）</a:t>
+                      </a:r>
+                    </a:p>
+                  </a:txBody>
+                  <a:tcPr marL="54864" marR="54864" marT="18288" marB="18288" anchor="ctr">
+                    <a:solidFill>
+                      <a:srgbClr val="F7F7F9"/>
+                    </a:solidFill>
+                  </a:tcPr>
+                </a:tc>
+              </a:tr>
+            </a:tbl>
+          </a:graphicData>
+        </a:graphic>
+      </p:graphicFrame>
+      <p:sp>
+        <p:nvSpPr>
+          <p:cNvPr id="7" name="TextBox 6"/>
+          <p:cNvSpPr txBox="1"/>
+          <p:nvPr/>
+        </p:nvSpPr>
+        <p:spPr>
+          <a:xfrm>
+            <a:off x="7498079" y="1847088"/>
+            <a:ext cx="4187952" cy="274320"/>
+          </a:xfrm>
+          <a:prstGeom prst="rect">
+            <a:avLst/>
+          </a:prstGeom>
+          <a:noFill/>
+        </p:spPr>
+        <p:txBody>
+          <a:bodyPr wrap="square" lIns="0" rIns="0" tIns="0" bIns="0">
+            <a:spAutoFit/>
+          </a:bodyPr>
+          <a:lstStyle/>
+          <a:p>
+            <a:pPr algn="l">
+              <a:spcAft>
+                <a:spcPts val="0"/>
+              </a:spcAft>
+            </a:pPr>
+            <a:r>
+              <a:rPr sz="1200" b="1" i="0">
+                <a:solidFill>
+                  <a:srgbClr val="3A106E"/>
+                </a:solidFill>
+                <a:latin typeface="Yu Gothic"/>
+                <a:ea typeface="Yu Gothic"/>
+                <a:cs typeface="Yu Gothic"/>
+              </a:rPr>
+              <a:t>時期によって議題が変わります</a:t>
+            </a:r>
+          </a:p>
+        </p:txBody>
+      </p:sp>
+      <p:sp>
+        <p:nvSpPr>
+          <p:cNvPr id="8" name="Rectangle 7"/>
           <p:cNvSpPr/>
           <p:nvPr/>
         </p:nvSpPr>
         <p:spPr>
           <a:xfrm>
-            <a:off x="502920" y="2011680"/>
-            <a:ext cx="11183112" cy="1170432"/>
+            <a:off x="7498079" y="2231136"/>
+            <a:ext cx="4187952" cy="1005840"/>
           </a:xfrm>
           <a:prstGeom prst="rect">
             <a:avLst/>
@@ -14253,14 +16725,14 @@
       </p:sp>
       <p:sp>
         <p:nvSpPr>
-          <p:cNvPr id="6" name="Rectangle 5"/>
+          <p:cNvPr id="9" name="Rectangle 8"/>
           <p:cNvSpPr/>
           <p:nvPr/>
         </p:nvSpPr>
         <p:spPr>
           <a:xfrm>
-            <a:off x="502920" y="2011680"/>
-            <a:ext cx="64008" cy="1170432"/>
+            <a:off x="7498079" y="2231136"/>
+            <a:ext cx="64008" cy="1005840"/>
           </a:xfrm>
           <a:prstGeom prst="rect">
             <a:avLst/>
@@ -14297,73 +16769,14 @@
       </p:sp>
       <p:sp>
         <p:nvSpPr>
-          <p:cNvPr id="7" name="Oval 6"/>
-          <p:cNvSpPr/>
-          <p:nvPr/>
-        </p:nvSpPr>
-        <p:spPr>
-          <a:xfrm>
-            <a:off x="722376" y="2368296"/>
-            <a:ext cx="457200" cy="457200"/>
-          </a:xfrm>
-          <a:prstGeom prst="ellipse">
-            <a:avLst/>
-          </a:prstGeom>
-          <a:solidFill>
-            <a:srgbClr val="7823DC"/>
-          </a:solidFill>
-          <a:ln>
-            <a:noFill/>
-          </a:ln>
-          <a:effectLst/>
-        </p:spPr>
-        <p:style>
-          <a:lnRef idx="1">
-            <a:schemeClr val="accent1"/>
-          </a:lnRef>
-          <a:fillRef idx="3">
-            <a:schemeClr val="accent1"/>
-          </a:fillRef>
-          <a:effectRef idx="2">
-            <a:schemeClr val="accent1"/>
-          </a:effectRef>
-          <a:fontRef idx="minor">
-            <a:schemeClr val="lt1"/>
-          </a:fontRef>
-        </p:style>
-        <p:txBody>
-          <a:bodyPr rtlCol="0" anchor="ctr" wrap="none" lIns="0" rIns="0" tIns="0" bIns="0"/>
-          <a:lstStyle/>
-          <a:p>
-            <a:pPr algn="ctr">
-              <a:spcAft>
-                <a:spcPts val="0"/>
-              </a:spcAft>
-            </a:pPr>
-            <a:r>
-              <a:rPr sz="1800" b="1" i="0">
-                <a:solidFill>
-                  <a:srgbClr val="FFFFFF"/>
-                </a:solidFill>
-                <a:latin typeface="Yu Gothic"/>
-                <a:ea typeface="Yu Gothic"/>
-                <a:cs typeface="Yu Gothic"/>
-              </a:rPr>
-              <a:t>1</a:t>
-            </a:r>
-          </a:p>
-        </p:txBody>
-      </p:sp>
-      <p:sp>
-        <p:nvSpPr>
-          <p:cNvPr id="8" name="TextBox 7"/>
+          <p:cNvPr id="10" name="TextBox 9"/>
           <p:cNvSpPr txBox="1"/>
           <p:nvPr/>
         </p:nvSpPr>
         <p:spPr>
           <a:xfrm>
-            <a:off x="1380744" y="2139696"/>
-            <a:ext cx="10104120" cy="950976"/>
+            <a:off x="7754111" y="2359152"/>
+            <a:ext cx="3730752" cy="768096"/>
           </a:xfrm>
           <a:prstGeom prst="rect">
             <a:avLst/>
@@ -14384,13 +16797,13 @@
             <a:r>
               <a:rPr sz="1300" b="1" i="0">
                 <a:solidFill>
-                  <a:srgbClr val="3A106E"/>
+                  <a:srgbClr val="7823DC"/>
                 </a:solidFill>
                 <a:latin typeface="Yu Gothic"/>
                 <a:ea typeface="Yu Gothic"/>
                 <a:cs typeface="Yu Gothic"/>
               </a:rPr>
-              <a:t>37件すべてに回答済み（設計に7点を反映）</a:t>
+              <a:t>最初の30日</a:t>
             </a:r>
           </a:p>
           <a:p>
@@ -14400,7 +16813,7 @@
               </a:spcAft>
             </a:pPr>
             <a:r>
-              <a:rPr sz="1050" b="0" i="0">
+              <a:rPr sz="1100" b="1" i="0">
                 <a:solidFill>
                   <a:srgbClr val="262630"/>
                 </a:solidFill>
@@ -14408,21 +16821,21 @@
                 <a:ea typeface="Yu Gothic"/>
                 <a:cs typeface="Yu Gothic"/>
               </a:rPr>
-              <a:t>いただいた声を、その場で終わらせず、改革の設計に取り込みました</a:t>
-            </a:r>
-          </a:p>
-        </p:txBody>
-      </p:sp>
-      <p:sp>
-        <p:nvSpPr>
-          <p:cNvPr id="9" name="Rectangle 8"/>
+              <a:t>棚卸しの完成（担当・事実の確認）</a:t>
+            </a:r>
+          </a:p>
+        </p:txBody>
+      </p:sp>
+      <p:sp>
+        <p:nvSpPr>
+          <p:cNvPr id="11" name="Rectangle 10"/>
           <p:cNvSpPr/>
           <p:nvPr/>
         </p:nvSpPr>
         <p:spPr>
           <a:xfrm>
-            <a:off x="502920" y="3383280"/>
-            <a:ext cx="11183112" cy="1170432"/>
+            <a:off x="7498079" y="3383280"/>
+            <a:ext cx="4187952" cy="1005840"/>
           </a:xfrm>
           <a:prstGeom prst="rect">
             <a:avLst/>
@@ -14461,14 +16874,14 @@
       </p:sp>
       <p:sp>
         <p:nvSpPr>
-          <p:cNvPr id="10" name="Rectangle 9"/>
+          <p:cNvPr id="12" name="Rectangle 11"/>
           <p:cNvSpPr/>
           <p:nvPr/>
         </p:nvSpPr>
         <p:spPr>
           <a:xfrm>
-            <a:off x="502920" y="3383280"/>
-            <a:ext cx="64008" cy="1170432"/>
+            <a:off x="7498079" y="3383280"/>
+            <a:ext cx="64008" cy="1005840"/>
           </a:xfrm>
           <a:prstGeom prst="rect">
             <a:avLst/>
@@ -14505,73 +16918,14 @@
       </p:sp>
       <p:sp>
         <p:nvSpPr>
-          <p:cNvPr id="11" name="Oval 10"/>
-          <p:cNvSpPr/>
-          <p:nvPr/>
-        </p:nvSpPr>
-        <p:spPr>
-          <a:xfrm>
-            <a:off x="722376" y="3739896"/>
-            <a:ext cx="457200" cy="457200"/>
-          </a:xfrm>
-          <a:prstGeom prst="ellipse">
-            <a:avLst/>
-          </a:prstGeom>
-          <a:solidFill>
-            <a:srgbClr val="7823DC"/>
-          </a:solidFill>
-          <a:ln>
-            <a:noFill/>
-          </a:ln>
-          <a:effectLst/>
-        </p:spPr>
-        <p:style>
-          <a:lnRef idx="1">
-            <a:schemeClr val="accent1"/>
-          </a:lnRef>
-          <a:fillRef idx="3">
-            <a:schemeClr val="accent1"/>
-          </a:fillRef>
-          <a:effectRef idx="2">
-            <a:schemeClr val="accent1"/>
-          </a:effectRef>
-          <a:fontRef idx="minor">
-            <a:schemeClr val="lt1"/>
-          </a:fontRef>
-        </p:style>
-        <p:txBody>
-          <a:bodyPr rtlCol="0" anchor="ctr" wrap="none" lIns="0" rIns="0" tIns="0" bIns="0"/>
-          <a:lstStyle/>
-          <a:p>
-            <a:pPr algn="ctr">
-              <a:spcAft>
-                <a:spcPts val="0"/>
-              </a:spcAft>
-            </a:pPr>
-            <a:r>
-              <a:rPr sz="1800" b="1" i="0">
-                <a:solidFill>
-                  <a:srgbClr val="FFFFFF"/>
-                </a:solidFill>
-                <a:latin typeface="Yu Gothic"/>
-                <a:ea typeface="Yu Gothic"/>
-                <a:cs typeface="Yu Gothic"/>
-              </a:rPr>
-              <a:t>2</a:t>
-            </a:r>
-          </a:p>
-        </p:txBody>
-      </p:sp>
-      <p:sp>
-        <p:nvSpPr>
-          <p:cNvPr id="12" name="TextBox 11"/>
+          <p:cNvPr id="13" name="TextBox 12"/>
           <p:cNvSpPr txBox="1"/>
           <p:nvPr/>
         </p:nvSpPr>
         <p:spPr>
           <a:xfrm>
-            <a:off x="1380744" y="3511296"/>
-            <a:ext cx="10104120" cy="950976"/>
+            <a:off x="7754111" y="3511296"/>
+            <a:ext cx="3730752" cy="768096"/>
           </a:xfrm>
           <a:prstGeom prst="rect">
             <a:avLst/>
@@ -14592,13 +16946,13 @@
             <a:r>
               <a:rPr sz="1300" b="1" i="0">
                 <a:solidFill>
-                  <a:srgbClr val="3A106E"/>
+                  <a:srgbClr val="7823DC"/>
                 </a:solidFill>
                 <a:latin typeface="Yu Gothic"/>
                 <a:ea typeface="Yu Gothic"/>
                 <a:cs typeface="Yu Gothic"/>
               </a:rPr>
-              <a:t>回答は、方針と論点の位置づけまで</a:t>
+              <a:t>30〜60日</a:t>
             </a:r>
           </a:p>
           <a:p>
@@ -14608,7 +16962,7 @@
               </a:spcAft>
             </a:pPr>
             <a:r>
-              <a:rPr sz="1050" b="0" i="0">
+              <a:rPr sz="1100" b="1" i="0">
                 <a:solidFill>
                   <a:srgbClr val="262630"/>
                 </a:solidFill>
@@ -14616,21 +16970,21 @@
                 <a:ea typeface="Yu Gothic"/>
                 <a:cs typeface="Yu Gothic"/>
               </a:rPr>
-              <a:t>「策はまだ決めていない」段階のため。具体策は分科会で一緒に設計します</a:t>
-            </a:r>
-          </a:p>
-        </p:txBody>
-      </p:sp>
-      <p:sp>
-        <p:nvSpPr>
-          <p:cNvPr id="13" name="Rectangle 12"/>
+              <a:t>採点とランクの目線合わせ、ルールの設計</a:t>
+            </a:r>
+          </a:p>
+        </p:txBody>
+      </p:sp>
+      <p:sp>
+        <p:nvSpPr>
+          <p:cNvPr id="14" name="Rectangle 13"/>
           <p:cNvSpPr/>
           <p:nvPr/>
         </p:nvSpPr>
         <p:spPr>
           <a:xfrm>
-            <a:off x="502920" y="4754880"/>
-            <a:ext cx="11183112" cy="1170432"/>
+            <a:off x="7498079" y="4535424"/>
+            <a:ext cx="4187952" cy="1005840"/>
           </a:xfrm>
           <a:prstGeom prst="rect">
             <a:avLst/>
@@ -14669,20 +17023,20 @@
       </p:sp>
       <p:sp>
         <p:nvSpPr>
-          <p:cNvPr id="14" name="Rectangle 13"/>
+          <p:cNvPr id="15" name="Rectangle 14"/>
           <p:cNvSpPr/>
           <p:nvPr/>
         </p:nvSpPr>
         <p:spPr>
           <a:xfrm>
-            <a:off x="502920" y="4754880"/>
-            <a:ext cx="64008" cy="1170432"/>
+            <a:off x="7498079" y="4535424"/>
+            <a:ext cx="64008" cy="1005840"/>
           </a:xfrm>
           <a:prstGeom prst="rect">
             <a:avLst/>
           </a:prstGeom>
           <a:solidFill>
-            <a:srgbClr val="7823DC"/>
+            <a:srgbClr val="3A106E"/>
           </a:solidFill>
           <a:ln>
             <a:noFill/>
@@ -14713,20 +17067,79 @@
       </p:sp>
       <p:sp>
         <p:nvSpPr>
-          <p:cNvPr id="15" name="Oval 14"/>
+          <p:cNvPr id="16" name="TextBox 15"/>
+          <p:cNvSpPr txBox="1"/>
+          <p:nvPr/>
+        </p:nvSpPr>
+        <p:spPr>
+          <a:xfrm>
+            <a:off x="7754111" y="4663440"/>
+            <a:ext cx="3730752" cy="768096"/>
+          </a:xfrm>
+          <a:prstGeom prst="rect">
+            <a:avLst/>
+          </a:prstGeom>
+          <a:noFill/>
+        </p:spPr>
+        <p:txBody>
+          <a:bodyPr wrap="square" lIns="0" rIns="0" tIns="0" bIns="0" anchor="ctr">
+            <a:spAutoFit/>
+          </a:bodyPr>
+          <a:lstStyle/>
+          <a:p>
+            <a:pPr algn="l">
+              <a:spcAft>
+                <a:spcPts val="400"/>
+              </a:spcAft>
+            </a:pPr>
+            <a:r>
+              <a:rPr sz="1300" b="1" i="0">
+                <a:solidFill>
+                  <a:srgbClr val="3A106E"/>
+                </a:solidFill>
+                <a:latin typeface="Yu Gothic"/>
+                <a:ea typeface="Yu Gothic"/>
+                <a:cs typeface="Yu Gothic"/>
+              </a:rPr>
+              <a:t>60〜90日</a:t>
+            </a:r>
+          </a:p>
+          <a:p>
+            <a:pPr algn="l">
+              <a:spcAft>
+                <a:spcPts val="0"/>
+              </a:spcAft>
+            </a:pPr>
+            <a:r>
+              <a:rPr sz="1100" b="1" i="0">
+                <a:solidFill>
+                  <a:srgbClr val="262630"/>
+                </a:solidFill>
+                <a:latin typeface="Yu Gothic"/>
+                <a:ea typeface="Yu Gothic"/>
+                <a:cs typeface="Yu Gothic"/>
+              </a:rPr>
+              <a:t>力の入れ直しの実行と振り返り</a:t>
+            </a:r>
+          </a:p>
+        </p:txBody>
+      </p:sp>
+      <p:sp>
+        <p:nvSpPr>
+          <p:cNvPr id="17" name="Rectangle 16"/>
           <p:cNvSpPr/>
           <p:nvPr/>
         </p:nvSpPr>
         <p:spPr>
           <a:xfrm>
-            <a:off x="722376" y="5111496"/>
-            <a:ext cx="457200" cy="457200"/>
-          </a:xfrm>
-          <a:prstGeom prst="ellipse">
+            <a:off x="502920" y="5760720"/>
+            <a:ext cx="11183112" cy="603504"/>
+          </a:xfrm>
+          <a:prstGeom prst="rect">
             <a:avLst/>
           </a:prstGeom>
           <a:solidFill>
-            <a:srgbClr val="7823DC"/>
+            <a:srgbClr val="F3EFFB"/>
           </a:solidFill>
           <a:ln>
             <a:noFill/>
@@ -14748,38 +17161,67 @@
           </a:fontRef>
         </p:style>
         <p:txBody>
-          <a:bodyPr rtlCol="0" anchor="ctr" wrap="none" lIns="0" rIns="0" tIns="0" bIns="0"/>
-          <a:lstStyle/>
-          <a:p>
-            <a:pPr algn="ctr">
-              <a:spcAft>
-                <a:spcPts val="0"/>
-              </a:spcAft>
-            </a:pPr>
-            <a:r>
-              <a:rPr sz="1800" b="1" i="0">
-                <a:solidFill>
-                  <a:srgbClr val="FFFFFF"/>
-                </a:solidFill>
-                <a:latin typeface="Yu Gothic"/>
-                <a:ea typeface="Yu Gothic"/>
-                <a:cs typeface="Yu Gothic"/>
-              </a:rPr>
-              <a:t>3</a:t>
-            </a:r>
-          </a:p>
-        </p:txBody>
-      </p:sp>
-      <p:sp>
-        <p:nvSpPr>
-          <p:cNvPr id="16" name="TextBox 15"/>
+          <a:bodyPr rtlCol="0" anchor="ctr"/>
+          <a:lstStyle/>
+          <a:p>
+            <a:pPr algn="ctr"/>
+          </a:p>
+        </p:txBody>
+      </p:sp>
+      <p:sp>
+        <p:nvSpPr>
+          <p:cNvPr id="18" name="Rectangle 17"/>
+          <p:cNvSpPr/>
+          <p:nvPr/>
+        </p:nvSpPr>
+        <p:spPr>
+          <a:xfrm>
+            <a:off x="502920" y="5760720"/>
+            <a:ext cx="38100" cy="603504"/>
+          </a:xfrm>
+          <a:prstGeom prst="rect">
+            <a:avLst/>
+          </a:prstGeom>
+          <a:solidFill>
+            <a:srgbClr val="3A106E"/>
+          </a:solidFill>
+          <a:ln>
+            <a:noFill/>
+          </a:ln>
+          <a:effectLst/>
+        </p:spPr>
+        <p:style>
+          <a:lnRef idx="1">
+            <a:schemeClr val="accent1"/>
+          </a:lnRef>
+          <a:fillRef idx="3">
+            <a:schemeClr val="accent1"/>
+          </a:fillRef>
+          <a:effectRef idx="2">
+            <a:schemeClr val="accent1"/>
+          </a:effectRef>
+          <a:fontRef idx="minor">
+            <a:schemeClr val="lt1"/>
+          </a:fontRef>
+        </p:style>
+        <p:txBody>
+          <a:bodyPr rtlCol="0" anchor="ctr"/>
+          <a:lstStyle/>
+          <a:p>
+            <a:pPr algn="ctr"/>
+          </a:p>
+        </p:txBody>
+      </p:sp>
+      <p:sp>
+        <p:nvSpPr>
+          <p:cNvPr id="19" name="TextBox 18"/>
           <p:cNvSpPr txBox="1"/>
           <p:nvPr/>
         </p:nvSpPr>
         <p:spPr>
           <a:xfrm>
-            <a:off x="1380744" y="4882896"/>
-            <a:ext cx="10104120" cy="950976"/>
+            <a:off x="713232" y="5815584"/>
+            <a:ext cx="10835640" cy="493776"/>
           </a:xfrm>
           <a:prstGeom prst="rect">
             <a:avLst/>
@@ -14791,24 +17233,6 @@
             <a:spAutoFit/>
           </a:bodyPr>
           <a:lstStyle/>
-          <a:p>
-            <a:pPr algn="l">
-              <a:spcAft>
-                <a:spcPts val="400"/>
-              </a:spcAft>
-            </a:pPr>
-            <a:r>
-              <a:rPr sz="1300" b="1" i="0">
-                <a:solidFill>
-                  <a:srgbClr val="3A106E"/>
-                </a:solidFill>
-                <a:latin typeface="Yu Gothic"/>
-                <a:ea typeface="Yu Gothic"/>
-                <a:cs typeface="Yu Gothic"/>
-              </a:rPr>
-              <a:t>未回答の部門（海外・監修・法務）には個別にお話を伺います</a:t>
-            </a:r>
-          </a:p>
           <a:p>
             <a:pPr algn="l">
               <a:spcAft>
@@ -14816,22 +17240,33 @@
               </a:spcAft>
             </a:pPr>
             <a:r>
-              <a:rPr sz="1050" b="0" i="0">
-                <a:solidFill>
-                  <a:srgbClr val="262630"/>
+              <a:rPr sz="1000" b="1" i="0">
+                <a:solidFill>
+                  <a:srgbClr val="3A106E"/>
                 </a:solidFill>
                 <a:latin typeface="Yu Gothic"/>
                 <a:ea typeface="Yu Gothic"/>
                 <a:cs typeface="Yu Gothic"/>
               </a:rPr>
-              <a:t>沈黙を合意とみなしません。こちらから出向いてお聞きします</a:t>
-            </a:r>
-          </a:p>
-        </p:txBody>
-      </p:sp>
-      <p:sp>
-        <p:nvSpPr>
-          <p:cNvPr id="17" name="Rectangle 16"/>
+              <a:t>約束事： </a:t>
+            </a:r>
+            <a:r>
+              <a:rPr sz="1000" b="0" i="0">
+                <a:solidFill>
+                  <a:srgbClr val="262630"/>
+                </a:solidFill>
+                <a:latin typeface="Yu Gothic"/>
+                <a:ea typeface="Yu Gothic"/>
+                <a:cs typeface="Yu Gothic"/>
+              </a:rPr>
+              <a:t>資料の作り込み禁止（Word1枚まで）／個別案件の深掘りは5分で切って担当と部長へ／全部「共有」で終わった回は赤信号</a:t>
+            </a:r>
+          </a:p>
+        </p:txBody>
+      </p:sp>
+      <p:sp>
+        <p:nvSpPr>
+          <p:cNvPr id="20" name="Rectangle 19"/>
           <p:cNvSpPr/>
           <p:nvPr/>
         </p:nvSpPr>
@@ -14875,7 +17310,7 @@
       </p:sp>
       <p:sp>
         <p:nvSpPr>
-          <p:cNvPr id="18" name="TextBox 17"/>
+          <p:cNvPr id="21" name="TextBox 20"/>
           <p:cNvSpPr txBox="1"/>
           <p:nvPr/>
         </p:nvSpPr>
@@ -14916,7 +17351,7 @@
       </p:sp>
       <p:sp>
         <p:nvSpPr>
-          <p:cNvPr id="19" name="TextBox 18"/>
+          <p:cNvPr id="22" name="TextBox 21"/>
           <p:cNvSpPr txBox="1"/>
           <p:nvPr/>
         </p:nvSpPr>

--- a/docs/営業改革_部長会進捗共有_20260714.pptx
+++ b/docs/営業改革_部長会進捗共有_20260714.pptx
@@ -11669,7 +11669,7 @@
                 <a:ea typeface="Yu Gothic"/>
                 <a:cs typeface="Yu Gothic"/>
               </a:rPr>
-              <a:t>相談中の2枠が確定するまで、日程調整などの最小限は新谷・坪井でカバーします。人選はご相談させてください</a:t>
+              <a:t>相談中の2枠が確定するまで、日程調整などの最小限は新谷・坪井でカバーします。人選はご相談させてください。本改革は円谷プロ単独ではなく、ホールディングスもコミットする取り組みです（グループ経営企画がSTOを支援）</a:t>
             </a:r>
           </a:p>
         </p:txBody>
@@ -12132,7 +12132,7 @@
                 <a:ea typeface="Yu Gothic"/>
                 <a:cs typeface="Yu Gothic"/>
               </a:rPr>
-              <a:t>坪井による整備。ばらばらだった情報を一つの台帳にまとめました</a:t>
+              <a:t>営業側データが分母。財務データとの突合はこれから</a:t>
             </a:r>
           </a:p>
         </p:txBody>
@@ -13888,13 +13888,13 @@
             <a:r>
               <a:rPr sz="1150" b="1" i="0">
                 <a:solidFill>
-                  <a:srgbClr val="3A106E"/>
+                  <a:srgbClr val="262630"/>
                 </a:solidFill>
                 <a:latin typeface="Yu Gothic"/>
                 <a:ea typeface="Yu Gothic"/>
                 <a:cs typeface="Yu Gothic"/>
               </a:rPr>
-              <a:t>皆さんが既に使っている黒・青・赤の確度管理を、棚卸しの確度定義としてそのまま採用します（新しい分類を覚える必要はありません）</a:t>
+              <a:t>黒・青・赤の枠組みはそのまま活かします。『青とは何か』の定義だけ明文化してから棚卸しに採用します（原案を作成中）</a:t>
             </a:r>
           </a:p>
         </p:txBody>

--- a/docs/営業改革_部長会進捗共有_20260714.pptx
+++ b/docs/営業改革_部長会進捗共有_20260714.pptx
@@ -10742,7 +10742,7 @@
                 <a:ea typeface="Yu Gothic"/>
                 <a:cs typeface="Yu Gothic"/>
               </a:rPr>
-              <a:t>STO体制の現在地 — 2名確定、2枠を相談中</a:t>
+              <a:t>STO体制の現在地 — 全5枠が確定（7/16決定）</a:t>
             </a:r>
           </a:p>
         </p:txBody>
@@ -10801,7 +10801,7 @@
         </p:nvGraphicFramePr>
         <p:xfrm>
           <a:off x="502920" y="1883664"/>
-          <a:ext cx="11183110" cy="3401568"/>
+          <a:ext cx="11183110" cy="3291839"/>
         </p:xfrm>
         <a:graphic>
           <a:graphicData uri="http://schemas.openxmlformats.org/drawingml/2006/table">
@@ -10810,12 +10810,12 @@
                 <a:tableStyleId>{5C22544A-7EE6-4342-B048-85BDC9FD1C3A}</a:tableStyleId>
               </a:tblPr>
               <a:tblGrid>
-                <a:gridCol w="2108291"/>
-                <a:gridCol w="1466637"/>
+                <a:gridCol w="2291621"/>
+                <a:gridCol w="1374972"/>
                 <a:gridCol w="1741632"/>
-                <a:gridCol w="5866550"/>
+                <a:gridCol w="5774885"/>
               </a:tblGrid>
-              <a:tr h="566928">
+              <a:tr h="548639">
                 <a:tc>
                   <a:txBody>
                     <a:bodyPr wrap="square"/>
@@ -10933,7 +10933,7 @@
                   </a:tcPr>
                 </a:tc>
               </a:tr>
-              <a:tr h="566928">
+              <a:tr h="548639">
                 <a:tc>
                   <a:txBody>
                     <a:bodyPr wrap="square"/>
@@ -10945,7 +10945,7 @@
                         </a:spcAft>
                       </a:pPr>
                       <a:r>
-                        <a:rPr sz="1050" b="1" i="0">
+                        <a:rPr sz="1000" b="1" i="0">
                           <a:solidFill>
                             <a:srgbClr val="3A106E"/>
                           </a:solidFill>
@@ -10974,7 +10974,7 @@
                         </a:spcAft>
                       </a:pPr>
                       <a:r>
-                        <a:rPr sz="1050" b="0" i="0">
+                        <a:rPr sz="1000" b="0" i="0">
                           <a:solidFill>
                             <a:srgbClr val="262630"/>
                           </a:solidFill>
@@ -11003,7 +11003,7 @@
                         </a:spcAft>
                       </a:pPr>
                       <a:r>
-                        <a:rPr sz="1050" b="0" i="0">
+                        <a:rPr sz="1000" b="0" i="0">
                           <a:solidFill>
                             <a:srgbClr val="262630"/>
                           </a:solidFill>
@@ -11032,7 +11032,7 @@
                         </a:spcAft>
                       </a:pPr>
                       <a:r>
-                        <a:rPr sz="1050" b="0" i="0">
+                        <a:rPr sz="1000" b="0" i="0">
                           <a:solidFill>
                             <a:srgbClr val="262630"/>
                           </a:solidFill>
@@ -11040,7 +11040,7 @@
                           <a:ea typeface="Yu Gothic"/>
                           <a:cs typeface="Yu Gothic"/>
                         </a:rPr>
-                        <a:t>意思決定・トップ外交・詰まりの解消</a:t>
+                        <a:t>優先順位・重要判断・障害の除去・トップ外交</a:t>
                       </a:r>
                     </a:p>
                   </a:txBody>
@@ -11051,7 +11051,7 @@
                   </a:tcPr>
                 </a:tc>
               </a:tr>
-              <a:tr h="566928">
+              <a:tr h="548639">
                 <a:tc>
                   <a:txBody>
                     <a:bodyPr wrap="square"/>
@@ -11063,7 +11063,7 @@
                         </a:spcAft>
                       </a:pPr>
                       <a:r>
-                        <a:rPr sz="1050" b="1" i="0">
+                        <a:rPr sz="1000" b="1" i="0">
                           <a:solidFill>
                             <a:srgbClr val="3A106E"/>
                           </a:solidFill>
@@ -11071,7 +11071,7 @@
                           <a:ea typeface="Yu Gothic"/>
                           <a:cs typeface="Yu Gothic"/>
                         </a:rPr>
-                        <a:t>STOリード</a:t>
+                        <a:t>変革設計リード</a:t>
                       </a:r>
                     </a:p>
                   </a:txBody>
@@ -11092,7 +11092,7 @@
                         </a:spcAft>
                       </a:pPr>
                       <a:r>
-                        <a:rPr sz="1050" b="0" i="0">
+                        <a:rPr sz="1000" b="0" i="0">
                           <a:solidFill>
                             <a:srgbClr val="262630"/>
                           </a:solidFill>
@@ -11100,7 +11100,7 @@
                           <a:ea typeface="Yu Gothic"/>
                           <a:cs typeface="Yu Gothic"/>
                         </a:rPr>
-                        <a:t>坪井</a:t>
+                        <a:t>小澤</a:t>
                       </a:r>
                     </a:p>
                   </a:txBody>
@@ -11121,7 +11121,7 @@
                         </a:spcAft>
                       </a:pPr>
                       <a:r>
-                        <a:rPr sz="1050" b="0" i="0">
+                        <a:rPr sz="1000" b="0" i="0">
                           <a:solidFill>
                             <a:srgbClr val="262630"/>
                           </a:solidFill>
@@ -11150,7 +11150,7 @@
                         </a:spcAft>
                       </a:pPr>
                       <a:r>
-                        <a:rPr sz="1050" b="0" i="0">
+                        <a:rPr sz="1000" b="0" i="0">
                           <a:solidFill>
                             <a:srgbClr val="262630"/>
                           </a:solidFill>
@@ -11158,7 +11158,7 @@
                           <a:ea typeface="Yu Gothic"/>
                           <a:cs typeface="Yu Gothic"/>
                         </a:rPr>
-                        <a:t>データ基盤の総責任者（棚卸し・スコアリング・KPI）</a:t>
+                        <a:t>改革の中身：課題設計・プロセス再設計・意思決定書・パイロット・標準化</a:t>
                       </a:r>
                     </a:p>
                   </a:txBody>
@@ -11169,7 +11169,7 @@
                   </a:tcPr>
                 </a:tc>
               </a:tr>
-              <a:tr h="566928">
+              <a:tr h="548639">
                 <a:tc>
                   <a:txBody>
                     <a:bodyPr wrap="square"/>
@@ -11181,7 +11181,7 @@
                         </a:spcAft>
                       </a:pPr>
                       <a:r>
-                        <a:rPr sz="1050" b="1" i="0">
+                        <a:rPr sz="1000" b="1" i="0">
                           <a:solidFill>
                             <a:srgbClr val="3A106E"/>
                           </a:solidFill>
@@ -11189,7 +11189,7 @@
                           <a:ea typeface="Yu Gothic"/>
                           <a:cs typeface="Yu Gothic"/>
                         </a:rPr>
-                        <a:t>戦略サポート</a:t>
+                        <a:t>実行統制・データリード</a:t>
                       </a:r>
                     </a:p>
                   </a:txBody>
@@ -11210,7 +11210,7 @@
                         </a:spcAft>
                       </a:pPr>
                       <a:r>
-                        <a:rPr sz="1050" b="0" i="0">
+                        <a:rPr sz="1000" b="0" i="0">
                           <a:solidFill>
                             <a:srgbClr val="262630"/>
                           </a:solidFill>
@@ -11218,25 +11218,7 @@
                           <a:ea typeface="Yu Gothic"/>
                           <a:cs typeface="Yu Gothic"/>
                         </a:rPr>
-                        <a:t>大塩</a:t>
-                      </a:r>
-                    </a:p>
-                    <a:p>
-                      <a:pPr algn="l">
-                        <a:spcAft>
-                          <a:spcPts val="100"/>
-                        </a:spcAft>
-                      </a:pPr>
-                      <a:r>
-                        <a:rPr sz="1050" b="0" i="0">
-                          <a:solidFill>
-                            <a:srgbClr val="262630"/>
-                          </a:solidFill>
-                          <a:latin typeface="Yu Gothic"/>
-                          <a:ea typeface="Yu Gothic"/>
-                          <a:cs typeface="Yu Gothic"/>
-                        </a:rPr>
-                        <a:t>（経営企画）</a:t>
+                        <a:t>坪井</a:t>
                       </a:r>
                     </a:p>
                   </a:txBody>
@@ -11257,7 +11239,261 @@
                         </a:spcAft>
                       </a:pPr>
                       <a:r>
-                        <a:rPr sz="1050" b="0" i="0">
+                        <a:rPr sz="1000" b="0" i="0">
+                          <a:solidFill>
+                            <a:srgbClr val="262630"/>
+                          </a:solidFill>
+                          <a:latin typeface="Yu Gothic"/>
+                          <a:ea typeface="Yu Gothic"/>
+                          <a:cs typeface="Yu Gothic"/>
+                        </a:rPr>
+                        <a:t>確定（専任）</a:t>
+                      </a:r>
+                    </a:p>
+                  </a:txBody>
+                  <a:tcPr marL="54864" marR="54864" marT="18288" marB="18288" anchor="ctr">
+                    <a:solidFill>
+                      <a:srgbClr val="FFFFFF"/>
+                    </a:solidFill>
+                  </a:tcPr>
+                </a:tc>
+                <a:tc>
+                  <a:txBody>
+                    <a:bodyPr wrap="square"/>
+                    <a:lstStyle/>
+                    <a:p>
+                      <a:pPr algn="l">
+                        <a:spcAft>
+                          <a:spcPts val="100"/>
+                        </a:spcAft>
+                      </a:pPr>
+                      <a:r>
+                        <a:rPr sz="1000" b="0" i="0">
+                          <a:solidFill>
+                            <a:srgbClr val="262630"/>
+                          </a:solidFill>
+                          <a:latin typeface="Yu Gothic"/>
+                          <a:ea typeface="Yu Gothic"/>
+                          <a:cs typeface="Yu Gothic"/>
+                        </a:rPr>
+                        <a:t>改革の完遂：統合計画・KPI・データ品質・決定/リスク/未決の一元管理・エスカレーション</a:t>
+                      </a:r>
+                    </a:p>
+                  </a:txBody>
+                  <a:tcPr marL="54864" marR="54864" marT="18288" marB="18288" anchor="ctr">
+                    <a:solidFill>
+                      <a:srgbClr val="FFFFFF"/>
+                    </a:solidFill>
+                  </a:tcPr>
+                </a:tc>
+              </a:tr>
+              <a:tr h="548639">
+                <a:tc>
+                  <a:txBody>
+                    <a:bodyPr wrap="square"/>
+                    <a:lstStyle/>
+                    <a:p>
+                      <a:pPr algn="l">
+                        <a:spcAft>
+                          <a:spcPts val="100"/>
+                        </a:spcAft>
+                      </a:pPr>
+                      <a:r>
+                        <a:rPr sz="1000" b="1" i="0">
+                          <a:solidFill>
+                            <a:srgbClr val="3A106E"/>
+                          </a:solidFill>
+                          <a:latin typeface="Yu Gothic"/>
+                          <a:ea typeface="Yu Gothic"/>
+                          <a:cs typeface="Yu Gothic"/>
+                        </a:rPr>
+                        <a:t>戦略サポート</a:t>
+                      </a:r>
+                    </a:p>
+                  </a:txBody>
+                  <a:tcPr marL="54864" marR="54864" marT="18288" marB="18288" anchor="ctr">
+                    <a:solidFill>
+                      <a:srgbClr val="F7F7F9"/>
+                    </a:solidFill>
+                  </a:tcPr>
+                </a:tc>
+                <a:tc>
+                  <a:txBody>
+                    <a:bodyPr wrap="square"/>
+                    <a:lstStyle/>
+                    <a:p>
+                      <a:pPr algn="l">
+                        <a:spcAft>
+                          <a:spcPts val="100"/>
+                        </a:spcAft>
+                      </a:pPr>
+                      <a:r>
+                        <a:rPr sz="1000" b="0" i="0">
+                          <a:solidFill>
+                            <a:srgbClr val="262630"/>
+                          </a:solidFill>
+                          <a:latin typeface="Yu Gothic"/>
+                          <a:ea typeface="Yu Gothic"/>
+                          <a:cs typeface="Yu Gothic"/>
+                        </a:rPr>
+                        <a:t>大塩</a:t>
+                      </a:r>
+                    </a:p>
+                    <a:p>
+                      <a:pPr algn="l">
+                        <a:spcAft>
+                          <a:spcPts val="100"/>
+                        </a:spcAft>
+                      </a:pPr>
+                      <a:r>
+                        <a:rPr sz="1000" b="0" i="0">
+                          <a:solidFill>
+                            <a:srgbClr val="262630"/>
+                          </a:solidFill>
+                          <a:latin typeface="Yu Gothic"/>
+                          <a:ea typeface="Yu Gothic"/>
+                          <a:cs typeface="Yu Gothic"/>
+                        </a:rPr>
+                        <a:t>（経営企画）</a:t>
+                      </a:r>
+                    </a:p>
+                  </a:txBody>
+                  <a:tcPr marL="54864" marR="54864" marT="18288" marB="18288" anchor="ctr">
+                    <a:solidFill>
+                      <a:srgbClr val="F7F7F9"/>
+                    </a:solidFill>
+                  </a:tcPr>
+                </a:tc>
+                <a:tc>
+                  <a:txBody>
+                    <a:bodyPr wrap="square"/>
+                    <a:lstStyle/>
+                    <a:p>
+                      <a:pPr algn="l">
+                        <a:spcAft>
+                          <a:spcPts val="100"/>
+                        </a:spcAft>
+                      </a:pPr>
+                      <a:r>
+                        <a:rPr sz="1000" b="0" i="0">
+                          <a:solidFill>
+                            <a:srgbClr val="262630"/>
+                          </a:solidFill>
+                          <a:latin typeface="Yu Gothic"/>
+                          <a:ea typeface="Yu Gothic"/>
+                          <a:cs typeface="Yu Gothic"/>
+                        </a:rPr>
+                        <a:t>確定（兼務）</a:t>
+                      </a:r>
+                    </a:p>
+                  </a:txBody>
+                  <a:tcPr marL="54864" marR="54864" marT="18288" marB="18288" anchor="ctr">
+                    <a:solidFill>
+                      <a:srgbClr val="F7F7F9"/>
+                    </a:solidFill>
+                  </a:tcPr>
+                </a:tc>
+                <a:tc>
+                  <a:txBody>
+                    <a:bodyPr wrap="square"/>
+                    <a:lstStyle/>
+                    <a:p>
+                      <a:pPr algn="l">
+                        <a:spcAft>
+                          <a:spcPts val="100"/>
+                        </a:spcAft>
+                      </a:pPr>
+                      <a:r>
+                        <a:rPr sz="1000" b="0" i="0">
+                          <a:solidFill>
+                            <a:srgbClr val="262630"/>
+                          </a:solidFill>
+                          <a:latin typeface="Yu Gothic"/>
+                          <a:ea typeface="Yu Gothic"/>
+                          <a:cs typeface="Yu Gothic"/>
+                        </a:rPr>
+                        <a:t>読み管理原案・経営向け論点整理・HD経企との接続</a:t>
+                      </a:r>
+                    </a:p>
+                  </a:txBody>
+                  <a:tcPr marL="54864" marR="54864" marT="18288" marB="18288" anchor="ctr">
+                    <a:solidFill>
+                      <a:srgbClr val="F7F7F9"/>
+                    </a:solidFill>
+                  </a:tcPr>
+                </a:tc>
+              </a:tr>
+              <a:tr h="548644">
+                <a:tc>
+                  <a:txBody>
+                    <a:bodyPr wrap="square"/>
+                    <a:lstStyle/>
+                    <a:p>
+                      <a:pPr algn="l">
+                        <a:spcAft>
+                          <a:spcPts val="100"/>
+                        </a:spcAft>
+                      </a:pPr>
+                      <a:r>
+                        <a:rPr sz="1000" b="1" i="0">
+                          <a:solidFill>
+                            <a:srgbClr val="3A106E"/>
+                          </a:solidFill>
+                          <a:latin typeface="Yu Gothic"/>
+                          <a:ea typeface="Yu Gothic"/>
+                          <a:cs typeface="Yu Gothic"/>
+                        </a:rPr>
+                        <a:t>財務リエゾン</a:t>
+                      </a:r>
+                    </a:p>
+                  </a:txBody>
+                  <a:tcPr marL="54864" marR="54864" marT="18288" marB="18288" anchor="ctr">
+                    <a:solidFill>
+                      <a:srgbClr val="FFFFFF"/>
+                    </a:solidFill>
+                  </a:tcPr>
+                </a:tc>
+                <a:tc>
+                  <a:txBody>
+                    <a:bodyPr wrap="square"/>
+                    <a:lstStyle/>
+                    <a:p>
+                      <a:pPr algn="l">
+                        <a:spcAft>
+                          <a:spcPts val="100"/>
+                        </a:spcAft>
+                      </a:pPr>
+                      <a:r>
+                        <a:rPr sz="1000" b="0" i="0">
+                          <a:solidFill>
+                            <a:srgbClr val="262630"/>
+                          </a:solidFill>
+                          <a:latin typeface="Yu Gothic"/>
+                          <a:ea typeface="Yu Gothic"/>
+                          <a:cs typeface="Yu Gothic"/>
+                        </a:rPr>
+                        <a:t>柳沼</a:t>
+                      </a:r>
+                    </a:p>
+                  </a:txBody>
+                  <a:tcPr marL="54864" marR="54864" marT="18288" marB="18288" anchor="ctr">
+                    <a:solidFill>
+                      <a:srgbClr val="FFFFFF"/>
+                    </a:solidFill>
+                  </a:tcPr>
+                </a:tc>
+                <a:tc>
+                  <a:txBody>
+                    <a:bodyPr wrap="square"/>
+                    <a:lstStyle/>
+                    <a:p>
+                      <a:pPr algn="l">
+                        <a:spcAft>
+                          <a:spcPts val="100"/>
+                        </a:spcAft>
+                      </a:pPr>
+                      <a:r>
+                        <a:rPr sz="1000" b="0" i="0">
                           <a:solidFill>
                             <a:srgbClr val="262630"/>
                           </a:solidFill>
@@ -11286,243 +11522,7 @@
                         </a:spcAft>
                       </a:pPr>
                       <a:r>
-                        <a:rPr sz="1050" b="0" i="0">
-                          <a:solidFill>
-                            <a:srgbClr val="262630"/>
-                          </a:solidFill>
-                          <a:latin typeface="Yu Gothic"/>
-                          <a:ea typeface="Yu Gothic"/>
-                          <a:cs typeface="Yu Gothic"/>
-                        </a:rPr>
-                        <a:t>戦略面の支援：経営向け論点整理・KPI設計・経営企画との接続</a:t>
-                      </a:r>
-                    </a:p>
-                  </a:txBody>
-                  <a:tcPr marL="54864" marR="54864" marT="18288" marB="18288" anchor="ctr">
-                    <a:solidFill>
-                      <a:srgbClr val="FFFFFF"/>
-                    </a:solidFill>
-                  </a:tcPr>
-                </a:tc>
-              </a:tr>
-              <a:tr h="566928">
-                <a:tc>
-                  <a:txBody>
-                    <a:bodyPr wrap="square"/>
-                    <a:lstStyle/>
-                    <a:p>
-                      <a:pPr algn="l">
-                        <a:spcAft>
-                          <a:spcPts val="100"/>
-                        </a:spcAft>
-                      </a:pPr>
-                      <a:r>
-                        <a:rPr sz="1050" b="1" i="0">
-                          <a:solidFill>
-                            <a:srgbClr val="3A106E"/>
-                          </a:solidFill>
-                          <a:latin typeface="Yu Gothic"/>
-                          <a:ea typeface="Yu Gothic"/>
-                          <a:cs typeface="Yu Gothic"/>
-                        </a:rPr>
-                        <a:t>PMO・会議運営</a:t>
-                      </a:r>
-                    </a:p>
-                  </a:txBody>
-                  <a:tcPr marL="54864" marR="54864" marT="18288" marB="18288" anchor="ctr">
-                    <a:solidFill>
-                      <a:srgbClr val="F7F7F9"/>
-                    </a:solidFill>
-                  </a:tcPr>
-                </a:tc>
-                <a:tc>
-                  <a:txBody>
-                    <a:bodyPr wrap="square"/>
-                    <a:lstStyle/>
-                    <a:p>
-                      <a:pPr algn="l">
-                        <a:spcAft>
-                          <a:spcPts val="100"/>
-                        </a:spcAft>
-                      </a:pPr>
-                      <a:r>
-                        <a:rPr sz="1050" b="0" i="0">
-                          <a:solidFill>
-                            <a:srgbClr val="262630"/>
-                          </a:solidFill>
-                          <a:latin typeface="Yu Gothic"/>
-                          <a:ea typeface="Yu Gothic"/>
-                          <a:cs typeface="Yu Gothic"/>
-                        </a:rPr>
-                        <a:t>相談中</a:t>
-                      </a:r>
-                    </a:p>
-                  </a:txBody>
-                  <a:tcPr marL="54864" marR="54864" marT="18288" marB="18288" anchor="ctr">
-                    <a:solidFill>
-                      <a:srgbClr val="F7F7F9"/>
-                    </a:solidFill>
-                  </a:tcPr>
-                </a:tc>
-                <a:tc>
-                  <a:txBody>
-                    <a:bodyPr wrap="square"/>
-                    <a:lstStyle/>
-                    <a:p>
-                      <a:pPr algn="l">
-                        <a:spcAft>
-                          <a:spcPts val="100"/>
-                        </a:spcAft>
-                      </a:pPr>
-                      <a:r>
-                        <a:rPr sz="1050" b="0" i="0">
-                          <a:solidFill>
-                            <a:srgbClr val="262630"/>
-                          </a:solidFill>
-                          <a:latin typeface="Yu Gothic"/>
-                          <a:ea typeface="Yu Gothic"/>
-                          <a:cs typeface="Yu Gothic"/>
-                        </a:rPr>
-                        <a:t>専任想定</a:t>
-                      </a:r>
-                    </a:p>
-                  </a:txBody>
-                  <a:tcPr marL="54864" marR="54864" marT="18288" marB="18288" anchor="ctr">
-                    <a:solidFill>
-                      <a:srgbClr val="F7F7F9"/>
-                    </a:solidFill>
-                  </a:tcPr>
-                </a:tc>
-                <a:tc>
-                  <a:txBody>
-                    <a:bodyPr wrap="square"/>
-                    <a:lstStyle/>
-                    <a:p>
-                      <a:pPr algn="l">
-                        <a:spcAft>
-                          <a:spcPts val="100"/>
-                        </a:spcAft>
-                      </a:pPr>
-                      <a:r>
-                        <a:rPr sz="1050" b="0" i="0">
-                          <a:solidFill>
-                            <a:srgbClr val="262630"/>
-                          </a:solidFill>
-                          <a:latin typeface="Yu Gothic"/>
-                          <a:ea typeface="Yu Gothic"/>
-                          <a:cs typeface="Yu Gothic"/>
-                        </a:rPr>
-                        <a:t>会議の日程・アジェンダ・議事録・宿題管理</a:t>
-                      </a:r>
-                    </a:p>
-                  </a:txBody>
-                  <a:tcPr marL="54864" marR="54864" marT="18288" marB="18288" anchor="ctr">
-                    <a:solidFill>
-                      <a:srgbClr val="F7F7F9"/>
-                    </a:solidFill>
-                  </a:tcPr>
-                </a:tc>
-              </a:tr>
-              <a:tr h="566928">
-                <a:tc>
-                  <a:txBody>
-                    <a:bodyPr wrap="square"/>
-                    <a:lstStyle/>
-                    <a:p>
-                      <a:pPr algn="l">
-                        <a:spcAft>
-                          <a:spcPts val="100"/>
-                        </a:spcAft>
-                      </a:pPr>
-                      <a:r>
-                        <a:rPr sz="1050" b="1" i="0">
-                          <a:solidFill>
-                            <a:srgbClr val="3A106E"/>
-                          </a:solidFill>
-                          <a:latin typeface="Yu Gothic"/>
-                          <a:ea typeface="Yu Gothic"/>
-                          <a:cs typeface="Yu Gothic"/>
-                        </a:rPr>
-                        <a:t>財務リエゾン</a:t>
-                      </a:r>
-                    </a:p>
-                  </a:txBody>
-                  <a:tcPr marL="54864" marR="54864" marT="18288" marB="18288" anchor="ctr">
-                    <a:solidFill>
-                      <a:srgbClr val="FFFFFF"/>
-                    </a:solidFill>
-                  </a:tcPr>
-                </a:tc>
-                <a:tc>
-                  <a:txBody>
-                    <a:bodyPr wrap="square"/>
-                    <a:lstStyle/>
-                    <a:p>
-                      <a:pPr algn="l">
-                        <a:spcAft>
-                          <a:spcPts val="100"/>
-                        </a:spcAft>
-                      </a:pPr>
-                      <a:r>
-                        <a:rPr sz="1050" b="0" i="0">
-                          <a:solidFill>
-                            <a:srgbClr val="262630"/>
-                          </a:solidFill>
-                          <a:latin typeface="Yu Gothic"/>
-                          <a:ea typeface="Yu Gothic"/>
-                          <a:cs typeface="Yu Gothic"/>
-                        </a:rPr>
-                        <a:t>相談中</a:t>
-                      </a:r>
-                    </a:p>
-                  </a:txBody>
-                  <a:tcPr marL="54864" marR="54864" marT="18288" marB="18288" anchor="ctr">
-                    <a:solidFill>
-                      <a:srgbClr val="FFFFFF"/>
-                    </a:solidFill>
-                  </a:tcPr>
-                </a:tc>
-                <a:tc>
-                  <a:txBody>
-                    <a:bodyPr wrap="square"/>
-                    <a:lstStyle/>
-                    <a:p>
-                      <a:pPr algn="l">
-                        <a:spcAft>
-                          <a:spcPts val="100"/>
-                        </a:spcAft>
-                      </a:pPr>
-                      <a:r>
-                        <a:rPr sz="1050" b="0" i="0">
-                          <a:solidFill>
-                            <a:srgbClr val="262630"/>
-                          </a:solidFill>
-                          <a:latin typeface="Yu Gothic"/>
-                          <a:ea typeface="Yu Gothic"/>
-                          <a:cs typeface="Yu Gothic"/>
-                        </a:rPr>
-                        <a:t>兼務想定</a:t>
-                      </a:r>
-                    </a:p>
-                  </a:txBody>
-                  <a:tcPr marL="54864" marR="54864" marT="18288" marB="18288" anchor="ctr">
-                    <a:solidFill>
-                      <a:srgbClr val="FFFFFF"/>
-                    </a:solidFill>
-                  </a:tcPr>
-                </a:tc>
-                <a:tc>
-                  <a:txBody>
-                    <a:bodyPr wrap="square"/>
-                    <a:lstStyle/>
-                    <a:p>
-                      <a:pPr algn="l">
-                        <a:spcAft>
-                          <a:spcPts val="100"/>
-                        </a:spcAft>
-                      </a:pPr>
-                      <a:r>
-                        <a:rPr sz="1050" b="0" i="0">
+                        <a:rPr sz="1000" b="0" i="0">
                           <a:solidFill>
                             <a:srgbClr val="262630"/>
                           </a:solidFill>
@@ -11669,7 +11669,7 @@
                 <a:ea typeface="Yu Gothic"/>
                 <a:cs typeface="Yu Gothic"/>
               </a:rPr>
-              <a:t>相談中の2枠が確定するまで、日程調整などの最小限は新谷・坪井でカバーします。人選はご相談させてください。本改革は円谷プロ単独ではなく、ホールディングスもコミットする取り組みです（グループ経営企画がSTOを支援）</a:t>
+              <a:t>体制は全枠確定しました（7/16決定）。本改革は円谷プロ単独ではなく、ホールディングスもコミットする取り組みです（グループ経営企画がSTOを支援）</a:t>
             </a:r>
           </a:p>
         </p:txBody>

--- a/docs/営業改革_部長会進捗共有_20260714.pptx
+++ b/docs/営業改革_部長会進捗共有_20260714.pptx
@@ -11100,7 +11100,7 @@
                           <a:ea typeface="Yu Gothic"/>
                           <a:cs typeface="Yu Gothic"/>
                         </a:rPr>
-                        <a:t>小澤</a:t>
+                        <a:t>小沢</a:t>
                       </a:r>
                     </a:p>
                   </a:txBody>

--- a/docs/営業改革_部長会進捗共有_20260714.pptx
+++ b/docs/営業改革_部長会進捗共有_20260714.pptx
@@ -11247,7 +11247,7 @@
                           <a:ea typeface="Yu Gothic"/>
                           <a:cs typeface="Yu Gothic"/>
                         </a:rPr>
-                        <a:t>確定（専任）</a:t>
+                        <a:t>確定（兼務）</a:t>
                       </a:r>
                     </a:p>
                   </a:txBody>
